--- a/media/exports/reports/2026-08/cash-payroll.pptx
+++ b/media/exports/reports/2026-08/cash-payroll.pptx
@@ -543,367 +543,367 @@
                   <c:v>88000</c:v>
                 </c:pt>
                 <c:pt idx="1">
-                  <c:v>112411</c:v>
+                  <c:v>88000</c:v>
                 </c:pt>
                 <c:pt idx="2">
-                  <c:v>124362</c:v>
+                  <c:v>132701</c:v>
                 </c:pt>
                 <c:pt idx="3">
-                  <c:v>139672</c:v>
+                  <c:v>151542</c:v>
                 </c:pt>
                 <c:pt idx="4">
-                  <c:v>140540</c:v>
+                  <c:v>152596</c:v>
                 </c:pt>
                 <c:pt idx="5">
-                  <c:v>134936</c:v>
+                  <c:v>155460</c:v>
                 </c:pt>
                 <c:pt idx="6">
-                  <c:v>135317</c:v>
+                  <c:v>155919</c:v>
                 </c:pt>
                 <c:pt idx="7">
-                  <c:v>147735</c:v>
+                  <c:v>155919</c:v>
                 </c:pt>
                 <c:pt idx="8">
-                  <c:v>157535</c:v>
+                  <c:v>155919</c:v>
                 </c:pt>
                 <c:pt idx="9">
-                  <c:v>159179</c:v>
+                  <c:v>185269</c:v>
                 </c:pt>
                 <c:pt idx="10">
-                  <c:v>160618</c:v>
+                  <c:v>187001</c:v>
                 </c:pt>
                 <c:pt idx="11">
-                  <c:v>160999</c:v>
+                  <c:v>187001</c:v>
                 </c:pt>
                 <c:pt idx="12">
-                  <c:v>161655</c:v>
+                  <c:v>188241</c:v>
                 </c:pt>
                 <c:pt idx="13">
-                  <c:v>162638</c:v>
+                  <c:v>189402</c:v>
                 </c:pt>
                 <c:pt idx="14">
-                  <c:v>163871</c:v>
+                  <c:v>189402</c:v>
                 </c:pt>
                 <c:pt idx="15">
-                  <c:v>164213</c:v>
+                  <c:v>189402</c:v>
                 </c:pt>
                 <c:pt idx="16">
-                  <c:v>117019</c:v>
+                  <c:v>139498</c:v>
                 </c:pt>
                 <c:pt idx="17">
-                  <c:v>118547</c:v>
+                  <c:v>141308</c:v>
                 </c:pt>
                 <c:pt idx="18">
-                  <c:v>119573</c:v>
+                  <c:v>142555</c:v>
                 </c:pt>
                 <c:pt idx="19">
-                  <c:v>82483</c:v>
+                  <c:v>106665</c:v>
                 </c:pt>
                 <c:pt idx="20">
-                  <c:v>82483</c:v>
+                  <c:v>106665</c:v>
                 </c:pt>
                 <c:pt idx="21">
-                  <c:v>84321</c:v>
+                  <c:v>106665</c:v>
                 </c:pt>
                 <c:pt idx="22">
-                  <c:v>85990</c:v>
+                  <c:v>106665</c:v>
                 </c:pt>
                 <c:pt idx="23">
-                  <c:v>87510</c:v>
+                  <c:v>112651</c:v>
                 </c:pt>
                 <c:pt idx="24">
-                  <c:v>88034</c:v>
+                  <c:v>113267</c:v>
                 </c:pt>
                 <c:pt idx="25">
-                  <c:v>105372</c:v>
+                  <c:v>134548</c:v>
                 </c:pt>
                 <c:pt idx="26">
-                  <c:v>106041</c:v>
+                  <c:v>135343</c:v>
                 </c:pt>
                 <c:pt idx="27">
-                  <c:v>102428</c:v>
+                  <c:v>132018</c:v>
                 </c:pt>
                 <c:pt idx="28">
-                  <c:v>104108</c:v>
+                  <c:v>132018</c:v>
                 </c:pt>
                 <c:pt idx="29">
-                  <c:v>104818</c:v>
+                  <c:v>132018</c:v>
                 </c:pt>
                 <c:pt idx="30">
-                  <c:v>65263</c:v>
+                  <c:v>92859</c:v>
                 </c:pt>
                 <c:pt idx="31">
-                  <c:v>65263</c:v>
+                  <c:v>92859</c:v>
                 </c:pt>
                 <c:pt idx="32">
-                  <c:v>65263</c:v>
+                  <c:v>92859</c:v>
                 </c:pt>
                 <c:pt idx="33">
-                  <c:v>28828</c:v>
+                  <c:v>56248</c:v>
                 </c:pt>
                 <c:pt idx="34">
-                  <c:v>30094</c:v>
+                  <c:v>57783</c:v>
                 </c:pt>
                 <c:pt idx="35">
-                  <c:v>31359</c:v>
+                  <c:v>57783</c:v>
                 </c:pt>
                 <c:pt idx="36">
-                  <c:v>71125</c:v>
+                  <c:v>57783</c:v>
                 </c:pt>
                 <c:pt idx="37">
-                  <c:v>91344</c:v>
+                  <c:v>134475</c:v>
                 </c:pt>
                 <c:pt idx="38">
-                  <c:v>91344</c:v>
+                  <c:v>134475</c:v>
                 </c:pt>
                 <c:pt idx="39">
-                  <c:v>92609</c:v>
+                  <c:v>134475</c:v>
                 </c:pt>
                 <c:pt idx="40">
-                  <c:v>93874</c:v>
+                  <c:v>136011</c:v>
                 </c:pt>
                 <c:pt idx="41">
-                  <c:v>95140</c:v>
+                  <c:v>137546</c:v>
                 </c:pt>
                 <c:pt idx="42">
-                  <c:v>96405</c:v>
+                  <c:v>137546</c:v>
                 </c:pt>
                 <c:pt idx="43">
-                  <c:v>118970</c:v>
+                  <c:v>137546</c:v>
                 </c:pt>
                 <c:pt idx="44">
-                  <c:v>118970</c:v>
+                  <c:v>168442</c:v>
                 </c:pt>
                 <c:pt idx="45">
-                  <c:v>72455</c:v>
+                  <c:v>117276</c:v>
                 </c:pt>
                 <c:pt idx="46">
-                  <c:v>73721</c:v>
+                  <c:v>117276</c:v>
                 </c:pt>
                 <c:pt idx="47">
-                  <c:v>37286</c:v>
+                  <c:v>82200</c:v>
                 </c:pt>
                 <c:pt idx="48">
-                  <c:v>55352</c:v>
+                  <c:v>104416</c:v>
                 </c:pt>
                 <c:pt idx="49">
-                  <c:v>56617</c:v>
+                  <c:v>104416</c:v>
                 </c:pt>
                 <c:pt idx="50">
-                  <c:v>57882</c:v>
+                  <c:v>104416</c:v>
                 </c:pt>
                 <c:pt idx="51">
-                  <c:v>57882</c:v>
+                  <c:v>109022</c:v>
                 </c:pt>
                 <c:pt idx="52">
-                  <c:v>57882</c:v>
+                  <c:v>109022</c:v>
                 </c:pt>
                 <c:pt idx="53">
-                  <c:v>78748</c:v>
+                  <c:v>133222</c:v>
                 </c:pt>
                 <c:pt idx="54">
-                  <c:v>80013</c:v>
+                  <c:v>134757</c:v>
                 </c:pt>
                 <c:pt idx="55">
-                  <c:v>81278</c:v>
+                  <c:v>136292</c:v>
                 </c:pt>
                 <c:pt idx="56">
-                  <c:v>82544</c:v>
+                  <c:v>136292</c:v>
                 </c:pt>
                 <c:pt idx="57">
-                  <c:v>97209</c:v>
+                  <c:v>136292</c:v>
                 </c:pt>
                 <c:pt idx="58">
-                  <c:v>92209</c:v>
+                  <c:v>152398</c:v>
                 </c:pt>
                 <c:pt idx="59">
-                  <c:v>92209</c:v>
+                  <c:v>152398</c:v>
                 </c:pt>
                 <c:pt idx="60">
-                  <c:v>45860</c:v>
+                  <c:v>100131</c:v>
                 </c:pt>
                 <c:pt idx="61">
-                  <c:v>55083</c:v>
+                  <c:v>121395</c:v>
                 </c:pt>
                 <c:pt idx="62">
-                  <c:v>61505</c:v>
+                  <c:v>129385</c:v>
                 </c:pt>
                 <c:pt idx="63">
-                  <c:v>67928</c:v>
+                  <c:v>129385</c:v>
                 </c:pt>
                 <c:pt idx="64">
-                  <c:v>74351</c:v>
+                  <c:v>129385</c:v>
                 </c:pt>
                 <c:pt idx="65">
-                  <c:v>74351</c:v>
+                  <c:v>129385</c:v>
                 </c:pt>
                 <c:pt idx="66">
-                  <c:v>74351</c:v>
+                  <c:v>146900</c:v>
                 </c:pt>
                 <c:pt idx="67">
-                  <c:v>80774</c:v>
+                  <c:v>153354</c:v>
                 </c:pt>
                 <c:pt idx="68">
-                  <c:v>87197</c:v>
+                  <c:v>159809</c:v>
                 </c:pt>
                 <c:pt idx="69">
-                  <c:v>93620</c:v>
+                  <c:v>167799</c:v>
                 </c:pt>
                 <c:pt idx="70">
-                  <c:v>100043</c:v>
+                  <c:v>167799</c:v>
                 </c:pt>
                 <c:pt idx="71">
-                  <c:v>106466</c:v>
+                  <c:v>167799</c:v>
                 </c:pt>
                 <c:pt idx="72">
-                  <c:v>106466</c:v>
+                  <c:v>185314</c:v>
                 </c:pt>
                 <c:pt idx="73">
-                  <c:v>106466</c:v>
+                  <c:v>185314</c:v>
                 </c:pt>
                 <c:pt idx="74">
-                  <c:v>112889</c:v>
+                  <c:v>191768</c:v>
                 </c:pt>
                 <c:pt idx="75">
-                  <c:v>35097</c:v>
+                  <c:v>111981</c:v>
                 </c:pt>
                 <c:pt idx="76">
-                  <c:v>41520</c:v>
+                  <c:v>119971</c:v>
                 </c:pt>
                 <c:pt idx="77">
-                  <c:v>47943</c:v>
+                  <c:v>119971</c:v>
                 </c:pt>
                 <c:pt idx="78">
-                  <c:v>54366</c:v>
+                  <c:v>119971</c:v>
                 </c:pt>
                 <c:pt idx="79">
-                  <c:v>54366</c:v>
+                  <c:v>137486</c:v>
                 </c:pt>
                 <c:pt idx="80">
-                  <c:v>54366</c:v>
+                  <c:v>137486</c:v>
                 </c:pt>
                 <c:pt idx="81">
-                  <c:v>60789</c:v>
+                  <c:v>143940</c:v>
                 </c:pt>
                 <c:pt idx="82">
-                  <c:v>67212</c:v>
+                  <c:v>151930</c:v>
                 </c:pt>
                 <c:pt idx="83">
-                  <c:v>73635</c:v>
+                  <c:v>159920</c:v>
                 </c:pt>
                 <c:pt idx="84">
-                  <c:v>80058</c:v>
+                  <c:v>159920</c:v>
                 </c:pt>
                 <c:pt idx="85">
-                  <c:v>86481</c:v>
+                  <c:v>159920</c:v>
                 </c:pt>
                 <c:pt idx="86">
-                  <c:v>86481</c:v>
+                  <c:v>177435</c:v>
                 </c:pt>
                 <c:pt idx="87">
-                  <c:v>86481</c:v>
+                  <c:v>177435</c:v>
                 </c:pt>
                 <c:pt idx="88">
-                  <c:v>82392</c:v>
+                  <c:v>92669</c:v>
                 </c:pt>
                 <c:pt idx="89">
-                  <c:v>51115</c:v>
+                  <c:v>64048</c:v>
                 </c:pt>
                 <c:pt idx="90">
-                  <c:v>57538</c:v>
+                  <c:v>72038</c:v>
                 </c:pt>
                 <c:pt idx="91">
-                  <c:v>104461</c:v>
+                  <c:v>72038</c:v>
                 </c:pt>
                 <c:pt idx="92">
-                  <c:v>110883</c:v>
+                  <c:v>72038</c:v>
                 </c:pt>
                 <c:pt idx="93">
-                  <c:v>63268</c:v>
+                  <c:v>87171</c:v>
                 </c:pt>
                 <c:pt idx="94">
-                  <c:v>63268</c:v>
+                  <c:v>87171</c:v>
                 </c:pt>
                 <c:pt idx="95">
-                  <c:v>69691</c:v>
+                  <c:v>87171</c:v>
                 </c:pt>
                 <c:pt idx="96">
-                  <c:v>76114</c:v>
+                  <c:v>95160</c:v>
                 </c:pt>
                 <c:pt idx="97">
-                  <c:v>82537</c:v>
+                  <c:v>103150</c:v>
                 </c:pt>
                 <c:pt idx="98">
-                  <c:v>88960</c:v>
+                  <c:v>103150</c:v>
                 </c:pt>
                 <c:pt idx="99">
-                  <c:v>95383</c:v>
+                  <c:v>103150</c:v>
                 </c:pt>
                 <c:pt idx="100">
-                  <c:v>95383</c:v>
+                  <c:v>120665</c:v>
                 </c:pt>
                 <c:pt idx="101">
-                  <c:v>95383</c:v>
+                  <c:v>120665</c:v>
                 </c:pt>
                 <c:pt idx="102">
-                  <c:v>101806</c:v>
+                  <c:v>127120</c:v>
                 </c:pt>
                 <c:pt idx="103">
-                  <c:v>70529</c:v>
+                  <c:v>98498</c:v>
                 </c:pt>
                 <c:pt idx="104">
-                  <c:v>76952</c:v>
+                  <c:v>106488</c:v>
                 </c:pt>
                 <c:pt idx="105">
-                  <c:v>83375</c:v>
+                  <c:v>106488</c:v>
                 </c:pt>
                 <c:pt idx="106">
-                  <c:v>89798</c:v>
+                  <c:v>106488</c:v>
                 </c:pt>
                 <c:pt idx="107">
-                  <c:v>43283</c:v>
+                  <c:v>72837</c:v>
                 </c:pt>
                 <c:pt idx="108">
-                  <c:v>43283</c:v>
+                  <c:v>72837</c:v>
                 </c:pt>
                 <c:pt idx="109">
-                  <c:v>49706</c:v>
+                  <c:v>79292</c:v>
                 </c:pt>
                 <c:pt idx="110">
-                  <c:v>56129</c:v>
+                  <c:v>87281</c:v>
                 </c:pt>
                 <c:pt idx="111">
-                  <c:v>62552</c:v>
+                  <c:v>95271</c:v>
                 </c:pt>
                 <c:pt idx="112">
-                  <c:v>68975</c:v>
+                  <c:v>95271</c:v>
                 </c:pt>
                 <c:pt idx="113">
-                  <c:v>75398</c:v>
+                  <c:v>95271</c:v>
                 </c:pt>
                 <c:pt idx="114">
-                  <c:v>75398</c:v>
+                  <c:v>112786</c:v>
                 </c:pt>
                 <c:pt idx="115">
-                  <c:v>75398</c:v>
+                  <c:v>112786</c:v>
                 </c:pt>
                 <c:pt idx="116">
-                  <c:v>81821</c:v>
+                  <c:v>119241</c:v>
                 </c:pt>
                 <c:pt idx="117">
-                  <c:v>50544</c:v>
+                  <c:v>90619</c:v>
                 </c:pt>
                 <c:pt idx="118">
-                  <c:v>56967</c:v>
+                  <c:v>98609</c:v>
                 </c:pt>
                 <c:pt idx="119">
-                  <c:v>63390</c:v>
+                  <c:v>98609</c:v>
                 </c:pt>
                 <c:pt idx="120">
-                  <c:v>69813</c:v>
+                  <c:v>98609</c:v>
                 </c:pt>
                 <c:pt idx="121">
-                  <c:v>17198</c:v>
+                  <c:v>58857</c:v>
                 </c:pt>
               </c:numCache>
             </c:numRef>
@@ -1086,24 +1086,35 @@
               </a:solidFill>
             </c:spPr>
           </c:dPt>
+          <c:dPt>
+            <c:idx val="5"/>
+            <c:spPr>
+              <a:solidFill>
+                <a:srgbClr val="0E9F6E"/>
+              </a:solidFill>
+            </c:spPr>
+          </c:dPt>
           <c:cat>
             <c:strRef>
-              <c:f>Sheet1!$A$2:$A$6</c:f>
+              <c:f>Sheet1!$A$2:$A$7</c:f>
               <c:strCache>
-                <c:ptCount val="5"/>
+                <c:ptCount val="6"/>
                 <c:pt idx="0">
                   <c:v>Suppliers and overheads</c:v>
                 </c:pt>
                 <c:pt idx="1">
-                  <c:v>Wages (2 pay runs)</c:v>
+                  <c:v>Pay runs (2)</c:v>
                 </c:pt>
                 <c:pt idx="2">
-                  <c:v>Tax, interest and equipment finance</c:v>
+                  <c:v>Interest and equipment finance</c:v>
                 </c:pt>
                 <c:pt idx="3">
+                  <c:v>BAS (GST and PAYG)</c:v>
+                </c:pt>
+                <c:pt idx="4">
                   <c:v>New work collected</c:v>
                 </c:pt>
-                <c:pt idx="4">
+                <c:pt idx="5">
                   <c:v>Unpaid invoices collected</c:v>
                 </c:pt>
               </c:strCache>
@@ -1111,24 +1122,27 @@
           </c:cat>
           <c:val>
             <c:numRef>
-              <c:f>Sheet1!$B$2:$B$6</c:f>
+              <c:f>Sheet1!$B$2:$B$7</c:f>
               <c:numCache>
                 <c:formatCode>$#,##0;[Red]($#,##0);"-"</c:formatCode>
-                <c:ptCount val="5"/>
+                <c:ptCount val="6"/>
                 <c:pt idx="0">
-                  <c:v>-93030</c:v>
+                  <c:v>-102333</c:v>
                 </c:pt>
                 <c:pt idx="1">
-                  <c:v>-75400</c:v>
+                  <c:v>-73222</c:v>
                 </c:pt>
                 <c:pt idx="2">
                   <c:v>-6100</c:v>
                 </c:pt>
                 <c:pt idx="3">
-                  <c:v>25308</c:v>
+                  <c:v>0</c:v>
                 </c:pt>
                 <c:pt idx="4">
-                  <c:v>129819</c:v>
+                  <c:v>29171</c:v>
+                </c:pt>
+                <c:pt idx="5">
+                  <c:v>159756</c:v>
                 </c:pt>
               </c:numCache>
             </c:numRef>
@@ -1192,8 +1206,8 @@
       <c:valAx>
         <c:axId val="-2113994440"/>
         <c:scaling>
-          <c:max val="149291.84999999998"/>
-          <c:min val="-106984.49999999999"/>
+          <c:max val="183719.4"/>
+          <c:min val="-117682.95"/>
         </c:scaling>
         <c:delete/>
         <c:axPos val="b"/>
@@ -1619,7 +1633,7 @@
           <a:lstStyle/>
           <a:p>
             <a:r>
-              <a:t>Will cash cover payroll next month?. Sample Electrical &amp; Air Pty Ltd. Period: August 2026. A 13-week cash forecast from 31 August: cash at bank, plus what customers owe on their usual payment dates and new work at its recent rate, less pay runs, supplier bills, tax and finance on their due dates. Every day opens its workings.</a:t>
+              <a:t>Will cash cover payroll next month?. Sample Electrical &amp; Air Pty Ltd. Period: August 2026. A 13-week cash forecast from 31 August: cash at bank, plus what customers owe on their usual payment dates and new work at its recent rate, less pay runs, supplier bills, the BAS and finance on their due dates. Every day opens its workings.</a:t>
             </a:r>
           </a:p>
         </p:txBody>
@@ -1689,7 +1703,7 @@
           <a:lstStyle/>
           <a:p>
             <a:r>
-              <a:t>Will cash cover payroll next month?. Cash at bank, 31 Aug: $65,263; Wages to pay in September: $75,400; After the tightest pay run, 3 Sep: $28,828; Lowest point, next 13 weeks: $17,198. Cash at bank was $65,263 at 31 August. September has 2 pay runs ($75,400). The tightest is 3 September: $28,828 left after paying wages, less than one pay run ($37,700) in reserve. The lowest point in the 13 weeks is $17,198 on 30 November. 15 invoices ($20,219) are already past the customer's usual payment date; the forecast assumes they arrive within a week. Without them, 3 September would be $8,609.</a:t>
+              <a:t>Will cash cover payroll next month?. Cash at bank, 31 Aug: $92,859; Paid to employees in September: $73,222; After the tightest pay run, 3 Sep: $56,248; Lowest point, next 13 weeks: $56,248. Cash at bank was $92,859 at 31 August. September has 2 pay runs ($73,222). The tightest is 3 September: $56,248 left after paying wages, $19,637 more than a pay run in reserve. The lowest point in the 13 weeks is $56,248 on 3 September. 15 invoices ($24,676) are already past the customer's usual payment date; the forecast assumes they arrive within a week. Without them, the lowest point would be $34,181. The July to September BAS ($86,220, estimated) is due 28 October: GST $33,132, PAYG withheld $47,754 and the PAYG instalment $5,334.</a:t>
             </a:r>
           </a:p>
         </p:txBody>
@@ -1759,7 +1773,7 @@
           <a:lstStyle/>
           <a:p>
             <a:r>
-              <a:t>How this forecast has done so far. For 5 October it said $74,351; the bank says $47,244, $27,107 less.</a:t>
+              <a:t>September: where the cash comes from and goes (forecast). Money in, and money out in brackets. Includes GST.</a:t>
             </a:r>
           </a:p>
         </p:txBody>
@@ -1829,7 +1843,7 @@
           <a:lstStyle/>
           <a:p>
             <a:r>
-              <a:t>September: where the cash comes from and goes (forecast). Money in, and money out in brackets.</a:t>
+              <a:t>13 weeks, week by week. Lowest in the week: amber below one pay run ($36,611), red below zero. Amounts include GST.</a:t>
             </a:r>
           </a:p>
         </p:txBody>
@@ -1899,7 +1913,7 @@
           <a:lstStyle/>
           <a:p>
             <a:r>
-              <a:t>13 weeks, week by week. Lowest in the week: amber below one pay run ($37,700), red below zero.</a:t>
+              <a:t>Invoices past the customer's usual payment date ($24,676): the forecast assumes these arrive within a week (1 of 2)</a:t>
             </a:r>
           </a:p>
         </p:txBody>
@@ -1969,7 +1983,7 @@
           <a:lstStyle/>
           <a:p>
             <a:r>
-              <a:t>Invoices past the customer's usual payment date ($20,219)</a:t>
+              <a:t>Invoices past the customer's usual payment date ($24,676): the forecast assumes these arrive within a week (2 of 2)</a:t>
             </a:r>
           </a:p>
         </p:txBody>
@@ -5219,7 +5233,7 @@
                 </a:solidFill>
                 <a:latin typeface="Roboto"/>
               </a:rPr>
-              <a:t>Period: August 2026. A 13-week cash forecast from 31 August: cash at bank, plus what customers owe on their usual payment dates and new work at its recent rate, less pay runs, supplier bills, tax and finance on their due dates. Every day opens its workings.</a:t>
+              <a:t>Period: August 2026. A 13-week cash forecast from 31 August: cash at bank, plus what customers owe on their usual payment dates and new work at its recent rate, less pay runs, supplier bills, the BAS and finance on their due dates. Every day opens its workings.</a:t>
             </a:r>
           </a:p>
         </p:txBody>
@@ -5384,7 +5398,7 @@
                 </a:solidFill>
                 <a:latin typeface="Roboto"/>
               </a:rPr>
-              <a:t>Data retrieved 2pm, Tue 6 Oct 2026 · Generated 8 Oct 2026, 9:35am · Sample data · Made with Python (python-pptx)</a:t>
+              <a:t>Data retrieved 2pm, Tue 6 Oct 2026 · Generated 9 Oct 2026, 8:41am · Sample data · Made with Python (python-pptx)</a:t>
             </a:r>
           </a:p>
         </p:txBody>
@@ -5730,7 +5744,7 @@
                 </a:solidFill>
                 <a:latin typeface="Roboto"/>
               </a:rPr>
-              <a:t>$65,263</a:t>
+              <a:t>$92,859</a:t>
             </a:r>
           </a:p>
         </p:txBody>
@@ -5857,7 +5871,7 @@
                 </a:solidFill>
                 <a:latin typeface="Roboto"/>
               </a:rPr>
-              <a:t>Wages to pay in September</a:t>
+              <a:t>Paid to employees in September</a:t>
             </a:r>
           </a:p>
         </p:txBody>
@@ -5896,7 +5910,7 @@
                 </a:solidFill>
                 <a:latin typeface="Roboto"/>
               </a:rPr>
-              <a:t>$75,400</a:t>
+              <a:t>$73,222</a:t>
             </a:r>
           </a:p>
         </p:txBody>
@@ -5935,7 +5949,7 @@
                 </a:solidFill>
                 <a:latin typeface="Roboto"/>
               </a:rPr>
-              <a:t>2 fortnightly pay runs</a:t>
+              <a:t>2 fortnightly pay runs, net pay + super</a:t>
             </a:r>
           </a:p>
         </p:txBody>
@@ -6058,11 +6072,11 @@
             <a:r>
               <a:rPr sz="2200" b="1">
                 <a:solidFill>
-                  <a:srgbClr val="8A6D3B"/>
+                  <a:srgbClr val="2F7A5D"/>
                 </a:solidFill>
                 <a:latin typeface="Roboto"/>
               </a:rPr>
-              <a:t>$28,828</a:t>
+              <a:t>$56,248</a:t>
             </a:r>
           </a:p>
         </p:txBody>
@@ -6101,7 +6115,7 @@
                 </a:solidFill>
                 <a:latin typeface="Roboto"/>
               </a:rPr>
-              <a:t>buffer: one pay run, $37,700</a:t>
+              <a:t>buffer: one pay run, $36,611</a:t>
             </a:r>
           </a:p>
         </p:txBody>
@@ -6224,11 +6238,11 @@
             <a:r>
               <a:rPr sz="2200" b="1">
                 <a:solidFill>
-                  <a:srgbClr val="8A6D3B"/>
+                  <a:srgbClr val="2F7A5D"/>
                 </a:solidFill>
                 <a:latin typeface="Roboto"/>
               </a:rPr>
-              <a:t>$17,198</a:t>
+              <a:t>$56,248</a:t>
             </a:r>
           </a:p>
         </p:txBody>
@@ -6267,7 +6281,7 @@
                 </a:solidFill>
                 <a:latin typeface="Roboto"/>
               </a:rPr>
-              <a:t>30 November</a:t>
+              <a:t>3 September</a:t>
             </a:r>
           </a:p>
         </p:txBody>
@@ -6282,7 +6296,7 @@
         </p:nvGraphicFramePr>
         <p:xfrm>
           <a:off x="457200" y="2604516"/>
-          <a:ext cx="11277295" cy="2318004"/>
+          <a:ext cx="11277295" cy="2119884"/>
         </p:xfrm>
         <a:graphic>
           <a:graphicData uri="http://schemas.openxmlformats.org/drawingml/2006/chart">
@@ -6298,7 +6312,7 @@
         </p:nvCxnSpPr>
         <p:spPr>
           <a:xfrm>
-            <a:off x="1697702" y="4225264"/>
+            <a:off x="1697702" y="4095973"/>
             <a:ext cx="9698474" cy="0"/>
           </a:xfrm>
           <a:prstGeom prst="line">
@@ -6334,7 +6348,7 @@
         </p:nvSpPr>
         <p:spPr>
           <a:xfrm>
-            <a:off x="5909776" y="3950944"/>
+            <a:off x="5909776" y="3821653"/>
             <a:ext cx="5486400" cy="237744"/>
           </a:xfrm>
           <a:prstGeom prst="rect">
@@ -6360,7 +6374,7 @@
                 </a:solidFill>
                 <a:latin typeface="Roboto"/>
               </a:rPr>
-              <a:t>Buffer: one pay run, $37,700</a:t>
+              <a:t>Buffer: one pay run, $36,611</a:t>
             </a:r>
           </a:p>
         </p:txBody>
@@ -6373,8 +6387,8 @@
         </p:nvSpPr>
         <p:spPr>
           <a:xfrm>
-            <a:off x="457200" y="5013960"/>
-            <a:ext cx="5501487" cy="1295400"/>
+            <a:off x="457200" y="4815840"/>
+            <a:ext cx="5501487" cy="1493520"/>
           </a:xfrm>
           <a:prstGeom prst="rect">
             <a:avLst/>
@@ -6422,7 +6436,7 @@
         </p:nvSpPr>
         <p:spPr>
           <a:xfrm>
-            <a:off x="594360" y="5068824"/>
+            <a:off x="594360" y="4870704"/>
             <a:ext cx="5227167" cy="274320"/>
           </a:xfrm>
           <a:prstGeom prst="rect">
@@ -6461,8 +6475,8 @@
         </p:nvSpPr>
         <p:spPr>
           <a:xfrm>
-            <a:off x="594360" y="5343144"/>
-            <a:ext cx="5227167" cy="929640"/>
+            <a:off x="594360" y="5145024"/>
+            <a:ext cx="5227167" cy="1127760"/>
           </a:xfrm>
           <a:prstGeom prst="rect">
             <a:avLst/>
@@ -6487,7 +6501,7 @@
                 </a:solidFill>
                 <a:latin typeface="Roboto"/>
               </a:rPr>
-              <a:t>Cash at bank was $65,263 at 31 August. September has 2 pay runs ($75,400). The tightest is 3 September: $28,828 left after paying wages, less than one pay run ($37,700) in reserve. The lowest point in the 13 weeks is $17,198 on 30 November.</a:t>
+              <a:t>Cash at bank was $92,859 at 31 August. September has 2 pay runs ($73,222). The tightest is 3 September: $56,248 left after paying wages, $19,637 more than a pay run in reserve. The lowest point in the 13 weeks is $56,248 on 3 September.</a:t>
             </a:r>
           </a:p>
         </p:txBody>
@@ -6500,8 +6514,8 @@
         </p:nvSpPr>
         <p:spPr>
           <a:xfrm>
-            <a:off x="6233007" y="5013960"/>
-            <a:ext cx="5501487" cy="1295400"/>
+            <a:off x="6233007" y="4815840"/>
+            <a:ext cx="5501487" cy="1493520"/>
           </a:xfrm>
           <a:prstGeom prst="rect">
             <a:avLst/>
@@ -6549,7 +6563,7 @@
         </p:nvSpPr>
         <p:spPr>
           <a:xfrm>
-            <a:off x="6370167" y="5068824"/>
+            <a:off x="6370167" y="4870704"/>
             <a:ext cx="5227167" cy="274320"/>
           </a:xfrm>
           <a:prstGeom prst="rect">
@@ -6588,8 +6602,8 @@
         </p:nvSpPr>
         <p:spPr>
           <a:xfrm>
-            <a:off x="6370167" y="5343144"/>
-            <a:ext cx="5227167" cy="929640"/>
+            <a:off x="6370167" y="5145024"/>
+            <a:ext cx="5227167" cy="1127760"/>
           </a:xfrm>
           <a:prstGeom prst="rect">
             <a:avLst/>
@@ -6614,7 +6628,7 @@
                 </a:solidFill>
                 <a:latin typeface="Roboto"/>
               </a:rPr>
-              <a:t>15 invoices ($20,219) are already past the customer's usual payment date; the forecast assumes they arrive within a week. Without them, 3 September would be $8,609.</a:t>
+              <a:t>15 invoices ($24,676) are already past the customer's usual payment date; the forecast assumes they arrive within a week. Without them, the lowest point would be $34,181. The July to September BAS ($86,220, estimated) is due 28 October: GST $33,132, PAYG withheld $47,754 and the PAYG instalment $5,334.</a:t>
             </a:r>
           </a:p>
         </p:txBody>
@@ -6692,7 +6706,7 @@
                 </a:solidFill>
                 <a:latin typeface="Roboto"/>
               </a:rPr>
-              <a:t>Data retrieved 2pm, Tue 6 Oct 2026 · Generated 8 Oct 2026, 9:35am · Sample data · Made with Python (python-pptx)</a:t>
+              <a:t>Data retrieved 2pm, Tue 6 Oct 2026 · Generated 9 Oct 2026, 8:41am · Sample data · Made with Python (python-pptx)</a:t>
             </a:r>
           </a:p>
         </p:txBody>
@@ -6786,7 +6800,7 @@
                 </a:solidFill>
                 <a:latin typeface="Roboto"/>
               </a:rPr>
-              <a:t>How this forecast has done so far</a:t>
+              <a:t>September: where the cash comes from and goes (forecast)</a:t>
             </a:r>
           </a:p>
         </p:txBody>
@@ -6911,14 +6925,14 @@
                 </a:solidFill>
                 <a:latin typeface="Roboto"/>
               </a:rPr>
-              <a:t>For 5 October it said $74,351; the bank says $47,244, $27,107 less.</a:t>
+              <a:t>Money in, and money out in brackets. Includes GST.</a:t>
             </a:r>
           </a:p>
         </p:txBody>
       </p:sp>
       <p:graphicFrame>
         <p:nvGraphicFramePr>
-          <p:cNvPr id="6" name="Table 5"/>
+          <p:cNvPr id="6" name="Chart 5"/>
           <p:cNvGraphicFramePr>
             <a:graphicFrameLocks noGrp="1"/>
           </p:cNvGraphicFramePr>
@@ -6926,299 +6940,11 @@
         </p:nvGraphicFramePr>
         <p:xfrm>
           <a:off x="457200" y="1278636"/>
-          <a:ext cx="11277294" cy="1554480"/>
+          <a:ext cx="11277295" cy="4527804"/>
         </p:xfrm>
         <a:graphic>
-          <a:graphicData uri="http://schemas.openxmlformats.org/drawingml/2006/table">
-            <a:tbl>
-              <a:tblPr bandRow="1">
-                <a:tableStyleId>{5C22544A-7EE6-4342-B048-85BDC9FD1C3A}</a:tableStyleId>
-              </a:tblPr>
-              <a:tblGrid>
-                <a:gridCol w="3608734"/>
-                <a:gridCol w="7668560"/>
-              </a:tblGrid>
-              <a:tr h="310896">
-                <a:tc>
-                  <a:txBody>
-                    <a:bodyPr/>
-                    <a:lstStyle/>
-                    <a:p>
-                      <a:pPr algn="l">
-                        <a:defRPr>
-                          <a:latin typeface="Roboto"/>
-                        </a:defRPr>
-                      </a:pPr>
-                      <a:r>
-                        <a:rPr sz="1050">
-                          <a:solidFill>
-                            <a:srgbClr val="25342A"/>
-                          </a:solidFill>
-                          <a:latin typeface="Roboto"/>
-                        </a:rPr>
-                        <a:t>Forecast for 5 October</a:t>
-                      </a:r>
-                    </a:p>
-                  </a:txBody>
-                  <a:tcPr>
-                    <a:solidFill>
-                      <a:srgbClr val="FFFFFF"/>
-                    </a:solidFill>
-                  </a:tcPr>
-                </a:tc>
-                <a:tc>
-                  <a:txBody>
-                    <a:bodyPr/>
-                    <a:lstStyle/>
-                    <a:p>
-                      <a:pPr algn="r">
-                        <a:defRPr>
-                          <a:latin typeface="Roboto"/>
-                        </a:defRPr>
-                      </a:pPr>
-                      <a:r>
-                        <a:rPr sz="1050">
-                          <a:solidFill>
-                            <a:srgbClr val="25342A"/>
-                          </a:solidFill>
-                          <a:latin typeface="Roboto"/>
-                        </a:rPr>
-                        <a:t>$74,351</a:t>
-                      </a:r>
-                    </a:p>
-                  </a:txBody>
-                  <a:tcPr>
-                    <a:solidFill>
-                      <a:srgbClr val="FFFFFF"/>
-                    </a:solidFill>
-                  </a:tcPr>
-                </a:tc>
-              </a:tr>
-              <a:tr h="310896">
-                <a:tc>
-                  <a:txBody>
-                    <a:bodyPr/>
-                    <a:lstStyle/>
-                    <a:p>
-                      <a:pPr algn="l">
-                        <a:defRPr>
-                          <a:latin typeface="Roboto"/>
-                        </a:defRPr>
-                      </a:pPr>
-                      <a:r>
-                        <a:rPr sz="1050">
-                          <a:solidFill>
-                            <a:srgbClr val="25342A"/>
-                          </a:solidFill>
-                          <a:latin typeface="Roboto"/>
-                        </a:rPr>
-                        <a:t>Actual, 5 October</a:t>
-                      </a:r>
-                    </a:p>
-                  </a:txBody>
-                  <a:tcPr>
-                    <a:solidFill>
-                      <a:srgbClr val="F7FAF7"/>
-                    </a:solidFill>
-                  </a:tcPr>
-                </a:tc>
-                <a:tc>
-                  <a:txBody>
-                    <a:bodyPr/>
-                    <a:lstStyle/>
-                    <a:p>
-                      <a:pPr algn="r">
-                        <a:defRPr>
-                          <a:latin typeface="Roboto"/>
-                        </a:defRPr>
-                      </a:pPr>
-                      <a:r>
-                        <a:rPr sz="1050">
-                          <a:solidFill>
-                            <a:srgbClr val="25342A"/>
-                          </a:solidFill>
-                          <a:latin typeface="Roboto"/>
-                        </a:rPr>
-                        <a:t>$47,244</a:t>
-                      </a:r>
-                    </a:p>
-                  </a:txBody>
-                  <a:tcPr>
-                    <a:solidFill>
-                      <a:srgbClr val="F7FAF7"/>
-                    </a:solidFill>
-                  </a:tcPr>
-                </a:tc>
-              </a:tr>
-              <a:tr h="310896">
-                <a:tc>
-                  <a:txBody>
-                    <a:bodyPr/>
-                    <a:lstStyle/>
-                    <a:p>
-                      <a:pPr algn="l">
-                        <a:defRPr>
-                          <a:latin typeface="Roboto"/>
-                        </a:defRPr>
-                      </a:pPr>
-                      <a:r>
-                        <a:rPr sz="1050">
-                          <a:solidFill>
-                            <a:srgbClr val="25342A"/>
-                          </a:solidFill>
-                          <a:latin typeface="Roboto"/>
-                        </a:rPr>
-                        <a:t>Actual − forecast</a:t>
-                      </a:r>
-                    </a:p>
-                  </a:txBody>
-                  <a:tcPr>
-                    <a:solidFill>
-                      <a:srgbClr val="FFFFFF"/>
-                    </a:solidFill>
-                  </a:tcPr>
-                </a:tc>
-                <a:tc>
-                  <a:txBody>
-                    <a:bodyPr/>
-                    <a:lstStyle/>
-                    <a:p>
-                      <a:pPr algn="r">
-                        <a:defRPr>
-                          <a:latin typeface="Roboto"/>
-                        </a:defRPr>
-                      </a:pPr>
-                      <a:r>
-                        <a:rPr sz="1050">
-                          <a:solidFill>
-                            <a:srgbClr val="B42318"/>
-                          </a:solidFill>
-                          <a:latin typeface="Roboto"/>
-                        </a:rPr>
-                        <a:t>($27,107)</a:t>
-                      </a:r>
-                    </a:p>
-                  </a:txBody>
-                  <a:tcPr>
-                    <a:solidFill>
-                      <a:srgbClr val="FFFFFF"/>
-                    </a:solidFill>
-                  </a:tcPr>
-                </a:tc>
-              </a:tr>
-              <a:tr h="310896">
-                <a:tc>
-                  <a:txBody>
-                    <a:bodyPr/>
-                    <a:lstStyle/>
-                    <a:p>
-                      <a:pPr algn="l">
-                        <a:defRPr>
-                          <a:latin typeface="Roboto"/>
-                        </a:defRPr>
-                      </a:pPr>
-                      <a:r>
-                        <a:rPr sz="1050">
-                          <a:solidFill>
-                            <a:srgbClr val="25342A"/>
-                          </a:solidFill>
-                          <a:latin typeface="Roboto"/>
-                        </a:rPr>
-                        <a:t>Of which: invoices expected by then, not yet paid</a:t>
-                      </a:r>
-                    </a:p>
-                  </a:txBody>
-                  <a:tcPr>
-                    <a:solidFill>
-                      <a:srgbClr val="F7FAF7"/>
-                    </a:solidFill>
-                  </a:tcPr>
-                </a:tc>
-                <a:tc>
-                  <a:txBody>
-                    <a:bodyPr/>
-                    <a:lstStyle/>
-                    <a:p>
-                      <a:pPr algn="r">
-                        <a:defRPr>
-                          <a:latin typeface="Roboto"/>
-                        </a:defRPr>
-                      </a:pPr>
-                      <a:r>
-                        <a:rPr sz="1050">
-                          <a:solidFill>
-                            <a:srgbClr val="25342A"/>
-                          </a:solidFill>
-                          <a:latin typeface="Roboto"/>
-                        </a:rPr>
-                        <a:t>$0</a:t>
-                      </a:r>
-                    </a:p>
-                  </a:txBody>
-                  <a:tcPr>
-                    <a:solidFill>
-                      <a:srgbClr val="F7FAF7"/>
-                    </a:solidFill>
-                  </a:tcPr>
-                </a:tc>
-              </a:tr>
-              <a:tr h="310896">
-                <a:tc>
-                  <a:txBody>
-                    <a:bodyPr/>
-                    <a:lstStyle/>
-                    <a:p>
-                      <a:pPr algn="l">
-                        <a:defRPr>
-                          <a:latin typeface="Roboto"/>
-                        </a:defRPr>
-                      </a:pPr>
-                      <a:r>
-                        <a:rPr sz="1050">
-                          <a:solidFill>
-                            <a:srgbClr val="25342A"/>
-                          </a:solidFill>
-                          <a:latin typeface="Roboto"/>
-                        </a:rPr>
-                        <a:t>Everything else (timing of other money in and out)</a:t>
-                      </a:r>
-                    </a:p>
-                  </a:txBody>
-                  <a:tcPr>
-                    <a:solidFill>
-                      <a:srgbClr val="FFFFFF"/>
-                    </a:solidFill>
-                  </a:tcPr>
-                </a:tc>
-                <a:tc>
-                  <a:txBody>
-                    <a:bodyPr/>
-                    <a:lstStyle/>
-                    <a:p>
-                      <a:pPr algn="r">
-                        <a:defRPr>
-                          <a:latin typeface="Roboto"/>
-                        </a:defRPr>
-                      </a:pPr>
-                      <a:r>
-                        <a:rPr sz="1050">
-                          <a:solidFill>
-                            <a:srgbClr val="B42318"/>
-                          </a:solidFill>
-                          <a:latin typeface="Roboto"/>
-                        </a:rPr>
-                        <a:t>($27,107)</a:t>
-                      </a:r>
-                    </a:p>
-                  </a:txBody>
-                  <a:tcPr>
-                    <a:solidFill>
-                      <a:srgbClr val="FFFFFF"/>
-                    </a:solidFill>
-                  </a:tcPr>
-                </a:tc>
-              </a:tr>
-            </a:tbl>
+          <a:graphicData uri="http://schemas.openxmlformats.org/drawingml/2006/chart">
+            <c:chart xmlns:c="http://schemas.openxmlformats.org/drawingml/2006/chart" r:id="rId3"/>
           </a:graphicData>
         </a:graphic>
       </p:graphicFrame>
@@ -7295,7 +7021,7 @@
                 </a:solidFill>
                 <a:latin typeface="Roboto"/>
               </a:rPr>
-              <a:t>Data retrieved 2pm, Tue 6 Oct 2026 · Generated 8 Oct 2026, 9:35am · Sample data · Made with Python (python-pptx)</a:t>
+              <a:t>Data retrieved 2pm, Tue 6 Oct 2026 · Generated 9 Oct 2026, 8:41am · Sample data · Made with Python (python-pptx)</a:t>
             </a:r>
           </a:p>
         </p:txBody>
@@ -7389,7 +7115,7 @@
                 </a:solidFill>
                 <a:latin typeface="Roboto"/>
               </a:rPr>
-              <a:t>September: where the cash comes from and goes (forecast)</a:t>
+              <a:t>13 weeks, week by week</a:t>
             </a:r>
           </a:p>
         </p:txBody>
@@ -7514,14 +7240,14 @@
                 </a:solidFill>
                 <a:latin typeface="Roboto"/>
               </a:rPr>
-              <a:t>Money in, and money out in brackets.</a:t>
+              <a:t>Lowest in the week: amber below one pay run ($36,611), red below zero. Amounts include GST.</a:t>
             </a:r>
           </a:p>
         </p:txBody>
       </p:sp>
       <p:graphicFrame>
         <p:nvGraphicFramePr>
-          <p:cNvPr id="6" name="Chart 5"/>
+          <p:cNvPr id="6" name="Table 5"/>
           <p:cNvGraphicFramePr>
             <a:graphicFrameLocks noGrp="1"/>
           </p:cNvGraphicFramePr>
@@ -7529,11 +7255,3835 @@
         </p:nvGraphicFramePr>
         <p:xfrm>
           <a:off x="457200" y="1278636"/>
-          <a:ext cx="11277295" cy="4527804"/>
+          <a:ext cx="11277295" cy="4352544"/>
         </p:xfrm>
         <a:graphic>
-          <a:graphicData uri="http://schemas.openxmlformats.org/drawingml/2006/chart">
-            <c:chart xmlns:c="http://schemas.openxmlformats.org/drawingml/2006/chart" r:id="rId3"/>
+          <a:graphicData uri="http://schemas.openxmlformats.org/drawingml/2006/table">
+            <a:tbl>
+              <a:tblPr firstRow="1" bandRow="1">
+                <a:tableStyleId>{5C22544A-7EE6-4342-B048-85BDC9FD1C3A}</a:tableStyleId>
+              </a:tblPr>
+              <a:tblGrid>
+                <a:gridCol w="1127729"/>
+                <a:gridCol w="1127729"/>
+                <a:gridCol w="1127729"/>
+                <a:gridCol w="1127729"/>
+                <a:gridCol w="1127729"/>
+                <a:gridCol w="1127729"/>
+                <a:gridCol w="1127729"/>
+                <a:gridCol w="1127729"/>
+                <a:gridCol w="1127729"/>
+                <a:gridCol w="1127734"/>
+              </a:tblGrid>
+              <a:tr h="310896">
+                <a:tc>
+                  <a:txBody>
+                    <a:bodyPr/>
+                    <a:lstStyle/>
+                    <a:p>
+                      <a:pPr algn="l">
+                        <a:defRPr>
+                          <a:latin typeface="Roboto"/>
+                        </a:defRPr>
+                      </a:pPr>
+                      <a:r>
+                        <a:rPr sz="1100" b="1">
+                          <a:solidFill>
+                            <a:srgbClr val="FFFFFF"/>
+                          </a:solidFill>
+                          <a:latin typeface="Roboto"/>
+                        </a:rPr>
+                        <a:t>Week ending</a:t>
+                      </a:r>
+                    </a:p>
+                  </a:txBody>
+                  <a:tcPr>
+                    <a:solidFill>
+                      <a:srgbClr val="2F7A5D"/>
+                    </a:solidFill>
+                  </a:tcPr>
+                </a:tc>
+                <a:tc>
+                  <a:txBody>
+                    <a:bodyPr/>
+                    <a:lstStyle/>
+                    <a:p>
+                      <a:pPr algn="r">
+                        <a:defRPr>
+                          <a:latin typeface="Roboto"/>
+                        </a:defRPr>
+                      </a:pPr>
+                      <a:r>
+                        <a:rPr sz="1100" b="1">
+                          <a:solidFill>
+                            <a:srgbClr val="FFFFFF"/>
+                          </a:solidFill>
+                          <a:latin typeface="Roboto"/>
+                        </a:rPr>
+                        <a:t>Cash at start</a:t>
+                      </a:r>
+                    </a:p>
+                  </a:txBody>
+                  <a:tcPr>
+                    <a:solidFill>
+                      <a:srgbClr val="2F7A5D"/>
+                    </a:solidFill>
+                  </a:tcPr>
+                </a:tc>
+                <a:tc>
+                  <a:txBody>
+                    <a:bodyPr/>
+                    <a:lstStyle/>
+                    <a:p>
+                      <a:pPr algn="r">
+                        <a:defRPr>
+                          <a:latin typeface="Roboto"/>
+                        </a:defRPr>
+                      </a:pPr>
+                      <a:r>
+                        <a:rPr sz="1100" b="1">
+                          <a:solidFill>
+                            <a:srgbClr val="FFFFFF"/>
+                          </a:solidFill>
+                          <a:latin typeface="Roboto"/>
+                        </a:rPr>
+                        <a:t>Unpaid invoices collected</a:t>
+                      </a:r>
+                    </a:p>
+                  </a:txBody>
+                  <a:tcPr>
+                    <a:solidFill>
+                      <a:srgbClr val="2F7A5D"/>
+                    </a:solidFill>
+                  </a:tcPr>
+                </a:tc>
+                <a:tc>
+                  <a:txBody>
+                    <a:bodyPr/>
+                    <a:lstStyle/>
+                    <a:p>
+                      <a:pPr algn="r">
+                        <a:defRPr>
+                          <a:latin typeface="Roboto"/>
+                        </a:defRPr>
+                      </a:pPr>
+                      <a:r>
+                        <a:rPr sz="1100" b="1">
+                          <a:solidFill>
+                            <a:srgbClr val="FFFFFF"/>
+                          </a:solidFill>
+                          <a:latin typeface="Roboto"/>
+                        </a:rPr>
+                        <a:t>New work collected</a:t>
+                      </a:r>
+                    </a:p>
+                  </a:txBody>
+                  <a:tcPr>
+                    <a:solidFill>
+                      <a:srgbClr val="2F7A5D"/>
+                    </a:solidFill>
+                  </a:tcPr>
+                </a:tc>
+                <a:tc>
+                  <a:txBody>
+                    <a:bodyPr/>
+                    <a:lstStyle/>
+                    <a:p>
+                      <a:pPr algn="r">
+                        <a:defRPr>
+                          <a:latin typeface="Roboto"/>
+                        </a:defRPr>
+                      </a:pPr>
+                      <a:r>
+                        <a:rPr sz="1100" b="1">
+                          <a:solidFill>
+                            <a:srgbClr val="FFFFFF"/>
+                          </a:solidFill>
+                          <a:latin typeface="Roboto"/>
+                        </a:rPr>
+                        <a:t>Pay runs</a:t>
+                      </a:r>
+                    </a:p>
+                  </a:txBody>
+                  <a:tcPr>
+                    <a:solidFill>
+                      <a:srgbClr val="2F7A5D"/>
+                    </a:solidFill>
+                  </a:tcPr>
+                </a:tc>
+                <a:tc>
+                  <a:txBody>
+                    <a:bodyPr/>
+                    <a:lstStyle/>
+                    <a:p>
+                      <a:pPr algn="r">
+                        <a:defRPr>
+                          <a:latin typeface="Roboto"/>
+                        </a:defRPr>
+                      </a:pPr>
+                      <a:r>
+                        <a:rPr sz="1100" b="1">
+                          <a:solidFill>
+                            <a:srgbClr val="FFFFFF"/>
+                          </a:solidFill>
+                          <a:latin typeface="Roboto"/>
+                        </a:rPr>
+                        <a:t>Suppliers and overheads</a:t>
+                      </a:r>
+                    </a:p>
+                  </a:txBody>
+                  <a:tcPr>
+                    <a:solidFill>
+                      <a:srgbClr val="2F7A5D"/>
+                    </a:solidFill>
+                  </a:tcPr>
+                </a:tc>
+                <a:tc>
+                  <a:txBody>
+                    <a:bodyPr/>
+                    <a:lstStyle/>
+                    <a:p>
+                      <a:pPr algn="r">
+                        <a:defRPr>
+                          <a:latin typeface="Roboto"/>
+                        </a:defRPr>
+                      </a:pPr>
+                      <a:r>
+                        <a:rPr sz="1100" b="1">
+                          <a:solidFill>
+                            <a:srgbClr val="FFFFFF"/>
+                          </a:solidFill>
+                          <a:latin typeface="Roboto"/>
+                        </a:rPr>
+                        <a:t>BAS (GST and PAYG)</a:t>
+                      </a:r>
+                    </a:p>
+                  </a:txBody>
+                  <a:tcPr>
+                    <a:solidFill>
+                      <a:srgbClr val="2F7A5D"/>
+                    </a:solidFill>
+                  </a:tcPr>
+                </a:tc>
+                <a:tc>
+                  <a:txBody>
+                    <a:bodyPr/>
+                    <a:lstStyle/>
+                    <a:p>
+                      <a:pPr algn="r">
+                        <a:defRPr>
+                          <a:latin typeface="Roboto"/>
+                        </a:defRPr>
+                      </a:pPr>
+                      <a:r>
+                        <a:rPr sz="1100" b="1">
+                          <a:solidFill>
+                            <a:srgbClr val="FFFFFF"/>
+                          </a:solidFill>
+                          <a:latin typeface="Roboto"/>
+                        </a:rPr>
+                        <a:t>Interest and finance</a:t>
+                      </a:r>
+                    </a:p>
+                  </a:txBody>
+                  <a:tcPr>
+                    <a:solidFill>
+                      <a:srgbClr val="2F7A5D"/>
+                    </a:solidFill>
+                  </a:tcPr>
+                </a:tc>
+                <a:tc>
+                  <a:txBody>
+                    <a:bodyPr/>
+                    <a:lstStyle/>
+                    <a:p>
+                      <a:pPr algn="r">
+                        <a:defRPr>
+                          <a:latin typeface="Roboto"/>
+                        </a:defRPr>
+                      </a:pPr>
+                      <a:r>
+                        <a:rPr sz="1100" b="1">
+                          <a:solidFill>
+                            <a:srgbClr val="FFFFFF"/>
+                          </a:solidFill>
+                          <a:latin typeface="Roboto"/>
+                        </a:rPr>
+                        <a:t>Cash at end</a:t>
+                      </a:r>
+                    </a:p>
+                  </a:txBody>
+                  <a:tcPr>
+                    <a:solidFill>
+                      <a:srgbClr val="2F7A5D"/>
+                    </a:solidFill>
+                  </a:tcPr>
+                </a:tc>
+                <a:tc>
+                  <a:txBody>
+                    <a:bodyPr/>
+                    <a:lstStyle/>
+                    <a:p>
+                      <a:pPr algn="r">
+                        <a:defRPr>
+                          <a:latin typeface="Roboto"/>
+                        </a:defRPr>
+                      </a:pPr>
+                      <a:r>
+                        <a:rPr sz="1100" b="1">
+                          <a:solidFill>
+                            <a:srgbClr val="FFFFFF"/>
+                          </a:solidFill>
+                          <a:latin typeface="Roboto"/>
+                        </a:rPr>
+                        <a:t>Lowest in the week</a:t>
+                      </a:r>
+                    </a:p>
+                  </a:txBody>
+                  <a:tcPr>
+                    <a:solidFill>
+                      <a:srgbClr val="2F7A5D"/>
+                    </a:solidFill>
+                  </a:tcPr>
+                </a:tc>
+              </a:tr>
+              <a:tr h="310896">
+                <a:tc>
+                  <a:txBody>
+                    <a:bodyPr/>
+                    <a:lstStyle/>
+                    <a:p>
+                      <a:pPr algn="l">
+                        <a:defRPr>
+                          <a:latin typeface="Roboto"/>
+                        </a:defRPr>
+                      </a:pPr>
+                      <a:r>
+                        <a:rPr sz="1050">
+                          <a:solidFill>
+                            <a:srgbClr val="25342A"/>
+                          </a:solidFill>
+                          <a:latin typeface="Roboto"/>
+                        </a:rPr>
+                        <a:t>7 Sep</a:t>
+                      </a:r>
+                    </a:p>
+                  </a:txBody>
+                  <a:tcPr>
+                    <a:solidFill>
+                      <a:srgbClr val="FFFFFF"/>
+                    </a:solidFill>
+                  </a:tcPr>
+                </a:tc>
+                <a:tc>
+                  <a:txBody>
+                    <a:bodyPr/>
+                    <a:lstStyle/>
+                    <a:p>
+                      <a:pPr algn="r">
+                        <a:defRPr>
+                          <a:latin typeface="Roboto"/>
+                        </a:defRPr>
+                      </a:pPr>
+                      <a:r>
+                        <a:rPr sz="1050">
+                          <a:solidFill>
+                            <a:srgbClr val="25342A"/>
+                          </a:solidFill>
+                          <a:latin typeface="Roboto"/>
+                        </a:rPr>
+                        <a:t>$92,859</a:t>
+                      </a:r>
+                    </a:p>
+                  </a:txBody>
+                  <a:tcPr>
+                    <a:solidFill>
+                      <a:srgbClr val="FFFFFF"/>
+                    </a:solidFill>
+                  </a:tcPr>
+                </a:tc>
+                <a:tc>
+                  <a:txBody>
+                    <a:bodyPr/>
+                    <a:lstStyle/>
+                    <a:p>
+                      <a:pPr algn="r">
+                        <a:defRPr>
+                          <a:latin typeface="Roboto"/>
+                        </a:defRPr>
+                      </a:pPr>
+                      <a:r>
+                        <a:rPr sz="1050">
+                          <a:solidFill>
+                            <a:srgbClr val="25342A"/>
+                          </a:solidFill>
+                          <a:latin typeface="Roboto"/>
+                        </a:rPr>
+                        <a:t>$72,086</a:t>
+                      </a:r>
+                    </a:p>
+                  </a:txBody>
+                  <a:tcPr>
+                    <a:solidFill>
+                      <a:srgbClr val="FFFFFF"/>
+                    </a:solidFill>
+                  </a:tcPr>
+                </a:tc>
+                <a:tc>
+                  <a:txBody>
+                    <a:bodyPr/>
+                    <a:lstStyle/>
+                    <a:p>
+                      <a:pPr algn="r">
+                        <a:defRPr>
+                          <a:latin typeface="Roboto"/>
+                        </a:defRPr>
+                      </a:pPr>
+                      <a:r>
+                        <a:rPr sz="1050">
+                          <a:solidFill>
+                            <a:srgbClr val="25342A"/>
+                          </a:solidFill>
+                          <a:latin typeface="Roboto"/>
+                        </a:rPr>
+                        <a:t>$6,141</a:t>
+                      </a:r>
+                    </a:p>
+                  </a:txBody>
+                  <a:tcPr>
+                    <a:solidFill>
+                      <a:srgbClr val="FFFFFF"/>
+                    </a:solidFill>
+                  </a:tcPr>
+                </a:tc>
+                <a:tc>
+                  <a:txBody>
+                    <a:bodyPr/>
+                    <a:lstStyle/>
+                    <a:p>
+                      <a:pPr algn="r">
+                        <a:defRPr>
+                          <a:latin typeface="Roboto"/>
+                        </a:defRPr>
+                      </a:pPr>
+                      <a:r>
+                        <a:rPr sz="1050">
+                          <a:solidFill>
+                            <a:srgbClr val="B42318"/>
+                          </a:solidFill>
+                          <a:latin typeface="Roboto"/>
+                        </a:rPr>
+                        <a:t>($36,611)</a:t>
+                      </a:r>
+                    </a:p>
+                  </a:txBody>
+                  <a:tcPr>
+                    <a:solidFill>
+                      <a:srgbClr val="FFFFFF"/>
+                    </a:solidFill>
+                  </a:tcPr>
+                </a:tc>
+                <a:tc>
+                  <a:txBody>
+                    <a:bodyPr/>
+                    <a:lstStyle/>
+                    <a:p>
+                      <a:pPr algn="r">
+                        <a:defRPr>
+                          <a:latin typeface="Roboto"/>
+                        </a:defRPr>
+                      </a:pPr>
+                      <a:r>
+                        <a:rPr sz="1050">
+                          <a:solidFill>
+                            <a:srgbClr val="25342A"/>
+                          </a:solidFill>
+                          <a:latin typeface="Roboto"/>
+                        </a:rPr>
+                        <a:t>$0</a:t>
+                      </a:r>
+                    </a:p>
+                  </a:txBody>
+                  <a:tcPr>
+                    <a:solidFill>
+                      <a:srgbClr val="FFFFFF"/>
+                    </a:solidFill>
+                  </a:tcPr>
+                </a:tc>
+                <a:tc>
+                  <a:txBody>
+                    <a:bodyPr/>
+                    <a:lstStyle/>
+                    <a:p>
+                      <a:pPr algn="r">
+                        <a:defRPr>
+                          <a:latin typeface="Roboto"/>
+                        </a:defRPr>
+                      </a:pPr>
+                      <a:r>
+                        <a:rPr sz="1050">
+                          <a:solidFill>
+                            <a:srgbClr val="25342A"/>
+                          </a:solidFill>
+                          <a:latin typeface="Roboto"/>
+                        </a:rPr>
+                        <a:t>$0</a:t>
+                      </a:r>
+                    </a:p>
+                  </a:txBody>
+                  <a:tcPr>
+                    <a:solidFill>
+                      <a:srgbClr val="FFFFFF"/>
+                    </a:solidFill>
+                  </a:tcPr>
+                </a:tc>
+                <a:tc>
+                  <a:txBody>
+                    <a:bodyPr/>
+                    <a:lstStyle/>
+                    <a:p>
+                      <a:pPr algn="r">
+                        <a:defRPr>
+                          <a:latin typeface="Roboto"/>
+                        </a:defRPr>
+                      </a:pPr>
+                      <a:r>
+                        <a:rPr sz="1050">
+                          <a:solidFill>
+                            <a:srgbClr val="25342A"/>
+                          </a:solidFill>
+                          <a:latin typeface="Roboto"/>
+                        </a:rPr>
+                        <a:t>$0</a:t>
+                      </a:r>
+                    </a:p>
+                  </a:txBody>
+                  <a:tcPr>
+                    <a:solidFill>
+                      <a:srgbClr val="FFFFFF"/>
+                    </a:solidFill>
+                  </a:tcPr>
+                </a:tc>
+                <a:tc>
+                  <a:txBody>
+                    <a:bodyPr/>
+                    <a:lstStyle/>
+                    <a:p>
+                      <a:pPr algn="r">
+                        <a:defRPr>
+                          <a:latin typeface="Roboto"/>
+                        </a:defRPr>
+                      </a:pPr>
+                      <a:r>
+                        <a:rPr sz="1050">
+                          <a:solidFill>
+                            <a:srgbClr val="25342A"/>
+                          </a:solidFill>
+                          <a:latin typeface="Roboto"/>
+                        </a:rPr>
+                        <a:t>$134,475</a:t>
+                      </a:r>
+                    </a:p>
+                  </a:txBody>
+                  <a:tcPr>
+                    <a:solidFill>
+                      <a:srgbClr val="FFFFFF"/>
+                    </a:solidFill>
+                  </a:tcPr>
+                </a:tc>
+                <a:tc>
+                  <a:txBody>
+                    <a:bodyPr/>
+                    <a:lstStyle/>
+                    <a:p>
+                      <a:pPr algn="r">
+                        <a:defRPr>
+                          <a:latin typeface="Roboto"/>
+                        </a:defRPr>
+                      </a:pPr>
+                      <a:r>
+                        <a:rPr sz="1050">
+                          <a:solidFill>
+                            <a:srgbClr val="25342A"/>
+                          </a:solidFill>
+                          <a:latin typeface="Roboto"/>
+                        </a:rPr>
+                        <a:t>$56,248</a:t>
+                      </a:r>
+                    </a:p>
+                  </a:txBody>
+                  <a:tcPr>
+                    <a:solidFill>
+                      <a:srgbClr val="FFFFFF"/>
+                    </a:solidFill>
+                  </a:tcPr>
+                </a:tc>
+              </a:tr>
+              <a:tr h="310896">
+                <a:tc>
+                  <a:txBody>
+                    <a:bodyPr/>
+                    <a:lstStyle/>
+                    <a:p>
+                      <a:pPr algn="l">
+                        <a:defRPr>
+                          <a:latin typeface="Roboto"/>
+                        </a:defRPr>
+                      </a:pPr>
+                      <a:r>
+                        <a:rPr sz="1050">
+                          <a:solidFill>
+                            <a:srgbClr val="25342A"/>
+                          </a:solidFill>
+                          <a:latin typeface="Roboto"/>
+                        </a:rPr>
+                        <a:t>14 Sep</a:t>
+                      </a:r>
+                    </a:p>
+                  </a:txBody>
+                  <a:tcPr>
+                    <a:solidFill>
+                      <a:srgbClr val="F7FAF7"/>
+                    </a:solidFill>
+                  </a:tcPr>
+                </a:tc>
+                <a:tc>
+                  <a:txBody>
+                    <a:bodyPr/>
+                    <a:lstStyle/>
+                    <a:p>
+                      <a:pPr algn="r">
+                        <a:defRPr>
+                          <a:latin typeface="Roboto"/>
+                        </a:defRPr>
+                      </a:pPr>
+                      <a:r>
+                        <a:rPr sz="1050">
+                          <a:solidFill>
+                            <a:srgbClr val="25342A"/>
+                          </a:solidFill>
+                          <a:latin typeface="Roboto"/>
+                        </a:rPr>
+                        <a:t>$134,475</a:t>
+                      </a:r>
+                    </a:p>
+                  </a:txBody>
+                  <a:tcPr>
+                    <a:solidFill>
+                      <a:srgbClr val="F7FAF7"/>
+                    </a:solidFill>
+                  </a:tcPr>
+                </a:tc>
+                <a:tc>
+                  <a:txBody>
+                    <a:bodyPr/>
+                    <a:lstStyle/>
+                    <a:p>
+                      <a:pPr algn="r">
+                        <a:defRPr>
+                          <a:latin typeface="Roboto"/>
+                        </a:defRPr>
+                      </a:pPr>
+                      <a:r>
+                        <a:rPr sz="1050">
+                          <a:solidFill>
+                            <a:srgbClr val="25342A"/>
+                          </a:solidFill>
+                          <a:latin typeface="Roboto"/>
+                        </a:rPr>
+                        <a:t>$26,290</a:t>
+                      </a:r>
+                    </a:p>
+                  </a:txBody>
+                  <a:tcPr>
+                    <a:solidFill>
+                      <a:srgbClr val="F7FAF7"/>
+                    </a:solidFill>
+                  </a:tcPr>
+                </a:tc>
+                <a:tc>
+                  <a:txBody>
+                    <a:bodyPr/>
+                    <a:lstStyle/>
+                    <a:p>
+                      <a:pPr algn="r">
+                        <a:defRPr>
+                          <a:latin typeface="Roboto"/>
+                        </a:defRPr>
+                      </a:pPr>
+                      <a:r>
+                        <a:rPr sz="1050">
+                          <a:solidFill>
+                            <a:srgbClr val="25342A"/>
+                          </a:solidFill>
+                          <a:latin typeface="Roboto"/>
+                        </a:rPr>
+                        <a:t>$7,677</a:t>
+                      </a:r>
+                    </a:p>
+                  </a:txBody>
+                  <a:tcPr>
+                    <a:solidFill>
+                      <a:srgbClr val="F7FAF7"/>
+                    </a:solidFill>
+                  </a:tcPr>
+                </a:tc>
+                <a:tc>
+                  <a:txBody>
+                    <a:bodyPr/>
+                    <a:lstStyle/>
+                    <a:p>
+                      <a:pPr algn="r">
+                        <a:defRPr>
+                          <a:latin typeface="Roboto"/>
+                        </a:defRPr>
+                      </a:pPr>
+                      <a:r>
+                        <a:rPr sz="1050">
+                          <a:solidFill>
+                            <a:srgbClr val="25342A"/>
+                          </a:solidFill>
+                          <a:latin typeface="Roboto"/>
+                        </a:rPr>
+                        <a:t>$0</a:t>
+                      </a:r>
+                    </a:p>
+                  </a:txBody>
+                  <a:tcPr>
+                    <a:solidFill>
+                      <a:srgbClr val="F7FAF7"/>
+                    </a:solidFill>
+                  </a:tcPr>
+                </a:tc>
+                <a:tc>
+                  <a:txBody>
+                    <a:bodyPr/>
+                    <a:lstStyle/>
+                    <a:p>
+                      <a:pPr algn="r">
+                        <a:defRPr>
+                          <a:latin typeface="Roboto"/>
+                        </a:defRPr>
+                      </a:pPr>
+                      <a:r>
+                        <a:rPr sz="1050">
+                          <a:solidFill>
+                            <a:srgbClr val="25342A"/>
+                          </a:solidFill>
+                          <a:latin typeface="Roboto"/>
+                        </a:rPr>
+                        <a:t>$0</a:t>
+                      </a:r>
+                    </a:p>
+                  </a:txBody>
+                  <a:tcPr>
+                    <a:solidFill>
+                      <a:srgbClr val="F7FAF7"/>
+                    </a:solidFill>
+                  </a:tcPr>
+                </a:tc>
+                <a:tc>
+                  <a:txBody>
+                    <a:bodyPr/>
+                    <a:lstStyle/>
+                    <a:p>
+                      <a:pPr algn="r">
+                        <a:defRPr>
+                          <a:latin typeface="Roboto"/>
+                        </a:defRPr>
+                      </a:pPr>
+                      <a:r>
+                        <a:rPr sz="1050">
+                          <a:solidFill>
+                            <a:srgbClr val="25342A"/>
+                          </a:solidFill>
+                          <a:latin typeface="Roboto"/>
+                        </a:rPr>
+                        <a:t>$0</a:t>
+                      </a:r>
+                    </a:p>
+                  </a:txBody>
+                  <a:tcPr>
+                    <a:solidFill>
+                      <a:srgbClr val="F7FAF7"/>
+                    </a:solidFill>
+                  </a:tcPr>
+                </a:tc>
+                <a:tc>
+                  <a:txBody>
+                    <a:bodyPr/>
+                    <a:lstStyle/>
+                    <a:p>
+                      <a:pPr algn="r">
+                        <a:defRPr>
+                          <a:latin typeface="Roboto"/>
+                        </a:defRPr>
+                      </a:pPr>
+                      <a:r>
+                        <a:rPr sz="1050">
+                          <a:solidFill>
+                            <a:srgbClr val="25342A"/>
+                          </a:solidFill>
+                          <a:latin typeface="Roboto"/>
+                        </a:rPr>
+                        <a:t>$0</a:t>
+                      </a:r>
+                    </a:p>
+                  </a:txBody>
+                  <a:tcPr>
+                    <a:solidFill>
+                      <a:srgbClr val="F7FAF7"/>
+                    </a:solidFill>
+                  </a:tcPr>
+                </a:tc>
+                <a:tc>
+                  <a:txBody>
+                    <a:bodyPr/>
+                    <a:lstStyle/>
+                    <a:p>
+                      <a:pPr algn="r">
+                        <a:defRPr>
+                          <a:latin typeface="Roboto"/>
+                        </a:defRPr>
+                      </a:pPr>
+                      <a:r>
+                        <a:rPr sz="1050">
+                          <a:solidFill>
+                            <a:srgbClr val="25342A"/>
+                          </a:solidFill>
+                          <a:latin typeface="Roboto"/>
+                        </a:rPr>
+                        <a:t>$168,442</a:t>
+                      </a:r>
+                    </a:p>
+                  </a:txBody>
+                  <a:tcPr>
+                    <a:solidFill>
+                      <a:srgbClr val="F7FAF7"/>
+                    </a:solidFill>
+                  </a:tcPr>
+                </a:tc>
+                <a:tc>
+                  <a:txBody>
+                    <a:bodyPr/>
+                    <a:lstStyle/>
+                    <a:p>
+                      <a:pPr algn="r">
+                        <a:defRPr>
+                          <a:latin typeface="Roboto"/>
+                        </a:defRPr>
+                      </a:pPr>
+                      <a:r>
+                        <a:rPr sz="1050">
+                          <a:solidFill>
+                            <a:srgbClr val="25342A"/>
+                          </a:solidFill>
+                          <a:latin typeface="Roboto"/>
+                        </a:rPr>
+                        <a:t>$134,475</a:t>
+                      </a:r>
+                    </a:p>
+                  </a:txBody>
+                  <a:tcPr>
+                    <a:solidFill>
+                      <a:srgbClr val="F7FAF7"/>
+                    </a:solidFill>
+                  </a:tcPr>
+                </a:tc>
+              </a:tr>
+              <a:tr h="310896">
+                <a:tc>
+                  <a:txBody>
+                    <a:bodyPr/>
+                    <a:lstStyle/>
+                    <a:p>
+                      <a:pPr algn="l">
+                        <a:defRPr>
+                          <a:latin typeface="Roboto"/>
+                        </a:defRPr>
+                      </a:pPr>
+                      <a:r>
+                        <a:rPr sz="1050">
+                          <a:solidFill>
+                            <a:srgbClr val="25342A"/>
+                          </a:solidFill>
+                          <a:latin typeface="Roboto"/>
+                        </a:rPr>
+                        <a:t>21 Sep</a:t>
+                      </a:r>
+                    </a:p>
+                  </a:txBody>
+                  <a:tcPr>
+                    <a:solidFill>
+                      <a:srgbClr val="FFFFFF"/>
+                    </a:solidFill>
+                  </a:tcPr>
+                </a:tc>
+                <a:tc>
+                  <a:txBody>
+                    <a:bodyPr/>
+                    <a:lstStyle/>
+                    <a:p>
+                      <a:pPr algn="r">
+                        <a:defRPr>
+                          <a:latin typeface="Roboto"/>
+                        </a:defRPr>
+                      </a:pPr>
+                      <a:r>
+                        <a:rPr sz="1050">
+                          <a:solidFill>
+                            <a:srgbClr val="25342A"/>
+                          </a:solidFill>
+                          <a:latin typeface="Roboto"/>
+                        </a:rPr>
+                        <a:t>$168,442</a:t>
+                      </a:r>
+                    </a:p>
+                  </a:txBody>
+                  <a:tcPr>
+                    <a:solidFill>
+                      <a:srgbClr val="FFFFFF"/>
+                    </a:solidFill>
+                  </a:tcPr>
+                </a:tc>
+                <a:tc>
+                  <a:txBody>
+                    <a:bodyPr/>
+                    <a:lstStyle/>
+                    <a:p>
+                      <a:pPr algn="r">
+                        <a:defRPr>
+                          <a:latin typeface="Roboto"/>
+                        </a:defRPr>
+                      </a:pPr>
+                      <a:r>
+                        <a:rPr sz="1050">
+                          <a:solidFill>
+                            <a:srgbClr val="25342A"/>
+                          </a:solidFill>
+                          <a:latin typeface="Roboto"/>
+                        </a:rPr>
+                        <a:t>$20,680</a:t>
+                      </a:r>
+                    </a:p>
+                  </a:txBody>
+                  <a:tcPr>
+                    <a:solidFill>
+                      <a:srgbClr val="FFFFFF"/>
+                    </a:solidFill>
+                  </a:tcPr>
+                </a:tc>
+                <a:tc>
+                  <a:txBody>
+                    <a:bodyPr/>
+                    <a:lstStyle/>
+                    <a:p>
+                      <a:pPr algn="r">
+                        <a:defRPr>
+                          <a:latin typeface="Roboto"/>
+                        </a:defRPr>
+                      </a:pPr>
+                      <a:r>
+                        <a:rPr sz="1050">
+                          <a:solidFill>
+                            <a:srgbClr val="25342A"/>
+                          </a:solidFill>
+                          <a:latin typeface="Roboto"/>
+                        </a:rPr>
+                        <a:t>$7,677</a:t>
+                      </a:r>
+                    </a:p>
+                  </a:txBody>
+                  <a:tcPr>
+                    <a:solidFill>
+                      <a:srgbClr val="FFFFFF"/>
+                    </a:solidFill>
+                  </a:tcPr>
+                </a:tc>
+                <a:tc>
+                  <a:txBody>
+                    <a:bodyPr/>
+                    <a:lstStyle/>
+                    <a:p>
+                      <a:pPr algn="r">
+                        <a:defRPr>
+                          <a:latin typeface="Roboto"/>
+                        </a:defRPr>
+                      </a:pPr>
+                      <a:r>
+                        <a:rPr sz="1050">
+                          <a:solidFill>
+                            <a:srgbClr val="B42318"/>
+                          </a:solidFill>
+                          <a:latin typeface="Roboto"/>
+                        </a:rPr>
+                        <a:t>($36,611)</a:t>
+                      </a:r>
+                    </a:p>
+                  </a:txBody>
+                  <a:tcPr>
+                    <a:solidFill>
+                      <a:srgbClr val="FFFFFF"/>
+                    </a:solidFill>
+                  </a:tcPr>
+                </a:tc>
+                <a:tc>
+                  <a:txBody>
+                    <a:bodyPr/>
+                    <a:lstStyle/>
+                    <a:p>
+                      <a:pPr algn="r">
+                        <a:defRPr>
+                          <a:latin typeface="Roboto"/>
+                        </a:defRPr>
+                      </a:pPr>
+                      <a:r>
+                        <a:rPr sz="1050">
+                          <a:solidFill>
+                            <a:srgbClr val="B42318"/>
+                          </a:solidFill>
+                          <a:latin typeface="Roboto"/>
+                        </a:rPr>
+                        <a:t>($51,166)</a:t>
+                      </a:r>
+                    </a:p>
+                  </a:txBody>
+                  <a:tcPr>
+                    <a:solidFill>
+                      <a:srgbClr val="FFFFFF"/>
+                    </a:solidFill>
+                  </a:tcPr>
+                </a:tc>
+                <a:tc>
+                  <a:txBody>
+                    <a:bodyPr/>
+                    <a:lstStyle/>
+                    <a:p>
+                      <a:pPr algn="r">
+                        <a:defRPr>
+                          <a:latin typeface="Roboto"/>
+                        </a:defRPr>
+                      </a:pPr>
+                      <a:r>
+                        <a:rPr sz="1050">
+                          <a:solidFill>
+                            <a:srgbClr val="25342A"/>
+                          </a:solidFill>
+                          <a:latin typeface="Roboto"/>
+                        </a:rPr>
+                        <a:t>$0</a:t>
+                      </a:r>
+                    </a:p>
+                  </a:txBody>
+                  <a:tcPr>
+                    <a:solidFill>
+                      <a:srgbClr val="FFFFFF"/>
+                    </a:solidFill>
+                  </a:tcPr>
+                </a:tc>
+                <a:tc>
+                  <a:txBody>
+                    <a:bodyPr/>
+                    <a:lstStyle/>
+                    <a:p>
+                      <a:pPr algn="r">
+                        <a:defRPr>
+                          <a:latin typeface="Roboto"/>
+                        </a:defRPr>
+                      </a:pPr>
+                      <a:r>
+                        <a:rPr sz="1050">
+                          <a:solidFill>
+                            <a:srgbClr val="25342A"/>
+                          </a:solidFill>
+                          <a:latin typeface="Roboto"/>
+                        </a:rPr>
+                        <a:t>$0</a:t>
+                      </a:r>
+                    </a:p>
+                  </a:txBody>
+                  <a:tcPr>
+                    <a:solidFill>
+                      <a:srgbClr val="FFFFFF"/>
+                    </a:solidFill>
+                  </a:tcPr>
+                </a:tc>
+                <a:tc>
+                  <a:txBody>
+                    <a:bodyPr/>
+                    <a:lstStyle/>
+                    <a:p>
+                      <a:pPr algn="r">
+                        <a:defRPr>
+                          <a:latin typeface="Roboto"/>
+                        </a:defRPr>
+                      </a:pPr>
+                      <a:r>
+                        <a:rPr sz="1050">
+                          <a:solidFill>
+                            <a:srgbClr val="25342A"/>
+                          </a:solidFill>
+                          <a:latin typeface="Roboto"/>
+                        </a:rPr>
+                        <a:t>$109,022</a:t>
+                      </a:r>
+                    </a:p>
+                  </a:txBody>
+                  <a:tcPr>
+                    <a:solidFill>
+                      <a:srgbClr val="FFFFFF"/>
+                    </a:solidFill>
+                  </a:tcPr>
+                </a:tc>
+                <a:tc>
+                  <a:txBody>
+                    <a:bodyPr/>
+                    <a:lstStyle/>
+                    <a:p>
+                      <a:pPr algn="r">
+                        <a:defRPr>
+                          <a:latin typeface="Roboto"/>
+                        </a:defRPr>
+                      </a:pPr>
+                      <a:r>
+                        <a:rPr sz="1050">
+                          <a:solidFill>
+                            <a:srgbClr val="25342A"/>
+                          </a:solidFill>
+                          <a:latin typeface="Roboto"/>
+                        </a:rPr>
+                        <a:t>$82,200</a:t>
+                      </a:r>
+                    </a:p>
+                  </a:txBody>
+                  <a:tcPr>
+                    <a:solidFill>
+                      <a:srgbClr val="FFFFFF"/>
+                    </a:solidFill>
+                  </a:tcPr>
+                </a:tc>
+              </a:tr>
+              <a:tr h="310896">
+                <a:tc>
+                  <a:txBody>
+                    <a:bodyPr/>
+                    <a:lstStyle/>
+                    <a:p>
+                      <a:pPr algn="l">
+                        <a:defRPr>
+                          <a:latin typeface="Roboto"/>
+                        </a:defRPr>
+                      </a:pPr>
+                      <a:r>
+                        <a:rPr sz="1050">
+                          <a:solidFill>
+                            <a:srgbClr val="25342A"/>
+                          </a:solidFill>
+                          <a:latin typeface="Roboto"/>
+                        </a:rPr>
+                        <a:t>28 Sep</a:t>
+                      </a:r>
+                    </a:p>
+                  </a:txBody>
+                  <a:tcPr>
+                    <a:solidFill>
+                      <a:srgbClr val="F7FAF7"/>
+                    </a:solidFill>
+                  </a:tcPr>
+                </a:tc>
+                <a:tc>
+                  <a:txBody>
+                    <a:bodyPr/>
+                    <a:lstStyle/>
+                    <a:p>
+                      <a:pPr algn="r">
+                        <a:defRPr>
+                          <a:latin typeface="Roboto"/>
+                        </a:defRPr>
+                      </a:pPr>
+                      <a:r>
+                        <a:rPr sz="1050">
+                          <a:solidFill>
+                            <a:srgbClr val="25342A"/>
+                          </a:solidFill>
+                          <a:latin typeface="Roboto"/>
+                        </a:rPr>
+                        <a:t>$109,022</a:t>
+                      </a:r>
+                    </a:p>
+                  </a:txBody>
+                  <a:tcPr>
+                    <a:solidFill>
+                      <a:srgbClr val="F7FAF7"/>
+                    </a:solidFill>
+                  </a:tcPr>
+                </a:tc>
+                <a:tc>
+                  <a:txBody>
+                    <a:bodyPr/>
+                    <a:lstStyle/>
+                    <a:p>
+                      <a:pPr algn="r">
+                        <a:defRPr>
+                          <a:latin typeface="Roboto"/>
+                        </a:defRPr>
+                      </a:pPr>
+                      <a:r>
+                        <a:rPr sz="1050">
+                          <a:solidFill>
+                            <a:srgbClr val="25342A"/>
+                          </a:solidFill>
+                          <a:latin typeface="Roboto"/>
+                        </a:rPr>
+                        <a:t>$40,700</a:t>
+                      </a:r>
+                    </a:p>
+                  </a:txBody>
+                  <a:tcPr>
+                    <a:solidFill>
+                      <a:srgbClr val="F7FAF7"/>
+                    </a:solidFill>
+                  </a:tcPr>
+                </a:tc>
+                <a:tc>
+                  <a:txBody>
+                    <a:bodyPr/>
+                    <a:lstStyle/>
+                    <a:p>
+                      <a:pPr algn="r">
+                        <a:defRPr>
+                          <a:latin typeface="Roboto"/>
+                        </a:defRPr>
+                      </a:pPr>
+                      <a:r>
+                        <a:rPr sz="1050">
+                          <a:solidFill>
+                            <a:srgbClr val="25342A"/>
+                          </a:solidFill>
+                          <a:latin typeface="Roboto"/>
+                        </a:rPr>
+                        <a:t>$7,676</a:t>
+                      </a:r>
+                    </a:p>
+                  </a:txBody>
+                  <a:tcPr>
+                    <a:solidFill>
+                      <a:srgbClr val="F7FAF7"/>
+                    </a:solidFill>
+                  </a:tcPr>
+                </a:tc>
+                <a:tc>
+                  <a:txBody>
+                    <a:bodyPr/>
+                    <a:lstStyle/>
+                    <a:p>
+                      <a:pPr algn="r">
+                        <a:defRPr>
+                          <a:latin typeface="Roboto"/>
+                        </a:defRPr>
+                      </a:pPr>
+                      <a:r>
+                        <a:rPr sz="1050">
+                          <a:solidFill>
+                            <a:srgbClr val="25342A"/>
+                          </a:solidFill>
+                          <a:latin typeface="Roboto"/>
+                        </a:rPr>
+                        <a:t>$0</a:t>
+                      </a:r>
+                    </a:p>
+                  </a:txBody>
+                  <a:tcPr>
+                    <a:solidFill>
+                      <a:srgbClr val="F7FAF7"/>
+                    </a:solidFill>
+                  </a:tcPr>
+                </a:tc>
+                <a:tc>
+                  <a:txBody>
+                    <a:bodyPr/>
+                    <a:lstStyle/>
+                    <a:p>
+                      <a:pPr algn="r">
+                        <a:defRPr>
+                          <a:latin typeface="Roboto"/>
+                        </a:defRPr>
+                      </a:pPr>
+                      <a:r>
+                        <a:rPr sz="1050">
+                          <a:solidFill>
+                            <a:srgbClr val="25342A"/>
+                          </a:solidFill>
+                          <a:latin typeface="Roboto"/>
+                        </a:rPr>
+                        <a:t>$0</a:t>
+                      </a:r>
+                    </a:p>
+                  </a:txBody>
+                  <a:tcPr>
+                    <a:solidFill>
+                      <a:srgbClr val="F7FAF7"/>
+                    </a:solidFill>
+                  </a:tcPr>
+                </a:tc>
+                <a:tc>
+                  <a:txBody>
+                    <a:bodyPr/>
+                    <a:lstStyle/>
+                    <a:p>
+                      <a:pPr algn="r">
+                        <a:defRPr>
+                          <a:latin typeface="Roboto"/>
+                        </a:defRPr>
+                      </a:pPr>
+                      <a:r>
+                        <a:rPr sz="1050">
+                          <a:solidFill>
+                            <a:srgbClr val="25342A"/>
+                          </a:solidFill>
+                          <a:latin typeface="Roboto"/>
+                        </a:rPr>
+                        <a:t>$0</a:t>
+                      </a:r>
+                    </a:p>
+                  </a:txBody>
+                  <a:tcPr>
+                    <a:solidFill>
+                      <a:srgbClr val="F7FAF7"/>
+                    </a:solidFill>
+                  </a:tcPr>
+                </a:tc>
+                <a:tc>
+                  <a:txBody>
+                    <a:bodyPr/>
+                    <a:lstStyle/>
+                    <a:p>
+                      <a:pPr algn="r">
+                        <a:defRPr>
+                          <a:latin typeface="Roboto"/>
+                        </a:defRPr>
+                      </a:pPr>
+                      <a:r>
+                        <a:rPr sz="1050">
+                          <a:solidFill>
+                            <a:srgbClr val="B42318"/>
+                          </a:solidFill>
+                          <a:latin typeface="Roboto"/>
+                        </a:rPr>
+                        <a:t>($5,000)</a:t>
+                      </a:r>
+                    </a:p>
+                  </a:txBody>
+                  <a:tcPr>
+                    <a:solidFill>
+                      <a:srgbClr val="F7FAF7"/>
+                    </a:solidFill>
+                  </a:tcPr>
+                </a:tc>
+                <a:tc>
+                  <a:txBody>
+                    <a:bodyPr/>
+                    <a:lstStyle/>
+                    <a:p>
+                      <a:pPr algn="r">
+                        <a:defRPr>
+                          <a:latin typeface="Roboto"/>
+                        </a:defRPr>
+                      </a:pPr>
+                      <a:r>
+                        <a:rPr sz="1050">
+                          <a:solidFill>
+                            <a:srgbClr val="25342A"/>
+                          </a:solidFill>
+                          <a:latin typeface="Roboto"/>
+                        </a:rPr>
+                        <a:t>$152,398</a:t>
+                      </a:r>
+                    </a:p>
+                  </a:txBody>
+                  <a:tcPr>
+                    <a:solidFill>
+                      <a:srgbClr val="F7FAF7"/>
+                    </a:solidFill>
+                  </a:tcPr>
+                </a:tc>
+                <a:tc>
+                  <a:txBody>
+                    <a:bodyPr/>
+                    <a:lstStyle/>
+                    <a:p>
+                      <a:pPr algn="r">
+                        <a:defRPr>
+                          <a:latin typeface="Roboto"/>
+                        </a:defRPr>
+                      </a:pPr>
+                      <a:r>
+                        <a:rPr sz="1050">
+                          <a:solidFill>
+                            <a:srgbClr val="25342A"/>
+                          </a:solidFill>
+                          <a:latin typeface="Roboto"/>
+                        </a:rPr>
+                        <a:t>$109,022</a:t>
+                      </a:r>
+                    </a:p>
+                  </a:txBody>
+                  <a:tcPr>
+                    <a:solidFill>
+                      <a:srgbClr val="F7FAF7"/>
+                    </a:solidFill>
+                  </a:tcPr>
+                </a:tc>
+              </a:tr>
+              <a:tr h="310896">
+                <a:tc>
+                  <a:txBody>
+                    <a:bodyPr/>
+                    <a:lstStyle/>
+                    <a:p>
+                      <a:pPr algn="l">
+                        <a:defRPr>
+                          <a:latin typeface="Roboto"/>
+                        </a:defRPr>
+                      </a:pPr>
+                      <a:r>
+                        <a:rPr sz="1050">
+                          <a:solidFill>
+                            <a:srgbClr val="25342A"/>
+                          </a:solidFill>
+                          <a:latin typeface="Roboto"/>
+                        </a:rPr>
+                        <a:t>5 Oct</a:t>
+                      </a:r>
+                    </a:p>
+                  </a:txBody>
+                  <a:tcPr>
+                    <a:solidFill>
+                      <a:srgbClr val="FFFFFF"/>
+                    </a:solidFill>
+                  </a:tcPr>
+                </a:tc>
+                <a:tc>
+                  <a:txBody>
+                    <a:bodyPr/>
+                    <a:lstStyle/>
+                    <a:p>
+                      <a:pPr algn="r">
+                        <a:defRPr>
+                          <a:latin typeface="Roboto"/>
+                        </a:defRPr>
+                      </a:pPr>
+                      <a:r>
+                        <a:rPr sz="1050">
+                          <a:solidFill>
+                            <a:srgbClr val="25342A"/>
+                          </a:solidFill>
+                          <a:latin typeface="Roboto"/>
+                        </a:rPr>
+                        <a:t>$152,398</a:t>
+                      </a:r>
+                    </a:p>
+                  </a:txBody>
+                  <a:tcPr>
+                    <a:solidFill>
+                      <a:srgbClr val="FFFFFF"/>
+                    </a:solidFill>
+                  </a:tcPr>
+                </a:tc>
+                <a:tc>
+                  <a:txBody>
+                    <a:bodyPr/>
+                    <a:lstStyle/>
+                    <a:p>
+                      <a:pPr algn="r">
+                        <a:defRPr>
+                          <a:latin typeface="Roboto"/>
+                        </a:defRPr>
+                      </a:pPr>
+                      <a:r>
+                        <a:rPr sz="1050">
+                          <a:solidFill>
+                            <a:srgbClr val="25342A"/>
+                          </a:solidFill>
+                          <a:latin typeface="Roboto"/>
+                        </a:rPr>
+                        <a:t>$0</a:t>
+                      </a:r>
+                    </a:p>
+                  </a:txBody>
+                  <a:tcPr>
+                    <a:solidFill>
+                      <a:srgbClr val="FFFFFF"/>
+                    </a:solidFill>
+                  </a:tcPr>
+                </a:tc>
+                <a:tc>
+                  <a:txBody>
+                    <a:bodyPr/>
+                    <a:lstStyle/>
+                    <a:p>
+                      <a:pPr algn="r">
+                        <a:defRPr>
+                          <a:latin typeface="Roboto"/>
+                        </a:defRPr>
+                      </a:pPr>
+                      <a:r>
+                        <a:rPr sz="1050">
+                          <a:solidFill>
+                            <a:srgbClr val="25342A"/>
+                          </a:solidFill>
+                          <a:latin typeface="Roboto"/>
+                        </a:rPr>
+                        <a:t>$65,865</a:t>
+                      </a:r>
+                    </a:p>
+                  </a:txBody>
+                  <a:tcPr>
+                    <a:solidFill>
+                      <a:srgbClr val="FFFFFF"/>
+                    </a:solidFill>
+                  </a:tcPr>
+                </a:tc>
+                <a:tc>
+                  <a:txBody>
+                    <a:bodyPr/>
+                    <a:lstStyle/>
+                    <a:p>
+                      <a:pPr algn="r">
+                        <a:defRPr>
+                          <a:latin typeface="Roboto"/>
+                        </a:defRPr>
+                      </a:pPr>
+                      <a:r>
+                        <a:rPr sz="1050">
+                          <a:solidFill>
+                            <a:srgbClr val="B42318"/>
+                          </a:solidFill>
+                          <a:latin typeface="Roboto"/>
+                        </a:rPr>
+                        <a:t>($36,611)</a:t>
+                      </a:r>
+                    </a:p>
+                  </a:txBody>
+                  <a:tcPr>
+                    <a:solidFill>
+                      <a:srgbClr val="FFFFFF"/>
+                    </a:solidFill>
+                  </a:tcPr>
+                </a:tc>
+                <a:tc>
+                  <a:txBody>
+                    <a:bodyPr/>
+                    <a:lstStyle/>
+                    <a:p>
+                      <a:pPr algn="r">
+                        <a:defRPr>
+                          <a:latin typeface="Roboto"/>
+                        </a:defRPr>
+                      </a:pPr>
+                      <a:r>
+                        <a:rPr sz="1050">
+                          <a:solidFill>
+                            <a:srgbClr val="B42318"/>
+                          </a:solidFill>
+                          <a:latin typeface="Roboto"/>
+                        </a:rPr>
+                        <a:t>($51,167)</a:t>
+                      </a:r>
+                    </a:p>
+                  </a:txBody>
+                  <a:tcPr>
+                    <a:solidFill>
+                      <a:srgbClr val="FFFFFF"/>
+                    </a:solidFill>
+                  </a:tcPr>
+                </a:tc>
+                <a:tc>
+                  <a:txBody>
+                    <a:bodyPr/>
+                    <a:lstStyle/>
+                    <a:p>
+                      <a:pPr algn="r">
+                        <a:defRPr>
+                          <a:latin typeface="Roboto"/>
+                        </a:defRPr>
+                      </a:pPr>
+                      <a:r>
+                        <a:rPr sz="1050">
+                          <a:solidFill>
+                            <a:srgbClr val="25342A"/>
+                          </a:solidFill>
+                          <a:latin typeface="Roboto"/>
+                        </a:rPr>
+                        <a:t>$0</a:t>
+                      </a:r>
+                    </a:p>
+                  </a:txBody>
+                  <a:tcPr>
+                    <a:solidFill>
+                      <a:srgbClr val="FFFFFF"/>
+                    </a:solidFill>
+                  </a:tcPr>
+                </a:tc>
+                <a:tc>
+                  <a:txBody>
+                    <a:bodyPr/>
+                    <a:lstStyle/>
+                    <a:p>
+                      <a:pPr algn="r">
+                        <a:defRPr>
+                          <a:latin typeface="Roboto"/>
+                        </a:defRPr>
+                      </a:pPr>
+                      <a:r>
+                        <a:rPr sz="1050">
+                          <a:solidFill>
+                            <a:srgbClr val="B42318"/>
+                          </a:solidFill>
+                          <a:latin typeface="Roboto"/>
+                        </a:rPr>
+                        <a:t>($1,100)</a:t>
+                      </a:r>
+                    </a:p>
+                  </a:txBody>
+                  <a:tcPr>
+                    <a:solidFill>
+                      <a:srgbClr val="FFFFFF"/>
+                    </a:solidFill>
+                  </a:tcPr>
+                </a:tc>
+                <a:tc>
+                  <a:txBody>
+                    <a:bodyPr/>
+                    <a:lstStyle/>
+                    <a:p>
+                      <a:pPr algn="r">
+                        <a:defRPr>
+                          <a:latin typeface="Roboto"/>
+                        </a:defRPr>
+                      </a:pPr>
+                      <a:r>
+                        <a:rPr sz="1050">
+                          <a:solidFill>
+                            <a:srgbClr val="25342A"/>
+                          </a:solidFill>
+                          <a:latin typeface="Roboto"/>
+                        </a:rPr>
+                        <a:t>$129,385</a:t>
+                      </a:r>
+                    </a:p>
+                  </a:txBody>
+                  <a:tcPr>
+                    <a:solidFill>
+                      <a:srgbClr val="FFFFFF"/>
+                    </a:solidFill>
+                  </a:tcPr>
+                </a:tc>
+                <a:tc>
+                  <a:txBody>
+                    <a:bodyPr/>
+                    <a:lstStyle/>
+                    <a:p>
+                      <a:pPr algn="r">
+                        <a:defRPr>
+                          <a:latin typeface="Roboto"/>
+                        </a:defRPr>
+                      </a:pPr>
+                      <a:r>
+                        <a:rPr sz="1050">
+                          <a:solidFill>
+                            <a:srgbClr val="25342A"/>
+                          </a:solidFill>
+                          <a:latin typeface="Roboto"/>
+                        </a:rPr>
+                        <a:t>$100,131</a:t>
+                      </a:r>
+                    </a:p>
+                  </a:txBody>
+                  <a:tcPr>
+                    <a:solidFill>
+                      <a:srgbClr val="FFFFFF"/>
+                    </a:solidFill>
+                  </a:tcPr>
+                </a:tc>
+              </a:tr>
+              <a:tr h="310896">
+                <a:tc>
+                  <a:txBody>
+                    <a:bodyPr/>
+                    <a:lstStyle/>
+                    <a:p>
+                      <a:pPr algn="l">
+                        <a:defRPr>
+                          <a:latin typeface="Roboto"/>
+                        </a:defRPr>
+                      </a:pPr>
+                      <a:r>
+                        <a:rPr sz="1050">
+                          <a:solidFill>
+                            <a:srgbClr val="25342A"/>
+                          </a:solidFill>
+                          <a:latin typeface="Roboto"/>
+                        </a:rPr>
+                        <a:t>12 Oct</a:t>
+                      </a:r>
+                    </a:p>
+                  </a:txBody>
+                  <a:tcPr>
+                    <a:solidFill>
+                      <a:srgbClr val="F7FAF7"/>
+                    </a:solidFill>
+                  </a:tcPr>
+                </a:tc>
+                <a:tc>
+                  <a:txBody>
+                    <a:bodyPr/>
+                    <a:lstStyle/>
+                    <a:p>
+                      <a:pPr algn="r">
+                        <a:defRPr>
+                          <a:latin typeface="Roboto"/>
+                        </a:defRPr>
+                      </a:pPr>
+                      <a:r>
+                        <a:rPr sz="1050">
+                          <a:solidFill>
+                            <a:srgbClr val="25342A"/>
+                          </a:solidFill>
+                          <a:latin typeface="Roboto"/>
+                        </a:rPr>
+                        <a:t>$129,385</a:t>
+                      </a:r>
+                    </a:p>
+                  </a:txBody>
+                  <a:tcPr>
+                    <a:solidFill>
+                      <a:srgbClr val="F7FAF7"/>
+                    </a:solidFill>
+                  </a:tcPr>
+                </a:tc>
+                <a:tc>
+                  <a:txBody>
+                    <a:bodyPr/>
+                    <a:lstStyle/>
+                    <a:p>
+                      <a:pPr algn="r">
+                        <a:defRPr>
+                          <a:latin typeface="Roboto"/>
+                        </a:defRPr>
+                      </a:pPr>
+                      <a:r>
+                        <a:rPr sz="1050">
+                          <a:solidFill>
+                            <a:srgbClr val="25342A"/>
+                          </a:solidFill>
+                          <a:latin typeface="Roboto"/>
+                        </a:rPr>
+                        <a:t>$0</a:t>
+                      </a:r>
+                    </a:p>
+                  </a:txBody>
+                  <a:tcPr>
+                    <a:solidFill>
+                      <a:srgbClr val="F7FAF7"/>
+                    </a:solidFill>
+                  </a:tcPr>
+                </a:tc>
+                <a:tc>
+                  <a:txBody>
+                    <a:bodyPr/>
+                    <a:lstStyle/>
+                    <a:p>
+                      <a:pPr algn="r">
+                        <a:defRPr>
+                          <a:latin typeface="Roboto"/>
+                        </a:defRPr>
+                      </a:pPr>
+                      <a:r>
+                        <a:rPr sz="1050">
+                          <a:solidFill>
+                            <a:srgbClr val="25342A"/>
+                          </a:solidFill>
+                          <a:latin typeface="Roboto"/>
+                        </a:rPr>
+                        <a:t>$55,929</a:t>
+                      </a:r>
+                    </a:p>
+                  </a:txBody>
+                  <a:tcPr>
+                    <a:solidFill>
+                      <a:srgbClr val="F7FAF7"/>
+                    </a:solidFill>
+                  </a:tcPr>
+                </a:tc>
+                <a:tc>
+                  <a:txBody>
+                    <a:bodyPr/>
+                    <a:lstStyle/>
+                    <a:p>
+                      <a:pPr algn="r">
+                        <a:defRPr>
+                          <a:latin typeface="Roboto"/>
+                        </a:defRPr>
+                      </a:pPr>
+                      <a:r>
+                        <a:rPr sz="1050">
+                          <a:solidFill>
+                            <a:srgbClr val="25342A"/>
+                          </a:solidFill>
+                          <a:latin typeface="Roboto"/>
+                        </a:rPr>
+                        <a:t>$0</a:t>
+                      </a:r>
+                    </a:p>
+                  </a:txBody>
+                  <a:tcPr>
+                    <a:solidFill>
+                      <a:srgbClr val="F7FAF7"/>
+                    </a:solidFill>
+                  </a:tcPr>
+                </a:tc>
+                <a:tc>
+                  <a:txBody>
+                    <a:bodyPr/>
+                    <a:lstStyle/>
+                    <a:p>
+                      <a:pPr algn="r">
+                        <a:defRPr>
+                          <a:latin typeface="Roboto"/>
+                        </a:defRPr>
+                      </a:pPr>
+                      <a:r>
+                        <a:rPr sz="1050">
+                          <a:solidFill>
+                            <a:srgbClr val="25342A"/>
+                          </a:solidFill>
+                          <a:latin typeface="Roboto"/>
+                        </a:rPr>
+                        <a:t>$0</a:t>
+                      </a:r>
+                    </a:p>
+                  </a:txBody>
+                  <a:tcPr>
+                    <a:solidFill>
+                      <a:srgbClr val="F7FAF7"/>
+                    </a:solidFill>
+                  </a:tcPr>
+                </a:tc>
+                <a:tc>
+                  <a:txBody>
+                    <a:bodyPr/>
+                    <a:lstStyle/>
+                    <a:p>
+                      <a:pPr algn="r">
+                        <a:defRPr>
+                          <a:latin typeface="Roboto"/>
+                        </a:defRPr>
+                      </a:pPr>
+                      <a:r>
+                        <a:rPr sz="1050">
+                          <a:solidFill>
+                            <a:srgbClr val="25342A"/>
+                          </a:solidFill>
+                          <a:latin typeface="Roboto"/>
+                        </a:rPr>
+                        <a:t>$0</a:t>
+                      </a:r>
+                    </a:p>
+                  </a:txBody>
+                  <a:tcPr>
+                    <a:solidFill>
+                      <a:srgbClr val="F7FAF7"/>
+                    </a:solidFill>
+                  </a:tcPr>
+                </a:tc>
+                <a:tc>
+                  <a:txBody>
+                    <a:bodyPr/>
+                    <a:lstStyle/>
+                    <a:p>
+                      <a:pPr algn="r">
+                        <a:defRPr>
+                          <a:latin typeface="Roboto"/>
+                        </a:defRPr>
+                      </a:pPr>
+                      <a:r>
+                        <a:rPr sz="1050">
+                          <a:solidFill>
+                            <a:srgbClr val="25342A"/>
+                          </a:solidFill>
+                          <a:latin typeface="Roboto"/>
+                        </a:rPr>
+                        <a:t>$0</a:t>
+                      </a:r>
+                    </a:p>
+                  </a:txBody>
+                  <a:tcPr>
+                    <a:solidFill>
+                      <a:srgbClr val="F7FAF7"/>
+                    </a:solidFill>
+                  </a:tcPr>
+                </a:tc>
+                <a:tc>
+                  <a:txBody>
+                    <a:bodyPr/>
+                    <a:lstStyle/>
+                    <a:p>
+                      <a:pPr algn="r">
+                        <a:defRPr>
+                          <a:latin typeface="Roboto"/>
+                        </a:defRPr>
+                      </a:pPr>
+                      <a:r>
+                        <a:rPr sz="1050">
+                          <a:solidFill>
+                            <a:srgbClr val="25342A"/>
+                          </a:solidFill>
+                          <a:latin typeface="Roboto"/>
+                        </a:rPr>
+                        <a:t>$185,314</a:t>
+                      </a:r>
+                    </a:p>
+                  </a:txBody>
+                  <a:tcPr>
+                    <a:solidFill>
+                      <a:srgbClr val="F7FAF7"/>
+                    </a:solidFill>
+                  </a:tcPr>
+                </a:tc>
+                <a:tc>
+                  <a:txBody>
+                    <a:bodyPr/>
+                    <a:lstStyle/>
+                    <a:p>
+                      <a:pPr algn="r">
+                        <a:defRPr>
+                          <a:latin typeface="Roboto"/>
+                        </a:defRPr>
+                      </a:pPr>
+                      <a:r>
+                        <a:rPr sz="1050">
+                          <a:solidFill>
+                            <a:srgbClr val="25342A"/>
+                          </a:solidFill>
+                          <a:latin typeface="Roboto"/>
+                        </a:rPr>
+                        <a:t>$146,900</a:t>
+                      </a:r>
+                    </a:p>
+                  </a:txBody>
+                  <a:tcPr>
+                    <a:solidFill>
+                      <a:srgbClr val="F7FAF7"/>
+                    </a:solidFill>
+                  </a:tcPr>
+                </a:tc>
+              </a:tr>
+              <a:tr h="310896">
+                <a:tc>
+                  <a:txBody>
+                    <a:bodyPr/>
+                    <a:lstStyle/>
+                    <a:p>
+                      <a:pPr algn="l">
+                        <a:defRPr>
+                          <a:latin typeface="Roboto"/>
+                        </a:defRPr>
+                      </a:pPr>
+                      <a:r>
+                        <a:rPr sz="1050">
+                          <a:solidFill>
+                            <a:srgbClr val="25342A"/>
+                          </a:solidFill>
+                          <a:latin typeface="Roboto"/>
+                        </a:rPr>
+                        <a:t>19 Oct</a:t>
+                      </a:r>
+                    </a:p>
+                  </a:txBody>
+                  <a:tcPr>
+                    <a:solidFill>
+                      <a:srgbClr val="FFFFFF"/>
+                    </a:solidFill>
+                  </a:tcPr>
+                </a:tc>
+                <a:tc>
+                  <a:txBody>
+                    <a:bodyPr/>
+                    <a:lstStyle/>
+                    <a:p>
+                      <a:pPr algn="r">
+                        <a:defRPr>
+                          <a:latin typeface="Roboto"/>
+                        </a:defRPr>
+                      </a:pPr>
+                      <a:r>
+                        <a:rPr sz="1050">
+                          <a:solidFill>
+                            <a:srgbClr val="25342A"/>
+                          </a:solidFill>
+                          <a:latin typeface="Roboto"/>
+                        </a:rPr>
+                        <a:t>$185,314</a:t>
+                      </a:r>
+                    </a:p>
+                  </a:txBody>
+                  <a:tcPr>
+                    <a:solidFill>
+                      <a:srgbClr val="FFFFFF"/>
+                    </a:solidFill>
+                  </a:tcPr>
+                </a:tc>
+                <a:tc>
+                  <a:txBody>
+                    <a:bodyPr/>
+                    <a:lstStyle/>
+                    <a:p>
+                      <a:pPr algn="r">
+                        <a:defRPr>
+                          <a:latin typeface="Roboto"/>
+                        </a:defRPr>
+                      </a:pPr>
+                      <a:r>
+                        <a:rPr sz="1050">
+                          <a:solidFill>
+                            <a:srgbClr val="25342A"/>
+                          </a:solidFill>
+                          <a:latin typeface="Roboto"/>
+                        </a:rPr>
+                        <a:t>$0</a:t>
+                      </a:r>
+                    </a:p>
+                  </a:txBody>
+                  <a:tcPr>
+                    <a:solidFill>
+                      <a:srgbClr val="FFFFFF"/>
+                    </a:solidFill>
+                  </a:tcPr>
+                </a:tc>
+                <a:tc>
+                  <a:txBody>
+                    <a:bodyPr/>
+                    <a:lstStyle/>
+                    <a:p>
+                      <a:pPr algn="r">
+                        <a:defRPr>
+                          <a:latin typeface="Roboto"/>
+                        </a:defRPr>
+                      </a:pPr>
+                      <a:r>
+                        <a:rPr sz="1050">
+                          <a:solidFill>
+                            <a:srgbClr val="25342A"/>
+                          </a:solidFill>
+                          <a:latin typeface="Roboto"/>
+                        </a:rPr>
+                        <a:t>$39,949</a:t>
+                      </a:r>
+                    </a:p>
+                  </a:txBody>
+                  <a:tcPr>
+                    <a:solidFill>
+                      <a:srgbClr val="FFFFFF"/>
+                    </a:solidFill>
+                  </a:tcPr>
+                </a:tc>
+                <a:tc>
+                  <a:txBody>
+                    <a:bodyPr/>
+                    <a:lstStyle/>
+                    <a:p>
+                      <a:pPr algn="r">
+                        <a:defRPr>
+                          <a:latin typeface="Roboto"/>
+                        </a:defRPr>
+                      </a:pPr>
+                      <a:r>
+                        <a:rPr sz="1050">
+                          <a:solidFill>
+                            <a:srgbClr val="B42318"/>
+                          </a:solidFill>
+                          <a:latin typeface="Roboto"/>
+                        </a:rPr>
+                        <a:t>($36,611)</a:t>
+                      </a:r>
+                    </a:p>
+                  </a:txBody>
+                  <a:tcPr>
+                    <a:solidFill>
+                      <a:srgbClr val="FFFFFF"/>
+                    </a:solidFill>
+                  </a:tcPr>
+                </a:tc>
+                <a:tc>
+                  <a:txBody>
+                    <a:bodyPr/>
+                    <a:lstStyle/>
+                    <a:p>
+                      <a:pPr algn="r">
+                        <a:defRPr>
+                          <a:latin typeface="Roboto"/>
+                        </a:defRPr>
+                      </a:pPr>
+                      <a:r>
+                        <a:rPr sz="1050">
+                          <a:solidFill>
+                            <a:srgbClr val="B42318"/>
+                          </a:solidFill>
+                          <a:latin typeface="Roboto"/>
+                        </a:rPr>
+                        <a:t>($51,166)</a:t>
+                      </a:r>
+                    </a:p>
+                  </a:txBody>
+                  <a:tcPr>
+                    <a:solidFill>
+                      <a:srgbClr val="FFFFFF"/>
+                    </a:solidFill>
+                  </a:tcPr>
+                </a:tc>
+                <a:tc>
+                  <a:txBody>
+                    <a:bodyPr/>
+                    <a:lstStyle/>
+                    <a:p>
+                      <a:pPr algn="r">
+                        <a:defRPr>
+                          <a:latin typeface="Roboto"/>
+                        </a:defRPr>
+                      </a:pPr>
+                      <a:r>
+                        <a:rPr sz="1050">
+                          <a:solidFill>
+                            <a:srgbClr val="25342A"/>
+                          </a:solidFill>
+                          <a:latin typeface="Roboto"/>
+                        </a:rPr>
+                        <a:t>$0</a:t>
+                      </a:r>
+                    </a:p>
+                  </a:txBody>
+                  <a:tcPr>
+                    <a:solidFill>
+                      <a:srgbClr val="FFFFFF"/>
+                    </a:solidFill>
+                  </a:tcPr>
+                </a:tc>
+                <a:tc>
+                  <a:txBody>
+                    <a:bodyPr/>
+                    <a:lstStyle/>
+                    <a:p>
+                      <a:pPr algn="r">
+                        <a:defRPr>
+                          <a:latin typeface="Roboto"/>
+                        </a:defRPr>
+                      </a:pPr>
+                      <a:r>
+                        <a:rPr sz="1050">
+                          <a:solidFill>
+                            <a:srgbClr val="25342A"/>
+                          </a:solidFill>
+                          <a:latin typeface="Roboto"/>
+                        </a:rPr>
+                        <a:t>$0</a:t>
+                      </a:r>
+                    </a:p>
+                  </a:txBody>
+                  <a:tcPr>
+                    <a:solidFill>
+                      <a:srgbClr val="FFFFFF"/>
+                    </a:solidFill>
+                  </a:tcPr>
+                </a:tc>
+                <a:tc>
+                  <a:txBody>
+                    <a:bodyPr/>
+                    <a:lstStyle/>
+                    <a:p>
+                      <a:pPr algn="r">
+                        <a:defRPr>
+                          <a:latin typeface="Roboto"/>
+                        </a:defRPr>
+                      </a:pPr>
+                      <a:r>
+                        <a:rPr sz="1050">
+                          <a:solidFill>
+                            <a:srgbClr val="25342A"/>
+                          </a:solidFill>
+                          <a:latin typeface="Roboto"/>
+                        </a:rPr>
+                        <a:t>$137,486</a:t>
+                      </a:r>
+                    </a:p>
+                  </a:txBody>
+                  <a:tcPr>
+                    <a:solidFill>
+                      <a:srgbClr val="FFFFFF"/>
+                    </a:solidFill>
+                  </a:tcPr>
+                </a:tc>
+                <a:tc>
+                  <a:txBody>
+                    <a:bodyPr/>
+                    <a:lstStyle/>
+                    <a:p>
+                      <a:pPr algn="r">
+                        <a:defRPr>
+                          <a:latin typeface="Roboto"/>
+                        </a:defRPr>
+                      </a:pPr>
+                      <a:r>
+                        <a:rPr sz="1050">
+                          <a:solidFill>
+                            <a:srgbClr val="25342A"/>
+                          </a:solidFill>
+                          <a:latin typeface="Roboto"/>
+                        </a:rPr>
+                        <a:t>$111,981</a:t>
+                      </a:r>
+                    </a:p>
+                  </a:txBody>
+                  <a:tcPr>
+                    <a:solidFill>
+                      <a:srgbClr val="FFFFFF"/>
+                    </a:solidFill>
+                  </a:tcPr>
+                </a:tc>
+              </a:tr>
+              <a:tr h="310896">
+                <a:tc>
+                  <a:txBody>
+                    <a:bodyPr/>
+                    <a:lstStyle/>
+                    <a:p>
+                      <a:pPr algn="l">
+                        <a:defRPr>
+                          <a:latin typeface="Roboto"/>
+                        </a:defRPr>
+                      </a:pPr>
+                      <a:r>
+                        <a:rPr sz="1050">
+                          <a:solidFill>
+                            <a:srgbClr val="25342A"/>
+                          </a:solidFill>
+                          <a:latin typeface="Roboto"/>
+                        </a:rPr>
+                        <a:t>26 Oct</a:t>
+                      </a:r>
+                    </a:p>
+                  </a:txBody>
+                  <a:tcPr>
+                    <a:solidFill>
+                      <a:srgbClr val="F7FAF7"/>
+                    </a:solidFill>
+                  </a:tcPr>
+                </a:tc>
+                <a:tc>
+                  <a:txBody>
+                    <a:bodyPr/>
+                    <a:lstStyle/>
+                    <a:p>
+                      <a:pPr algn="r">
+                        <a:defRPr>
+                          <a:latin typeface="Roboto"/>
+                        </a:defRPr>
+                      </a:pPr>
+                      <a:r>
+                        <a:rPr sz="1050">
+                          <a:solidFill>
+                            <a:srgbClr val="25342A"/>
+                          </a:solidFill>
+                          <a:latin typeface="Roboto"/>
+                        </a:rPr>
+                        <a:t>$137,486</a:t>
+                      </a:r>
+                    </a:p>
+                  </a:txBody>
+                  <a:tcPr>
+                    <a:solidFill>
+                      <a:srgbClr val="F7FAF7"/>
+                    </a:solidFill>
+                  </a:tcPr>
+                </a:tc>
+                <a:tc>
+                  <a:txBody>
+                    <a:bodyPr/>
+                    <a:lstStyle/>
+                    <a:p>
+                      <a:pPr algn="r">
+                        <a:defRPr>
+                          <a:latin typeface="Roboto"/>
+                        </a:defRPr>
+                      </a:pPr>
+                      <a:r>
+                        <a:rPr sz="1050">
+                          <a:solidFill>
+                            <a:srgbClr val="25342A"/>
+                          </a:solidFill>
+                          <a:latin typeface="Roboto"/>
+                        </a:rPr>
+                        <a:t>$0</a:t>
+                      </a:r>
+                    </a:p>
+                  </a:txBody>
+                  <a:tcPr>
+                    <a:solidFill>
+                      <a:srgbClr val="F7FAF7"/>
+                    </a:solidFill>
+                  </a:tcPr>
+                </a:tc>
+                <a:tc>
+                  <a:txBody>
+                    <a:bodyPr/>
+                    <a:lstStyle/>
+                    <a:p>
+                      <a:pPr algn="r">
+                        <a:defRPr>
+                          <a:latin typeface="Roboto"/>
+                        </a:defRPr>
+                      </a:pPr>
+                      <a:r>
+                        <a:rPr sz="1050">
+                          <a:solidFill>
+                            <a:srgbClr val="25342A"/>
+                          </a:solidFill>
+                          <a:latin typeface="Roboto"/>
+                        </a:rPr>
+                        <a:t>$39,949</a:t>
+                      </a:r>
+                    </a:p>
+                  </a:txBody>
+                  <a:tcPr>
+                    <a:solidFill>
+                      <a:srgbClr val="F7FAF7"/>
+                    </a:solidFill>
+                  </a:tcPr>
+                </a:tc>
+                <a:tc>
+                  <a:txBody>
+                    <a:bodyPr/>
+                    <a:lstStyle/>
+                    <a:p>
+                      <a:pPr algn="r">
+                        <a:defRPr>
+                          <a:latin typeface="Roboto"/>
+                        </a:defRPr>
+                      </a:pPr>
+                      <a:r>
+                        <a:rPr sz="1050">
+                          <a:solidFill>
+                            <a:srgbClr val="25342A"/>
+                          </a:solidFill>
+                          <a:latin typeface="Roboto"/>
+                        </a:rPr>
+                        <a:t>$0</a:t>
+                      </a:r>
+                    </a:p>
+                  </a:txBody>
+                  <a:tcPr>
+                    <a:solidFill>
+                      <a:srgbClr val="F7FAF7"/>
+                    </a:solidFill>
+                  </a:tcPr>
+                </a:tc>
+                <a:tc>
+                  <a:txBody>
+                    <a:bodyPr/>
+                    <a:lstStyle/>
+                    <a:p>
+                      <a:pPr algn="r">
+                        <a:defRPr>
+                          <a:latin typeface="Roboto"/>
+                        </a:defRPr>
+                      </a:pPr>
+                      <a:r>
+                        <a:rPr sz="1050">
+                          <a:solidFill>
+                            <a:srgbClr val="25342A"/>
+                          </a:solidFill>
+                          <a:latin typeface="Roboto"/>
+                        </a:rPr>
+                        <a:t>$0</a:t>
+                      </a:r>
+                    </a:p>
+                  </a:txBody>
+                  <a:tcPr>
+                    <a:solidFill>
+                      <a:srgbClr val="F7FAF7"/>
+                    </a:solidFill>
+                  </a:tcPr>
+                </a:tc>
+                <a:tc>
+                  <a:txBody>
+                    <a:bodyPr/>
+                    <a:lstStyle/>
+                    <a:p>
+                      <a:pPr algn="r">
+                        <a:defRPr>
+                          <a:latin typeface="Roboto"/>
+                        </a:defRPr>
+                      </a:pPr>
+                      <a:r>
+                        <a:rPr sz="1050">
+                          <a:solidFill>
+                            <a:srgbClr val="25342A"/>
+                          </a:solidFill>
+                          <a:latin typeface="Roboto"/>
+                        </a:rPr>
+                        <a:t>$0</a:t>
+                      </a:r>
+                    </a:p>
+                  </a:txBody>
+                  <a:tcPr>
+                    <a:solidFill>
+                      <a:srgbClr val="F7FAF7"/>
+                    </a:solidFill>
+                  </a:tcPr>
+                </a:tc>
+                <a:tc>
+                  <a:txBody>
+                    <a:bodyPr/>
+                    <a:lstStyle/>
+                    <a:p>
+                      <a:pPr algn="r">
+                        <a:defRPr>
+                          <a:latin typeface="Roboto"/>
+                        </a:defRPr>
+                      </a:pPr>
+                      <a:r>
+                        <a:rPr sz="1050">
+                          <a:solidFill>
+                            <a:srgbClr val="25342A"/>
+                          </a:solidFill>
+                          <a:latin typeface="Roboto"/>
+                        </a:rPr>
+                        <a:t>$0</a:t>
+                      </a:r>
+                    </a:p>
+                  </a:txBody>
+                  <a:tcPr>
+                    <a:solidFill>
+                      <a:srgbClr val="F7FAF7"/>
+                    </a:solidFill>
+                  </a:tcPr>
+                </a:tc>
+                <a:tc>
+                  <a:txBody>
+                    <a:bodyPr/>
+                    <a:lstStyle/>
+                    <a:p>
+                      <a:pPr algn="r">
+                        <a:defRPr>
+                          <a:latin typeface="Roboto"/>
+                        </a:defRPr>
+                      </a:pPr>
+                      <a:r>
+                        <a:rPr sz="1050">
+                          <a:solidFill>
+                            <a:srgbClr val="25342A"/>
+                          </a:solidFill>
+                          <a:latin typeface="Roboto"/>
+                        </a:rPr>
+                        <a:t>$177,435</a:t>
+                      </a:r>
+                    </a:p>
+                  </a:txBody>
+                  <a:tcPr>
+                    <a:solidFill>
+                      <a:srgbClr val="F7FAF7"/>
+                    </a:solidFill>
+                  </a:tcPr>
+                </a:tc>
+                <a:tc>
+                  <a:txBody>
+                    <a:bodyPr/>
+                    <a:lstStyle/>
+                    <a:p>
+                      <a:pPr algn="r">
+                        <a:defRPr>
+                          <a:latin typeface="Roboto"/>
+                        </a:defRPr>
+                      </a:pPr>
+                      <a:r>
+                        <a:rPr sz="1050">
+                          <a:solidFill>
+                            <a:srgbClr val="25342A"/>
+                          </a:solidFill>
+                          <a:latin typeface="Roboto"/>
+                        </a:rPr>
+                        <a:t>$137,486</a:t>
+                      </a:r>
+                    </a:p>
+                  </a:txBody>
+                  <a:tcPr>
+                    <a:solidFill>
+                      <a:srgbClr val="F7FAF7"/>
+                    </a:solidFill>
+                  </a:tcPr>
+                </a:tc>
+              </a:tr>
+              <a:tr h="310896">
+                <a:tc>
+                  <a:txBody>
+                    <a:bodyPr/>
+                    <a:lstStyle/>
+                    <a:p>
+                      <a:pPr algn="l">
+                        <a:defRPr>
+                          <a:latin typeface="Roboto"/>
+                        </a:defRPr>
+                      </a:pPr>
+                      <a:r>
+                        <a:rPr sz="1050">
+                          <a:solidFill>
+                            <a:srgbClr val="25342A"/>
+                          </a:solidFill>
+                          <a:latin typeface="Roboto"/>
+                        </a:rPr>
+                        <a:t>2 Nov</a:t>
+                      </a:r>
+                    </a:p>
+                  </a:txBody>
+                  <a:tcPr>
+                    <a:solidFill>
+                      <a:srgbClr val="FFFFFF"/>
+                    </a:solidFill>
+                  </a:tcPr>
+                </a:tc>
+                <a:tc>
+                  <a:txBody>
+                    <a:bodyPr/>
+                    <a:lstStyle/>
+                    <a:p>
+                      <a:pPr algn="r">
+                        <a:defRPr>
+                          <a:latin typeface="Roboto"/>
+                        </a:defRPr>
+                      </a:pPr>
+                      <a:r>
+                        <a:rPr sz="1050">
+                          <a:solidFill>
+                            <a:srgbClr val="25342A"/>
+                          </a:solidFill>
+                          <a:latin typeface="Roboto"/>
+                        </a:rPr>
+                        <a:t>$177,435</a:t>
+                      </a:r>
+                    </a:p>
+                  </a:txBody>
+                  <a:tcPr>
+                    <a:solidFill>
+                      <a:srgbClr val="FFFFFF"/>
+                    </a:solidFill>
+                  </a:tcPr>
+                </a:tc>
+                <a:tc>
+                  <a:txBody>
+                    <a:bodyPr/>
+                    <a:lstStyle/>
+                    <a:p>
+                      <a:pPr algn="r">
+                        <a:defRPr>
+                          <a:latin typeface="Roboto"/>
+                        </a:defRPr>
+                      </a:pPr>
+                      <a:r>
+                        <a:rPr sz="1050">
+                          <a:solidFill>
+                            <a:srgbClr val="25342A"/>
+                          </a:solidFill>
+                          <a:latin typeface="Roboto"/>
+                        </a:rPr>
+                        <a:t>$0</a:t>
+                      </a:r>
+                    </a:p>
+                  </a:txBody>
+                  <a:tcPr>
+                    <a:solidFill>
+                      <a:srgbClr val="FFFFFF"/>
+                    </a:solidFill>
+                  </a:tcPr>
+                </a:tc>
+                <a:tc>
+                  <a:txBody>
+                    <a:bodyPr/>
+                    <a:lstStyle/>
+                    <a:p>
+                      <a:pPr algn="r">
+                        <a:defRPr>
+                          <a:latin typeface="Roboto"/>
+                        </a:defRPr>
+                      </a:pPr>
+                      <a:r>
+                        <a:rPr sz="1050">
+                          <a:solidFill>
+                            <a:srgbClr val="25342A"/>
+                          </a:solidFill>
+                          <a:latin typeface="Roboto"/>
+                        </a:rPr>
+                        <a:t>$89,834</a:t>
+                      </a:r>
+                    </a:p>
+                  </a:txBody>
+                  <a:tcPr>
+                    <a:solidFill>
+                      <a:srgbClr val="FFFFFF"/>
+                    </a:solidFill>
+                  </a:tcPr>
+                </a:tc>
+                <a:tc>
+                  <a:txBody>
+                    <a:bodyPr/>
+                    <a:lstStyle/>
+                    <a:p>
+                      <a:pPr algn="r">
+                        <a:defRPr>
+                          <a:latin typeface="Roboto"/>
+                        </a:defRPr>
+                      </a:pPr>
+                      <a:r>
+                        <a:rPr sz="1050">
+                          <a:solidFill>
+                            <a:srgbClr val="B42318"/>
+                          </a:solidFill>
+                          <a:latin typeface="Roboto"/>
+                        </a:rPr>
+                        <a:t>($36,611)</a:t>
+                      </a:r>
+                    </a:p>
+                  </a:txBody>
+                  <a:tcPr>
+                    <a:solidFill>
+                      <a:srgbClr val="FFFFFF"/>
+                    </a:solidFill>
+                  </a:tcPr>
+                </a:tc>
+                <a:tc>
+                  <a:txBody>
+                    <a:bodyPr/>
+                    <a:lstStyle/>
+                    <a:p>
+                      <a:pPr algn="r">
+                        <a:defRPr>
+                          <a:latin typeface="Roboto"/>
+                        </a:defRPr>
+                      </a:pPr>
+                      <a:r>
+                        <a:rPr sz="1050">
+                          <a:solidFill>
+                            <a:srgbClr val="B42318"/>
+                          </a:solidFill>
+                          <a:latin typeface="Roboto"/>
+                        </a:rPr>
+                        <a:t>($51,167)</a:t>
+                      </a:r>
+                    </a:p>
+                  </a:txBody>
+                  <a:tcPr>
+                    <a:solidFill>
+                      <a:srgbClr val="FFFFFF"/>
+                    </a:solidFill>
+                  </a:tcPr>
+                </a:tc>
+                <a:tc>
+                  <a:txBody>
+                    <a:bodyPr/>
+                    <a:lstStyle/>
+                    <a:p>
+                      <a:pPr algn="r">
+                        <a:defRPr>
+                          <a:latin typeface="Roboto"/>
+                        </a:defRPr>
+                      </a:pPr>
+                      <a:r>
+                        <a:rPr sz="1050">
+                          <a:solidFill>
+                            <a:srgbClr val="B42318"/>
+                          </a:solidFill>
+                          <a:latin typeface="Roboto"/>
+                        </a:rPr>
+                        <a:t>($86,220)</a:t>
+                      </a:r>
+                    </a:p>
+                  </a:txBody>
+                  <a:tcPr>
+                    <a:solidFill>
+                      <a:srgbClr val="FFFFFF"/>
+                    </a:solidFill>
+                  </a:tcPr>
+                </a:tc>
+                <a:tc>
+                  <a:txBody>
+                    <a:bodyPr/>
+                    <a:lstStyle/>
+                    <a:p>
+                      <a:pPr algn="r">
+                        <a:defRPr>
+                          <a:latin typeface="Roboto"/>
+                        </a:defRPr>
+                      </a:pPr>
+                      <a:r>
+                        <a:rPr sz="1050">
+                          <a:solidFill>
+                            <a:srgbClr val="B42318"/>
+                          </a:solidFill>
+                          <a:latin typeface="Roboto"/>
+                        </a:rPr>
+                        <a:t>($6,100)</a:t>
+                      </a:r>
+                    </a:p>
+                  </a:txBody>
+                  <a:tcPr>
+                    <a:solidFill>
+                      <a:srgbClr val="FFFFFF"/>
+                    </a:solidFill>
+                  </a:tcPr>
+                </a:tc>
+                <a:tc>
+                  <a:txBody>
+                    <a:bodyPr/>
+                    <a:lstStyle/>
+                    <a:p>
+                      <a:pPr algn="r">
+                        <a:defRPr>
+                          <a:latin typeface="Roboto"/>
+                        </a:defRPr>
+                      </a:pPr>
+                      <a:r>
+                        <a:rPr sz="1050">
+                          <a:solidFill>
+                            <a:srgbClr val="25342A"/>
+                          </a:solidFill>
+                          <a:latin typeface="Roboto"/>
+                        </a:rPr>
+                        <a:t>$87,171</a:t>
+                      </a:r>
+                    </a:p>
+                  </a:txBody>
+                  <a:tcPr>
+                    <a:solidFill>
+                      <a:srgbClr val="FFFFFF"/>
+                    </a:solidFill>
+                  </a:tcPr>
+                </a:tc>
+                <a:tc>
+                  <a:txBody>
+                    <a:bodyPr/>
+                    <a:lstStyle/>
+                    <a:p>
+                      <a:pPr algn="r">
+                        <a:defRPr>
+                          <a:latin typeface="Roboto"/>
+                        </a:defRPr>
+                      </a:pPr>
+                      <a:r>
+                        <a:rPr sz="1050">
+                          <a:solidFill>
+                            <a:srgbClr val="25342A"/>
+                          </a:solidFill>
+                          <a:latin typeface="Roboto"/>
+                        </a:rPr>
+                        <a:t>$64,048</a:t>
+                      </a:r>
+                    </a:p>
+                  </a:txBody>
+                  <a:tcPr>
+                    <a:solidFill>
+                      <a:srgbClr val="FFFFFF"/>
+                    </a:solidFill>
+                  </a:tcPr>
+                </a:tc>
+              </a:tr>
+              <a:tr h="310896">
+                <a:tc>
+                  <a:txBody>
+                    <a:bodyPr/>
+                    <a:lstStyle/>
+                    <a:p>
+                      <a:pPr algn="l">
+                        <a:defRPr>
+                          <a:latin typeface="Roboto"/>
+                        </a:defRPr>
+                      </a:pPr>
+                      <a:r>
+                        <a:rPr sz="1050">
+                          <a:solidFill>
+                            <a:srgbClr val="25342A"/>
+                          </a:solidFill>
+                          <a:latin typeface="Roboto"/>
+                        </a:rPr>
+                        <a:t>9 Nov</a:t>
+                      </a:r>
+                    </a:p>
+                  </a:txBody>
+                  <a:tcPr>
+                    <a:solidFill>
+                      <a:srgbClr val="F7FAF7"/>
+                    </a:solidFill>
+                  </a:tcPr>
+                </a:tc>
+                <a:tc>
+                  <a:txBody>
+                    <a:bodyPr/>
+                    <a:lstStyle/>
+                    <a:p>
+                      <a:pPr algn="r">
+                        <a:defRPr>
+                          <a:latin typeface="Roboto"/>
+                        </a:defRPr>
+                      </a:pPr>
+                      <a:r>
+                        <a:rPr sz="1050">
+                          <a:solidFill>
+                            <a:srgbClr val="25342A"/>
+                          </a:solidFill>
+                          <a:latin typeface="Roboto"/>
+                        </a:rPr>
+                        <a:t>$87,171</a:t>
+                      </a:r>
+                    </a:p>
+                  </a:txBody>
+                  <a:tcPr>
+                    <a:solidFill>
+                      <a:srgbClr val="F7FAF7"/>
+                    </a:solidFill>
+                  </a:tcPr>
+                </a:tc>
+                <a:tc>
+                  <a:txBody>
+                    <a:bodyPr/>
+                    <a:lstStyle/>
+                    <a:p>
+                      <a:pPr algn="r">
+                        <a:defRPr>
+                          <a:latin typeface="Roboto"/>
+                        </a:defRPr>
+                      </a:pPr>
+                      <a:r>
+                        <a:rPr sz="1050">
+                          <a:solidFill>
+                            <a:srgbClr val="25342A"/>
+                          </a:solidFill>
+                          <a:latin typeface="Roboto"/>
+                        </a:rPr>
+                        <a:t>$0</a:t>
+                      </a:r>
+                    </a:p>
+                  </a:txBody>
+                  <a:tcPr>
+                    <a:solidFill>
+                      <a:srgbClr val="F7FAF7"/>
+                    </a:solidFill>
+                  </a:tcPr>
+                </a:tc>
+                <a:tc>
+                  <a:txBody>
+                    <a:bodyPr/>
+                    <a:lstStyle/>
+                    <a:p>
+                      <a:pPr algn="r">
+                        <a:defRPr>
+                          <a:latin typeface="Roboto"/>
+                        </a:defRPr>
+                      </a:pPr>
+                      <a:r>
+                        <a:rPr sz="1050">
+                          <a:solidFill>
+                            <a:srgbClr val="25342A"/>
+                          </a:solidFill>
+                          <a:latin typeface="Roboto"/>
+                        </a:rPr>
+                        <a:t>$33,494</a:t>
+                      </a:r>
+                    </a:p>
+                  </a:txBody>
+                  <a:tcPr>
+                    <a:solidFill>
+                      <a:srgbClr val="F7FAF7"/>
+                    </a:solidFill>
+                  </a:tcPr>
+                </a:tc>
+                <a:tc>
+                  <a:txBody>
+                    <a:bodyPr/>
+                    <a:lstStyle/>
+                    <a:p>
+                      <a:pPr algn="r">
+                        <a:defRPr>
+                          <a:latin typeface="Roboto"/>
+                        </a:defRPr>
+                      </a:pPr>
+                      <a:r>
+                        <a:rPr sz="1050">
+                          <a:solidFill>
+                            <a:srgbClr val="25342A"/>
+                          </a:solidFill>
+                          <a:latin typeface="Roboto"/>
+                        </a:rPr>
+                        <a:t>$0</a:t>
+                      </a:r>
+                    </a:p>
+                  </a:txBody>
+                  <a:tcPr>
+                    <a:solidFill>
+                      <a:srgbClr val="F7FAF7"/>
+                    </a:solidFill>
+                  </a:tcPr>
+                </a:tc>
+                <a:tc>
+                  <a:txBody>
+                    <a:bodyPr/>
+                    <a:lstStyle/>
+                    <a:p>
+                      <a:pPr algn="r">
+                        <a:defRPr>
+                          <a:latin typeface="Roboto"/>
+                        </a:defRPr>
+                      </a:pPr>
+                      <a:r>
+                        <a:rPr sz="1050">
+                          <a:solidFill>
+                            <a:srgbClr val="25342A"/>
+                          </a:solidFill>
+                          <a:latin typeface="Roboto"/>
+                        </a:rPr>
+                        <a:t>$0</a:t>
+                      </a:r>
+                    </a:p>
+                  </a:txBody>
+                  <a:tcPr>
+                    <a:solidFill>
+                      <a:srgbClr val="F7FAF7"/>
+                    </a:solidFill>
+                  </a:tcPr>
+                </a:tc>
+                <a:tc>
+                  <a:txBody>
+                    <a:bodyPr/>
+                    <a:lstStyle/>
+                    <a:p>
+                      <a:pPr algn="r">
+                        <a:defRPr>
+                          <a:latin typeface="Roboto"/>
+                        </a:defRPr>
+                      </a:pPr>
+                      <a:r>
+                        <a:rPr sz="1050">
+                          <a:solidFill>
+                            <a:srgbClr val="25342A"/>
+                          </a:solidFill>
+                          <a:latin typeface="Roboto"/>
+                        </a:rPr>
+                        <a:t>$0</a:t>
+                      </a:r>
+                    </a:p>
+                  </a:txBody>
+                  <a:tcPr>
+                    <a:solidFill>
+                      <a:srgbClr val="F7FAF7"/>
+                    </a:solidFill>
+                  </a:tcPr>
+                </a:tc>
+                <a:tc>
+                  <a:txBody>
+                    <a:bodyPr/>
+                    <a:lstStyle/>
+                    <a:p>
+                      <a:pPr algn="r">
+                        <a:defRPr>
+                          <a:latin typeface="Roboto"/>
+                        </a:defRPr>
+                      </a:pPr>
+                      <a:r>
+                        <a:rPr sz="1050">
+                          <a:solidFill>
+                            <a:srgbClr val="25342A"/>
+                          </a:solidFill>
+                          <a:latin typeface="Roboto"/>
+                        </a:rPr>
+                        <a:t>$0</a:t>
+                      </a:r>
+                    </a:p>
+                  </a:txBody>
+                  <a:tcPr>
+                    <a:solidFill>
+                      <a:srgbClr val="F7FAF7"/>
+                    </a:solidFill>
+                  </a:tcPr>
+                </a:tc>
+                <a:tc>
+                  <a:txBody>
+                    <a:bodyPr/>
+                    <a:lstStyle/>
+                    <a:p>
+                      <a:pPr algn="r">
+                        <a:defRPr>
+                          <a:latin typeface="Roboto"/>
+                        </a:defRPr>
+                      </a:pPr>
+                      <a:r>
+                        <a:rPr sz="1050">
+                          <a:solidFill>
+                            <a:srgbClr val="25342A"/>
+                          </a:solidFill>
+                          <a:latin typeface="Roboto"/>
+                        </a:rPr>
+                        <a:t>$120,665</a:t>
+                      </a:r>
+                    </a:p>
+                  </a:txBody>
+                  <a:tcPr>
+                    <a:solidFill>
+                      <a:srgbClr val="F7FAF7"/>
+                    </a:solidFill>
+                  </a:tcPr>
+                </a:tc>
+                <a:tc>
+                  <a:txBody>
+                    <a:bodyPr/>
+                    <a:lstStyle/>
+                    <a:p>
+                      <a:pPr algn="r">
+                        <a:defRPr>
+                          <a:latin typeface="Roboto"/>
+                        </a:defRPr>
+                      </a:pPr>
+                      <a:r>
+                        <a:rPr sz="1050">
+                          <a:solidFill>
+                            <a:srgbClr val="25342A"/>
+                          </a:solidFill>
+                          <a:latin typeface="Roboto"/>
+                        </a:rPr>
+                        <a:t>$87,171</a:t>
+                      </a:r>
+                    </a:p>
+                  </a:txBody>
+                  <a:tcPr>
+                    <a:solidFill>
+                      <a:srgbClr val="F7FAF7"/>
+                    </a:solidFill>
+                  </a:tcPr>
+                </a:tc>
+              </a:tr>
+              <a:tr h="310896">
+                <a:tc>
+                  <a:txBody>
+                    <a:bodyPr/>
+                    <a:lstStyle/>
+                    <a:p>
+                      <a:pPr algn="l">
+                        <a:defRPr>
+                          <a:latin typeface="Roboto"/>
+                        </a:defRPr>
+                      </a:pPr>
+                      <a:r>
+                        <a:rPr sz="1050">
+                          <a:solidFill>
+                            <a:srgbClr val="25342A"/>
+                          </a:solidFill>
+                          <a:latin typeface="Roboto"/>
+                        </a:rPr>
+                        <a:t>16 Nov</a:t>
+                      </a:r>
+                    </a:p>
+                  </a:txBody>
+                  <a:tcPr>
+                    <a:solidFill>
+                      <a:srgbClr val="FFFFFF"/>
+                    </a:solidFill>
+                  </a:tcPr>
+                </a:tc>
+                <a:tc>
+                  <a:txBody>
+                    <a:bodyPr/>
+                    <a:lstStyle/>
+                    <a:p>
+                      <a:pPr algn="r">
+                        <a:defRPr>
+                          <a:latin typeface="Roboto"/>
+                        </a:defRPr>
+                      </a:pPr>
+                      <a:r>
+                        <a:rPr sz="1050">
+                          <a:solidFill>
+                            <a:srgbClr val="25342A"/>
+                          </a:solidFill>
+                          <a:latin typeface="Roboto"/>
+                        </a:rPr>
+                        <a:t>$120,665</a:t>
+                      </a:r>
+                    </a:p>
+                  </a:txBody>
+                  <a:tcPr>
+                    <a:solidFill>
+                      <a:srgbClr val="FFFFFF"/>
+                    </a:solidFill>
+                  </a:tcPr>
+                </a:tc>
+                <a:tc>
+                  <a:txBody>
+                    <a:bodyPr/>
+                    <a:lstStyle/>
+                    <a:p>
+                      <a:pPr algn="r">
+                        <a:defRPr>
+                          <a:latin typeface="Roboto"/>
+                        </a:defRPr>
+                      </a:pPr>
+                      <a:r>
+                        <a:rPr sz="1050">
+                          <a:solidFill>
+                            <a:srgbClr val="25342A"/>
+                          </a:solidFill>
+                          <a:latin typeface="Roboto"/>
+                        </a:rPr>
+                        <a:t>$0</a:t>
+                      </a:r>
+                    </a:p>
+                  </a:txBody>
+                  <a:tcPr>
+                    <a:solidFill>
+                      <a:srgbClr val="FFFFFF"/>
+                    </a:solidFill>
+                  </a:tcPr>
+                </a:tc>
+                <a:tc>
+                  <a:txBody>
+                    <a:bodyPr/>
+                    <a:lstStyle/>
+                    <a:p>
+                      <a:pPr algn="r">
+                        <a:defRPr>
+                          <a:latin typeface="Roboto"/>
+                        </a:defRPr>
+                      </a:pPr>
+                      <a:r>
+                        <a:rPr sz="1050">
+                          <a:solidFill>
+                            <a:srgbClr val="25342A"/>
+                          </a:solidFill>
+                          <a:latin typeface="Roboto"/>
+                        </a:rPr>
+                        <a:t>$39,949</a:t>
+                      </a:r>
+                    </a:p>
+                  </a:txBody>
+                  <a:tcPr>
+                    <a:solidFill>
+                      <a:srgbClr val="FFFFFF"/>
+                    </a:solidFill>
+                  </a:tcPr>
+                </a:tc>
+                <a:tc>
+                  <a:txBody>
+                    <a:bodyPr/>
+                    <a:lstStyle/>
+                    <a:p>
+                      <a:pPr algn="r">
+                        <a:defRPr>
+                          <a:latin typeface="Roboto"/>
+                        </a:defRPr>
+                      </a:pPr>
+                      <a:r>
+                        <a:rPr sz="1050">
+                          <a:solidFill>
+                            <a:srgbClr val="B42318"/>
+                          </a:solidFill>
+                          <a:latin typeface="Roboto"/>
+                        </a:rPr>
+                        <a:t>($36,611)</a:t>
+                      </a:r>
+                    </a:p>
+                  </a:txBody>
+                  <a:tcPr>
+                    <a:solidFill>
+                      <a:srgbClr val="FFFFFF"/>
+                    </a:solidFill>
+                  </a:tcPr>
+                </a:tc>
+                <a:tc>
+                  <a:txBody>
+                    <a:bodyPr/>
+                    <a:lstStyle/>
+                    <a:p>
+                      <a:pPr algn="r">
+                        <a:defRPr>
+                          <a:latin typeface="Roboto"/>
+                        </a:defRPr>
+                      </a:pPr>
+                      <a:r>
+                        <a:rPr sz="1050">
+                          <a:solidFill>
+                            <a:srgbClr val="B42318"/>
+                          </a:solidFill>
+                          <a:latin typeface="Roboto"/>
+                        </a:rPr>
+                        <a:t>($51,166)</a:t>
+                      </a:r>
+                    </a:p>
+                  </a:txBody>
+                  <a:tcPr>
+                    <a:solidFill>
+                      <a:srgbClr val="FFFFFF"/>
+                    </a:solidFill>
+                  </a:tcPr>
+                </a:tc>
+                <a:tc>
+                  <a:txBody>
+                    <a:bodyPr/>
+                    <a:lstStyle/>
+                    <a:p>
+                      <a:pPr algn="r">
+                        <a:defRPr>
+                          <a:latin typeface="Roboto"/>
+                        </a:defRPr>
+                      </a:pPr>
+                      <a:r>
+                        <a:rPr sz="1050">
+                          <a:solidFill>
+                            <a:srgbClr val="25342A"/>
+                          </a:solidFill>
+                          <a:latin typeface="Roboto"/>
+                        </a:rPr>
+                        <a:t>$0</a:t>
+                      </a:r>
+                    </a:p>
+                  </a:txBody>
+                  <a:tcPr>
+                    <a:solidFill>
+                      <a:srgbClr val="FFFFFF"/>
+                    </a:solidFill>
+                  </a:tcPr>
+                </a:tc>
+                <a:tc>
+                  <a:txBody>
+                    <a:bodyPr/>
+                    <a:lstStyle/>
+                    <a:p>
+                      <a:pPr algn="r">
+                        <a:defRPr>
+                          <a:latin typeface="Roboto"/>
+                        </a:defRPr>
+                      </a:pPr>
+                      <a:r>
+                        <a:rPr sz="1050">
+                          <a:solidFill>
+                            <a:srgbClr val="25342A"/>
+                          </a:solidFill>
+                          <a:latin typeface="Roboto"/>
+                        </a:rPr>
+                        <a:t>$0</a:t>
+                      </a:r>
+                    </a:p>
+                  </a:txBody>
+                  <a:tcPr>
+                    <a:solidFill>
+                      <a:srgbClr val="FFFFFF"/>
+                    </a:solidFill>
+                  </a:tcPr>
+                </a:tc>
+                <a:tc>
+                  <a:txBody>
+                    <a:bodyPr/>
+                    <a:lstStyle/>
+                    <a:p>
+                      <a:pPr algn="r">
+                        <a:defRPr>
+                          <a:latin typeface="Roboto"/>
+                        </a:defRPr>
+                      </a:pPr>
+                      <a:r>
+                        <a:rPr sz="1050">
+                          <a:solidFill>
+                            <a:srgbClr val="25342A"/>
+                          </a:solidFill>
+                          <a:latin typeface="Roboto"/>
+                        </a:rPr>
+                        <a:t>$72,837</a:t>
+                      </a:r>
+                    </a:p>
+                  </a:txBody>
+                  <a:tcPr>
+                    <a:solidFill>
+                      <a:srgbClr val="FFFFFF"/>
+                    </a:solidFill>
+                  </a:tcPr>
+                </a:tc>
+                <a:tc>
+                  <a:txBody>
+                    <a:bodyPr/>
+                    <a:lstStyle/>
+                    <a:p>
+                      <a:pPr algn="r">
+                        <a:defRPr>
+                          <a:latin typeface="Roboto"/>
+                        </a:defRPr>
+                      </a:pPr>
+                      <a:r>
+                        <a:rPr sz="1050">
+                          <a:solidFill>
+                            <a:srgbClr val="25342A"/>
+                          </a:solidFill>
+                          <a:latin typeface="Roboto"/>
+                        </a:rPr>
+                        <a:t>$72,837</a:t>
+                      </a:r>
+                    </a:p>
+                  </a:txBody>
+                  <a:tcPr>
+                    <a:solidFill>
+                      <a:srgbClr val="FFFFFF"/>
+                    </a:solidFill>
+                  </a:tcPr>
+                </a:tc>
+              </a:tr>
+              <a:tr h="310896">
+                <a:tc>
+                  <a:txBody>
+                    <a:bodyPr/>
+                    <a:lstStyle/>
+                    <a:p>
+                      <a:pPr algn="l">
+                        <a:defRPr>
+                          <a:latin typeface="Roboto"/>
+                        </a:defRPr>
+                      </a:pPr>
+                      <a:r>
+                        <a:rPr sz="1050">
+                          <a:solidFill>
+                            <a:srgbClr val="25342A"/>
+                          </a:solidFill>
+                          <a:latin typeface="Roboto"/>
+                        </a:rPr>
+                        <a:t>23 Nov</a:t>
+                      </a:r>
+                    </a:p>
+                  </a:txBody>
+                  <a:tcPr>
+                    <a:solidFill>
+                      <a:srgbClr val="F7FAF7"/>
+                    </a:solidFill>
+                  </a:tcPr>
+                </a:tc>
+                <a:tc>
+                  <a:txBody>
+                    <a:bodyPr/>
+                    <a:lstStyle/>
+                    <a:p>
+                      <a:pPr algn="r">
+                        <a:defRPr>
+                          <a:latin typeface="Roboto"/>
+                        </a:defRPr>
+                      </a:pPr>
+                      <a:r>
+                        <a:rPr sz="1050">
+                          <a:solidFill>
+                            <a:srgbClr val="25342A"/>
+                          </a:solidFill>
+                          <a:latin typeface="Roboto"/>
+                        </a:rPr>
+                        <a:t>$72,837</a:t>
+                      </a:r>
+                    </a:p>
+                  </a:txBody>
+                  <a:tcPr>
+                    <a:solidFill>
+                      <a:srgbClr val="F7FAF7"/>
+                    </a:solidFill>
+                  </a:tcPr>
+                </a:tc>
+                <a:tc>
+                  <a:txBody>
+                    <a:bodyPr/>
+                    <a:lstStyle/>
+                    <a:p>
+                      <a:pPr algn="r">
+                        <a:defRPr>
+                          <a:latin typeface="Roboto"/>
+                        </a:defRPr>
+                      </a:pPr>
+                      <a:r>
+                        <a:rPr sz="1050">
+                          <a:solidFill>
+                            <a:srgbClr val="25342A"/>
+                          </a:solidFill>
+                          <a:latin typeface="Roboto"/>
+                        </a:rPr>
+                        <a:t>$0</a:t>
+                      </a:r>
+                    </a:p>
+                  </a:txBody>
+                  <a:tcPr>
+                    <a:solidFill>
+                      <a:srgbClr val="F7FAF7"/>
+                    </a:solidFill>
+                  </a:tcPr>
+                </a:tc>
+                <a:tc>
+                  <a:txBody>
+                    <a:bodyPr/>
+                    <a:lstStyle/>
+                    <a:p>
+                      <a:pPr algn="r">
+                        <a:defRPr>
+                          <a:latin typeface="Roboto"/>
+                        </a:defRPr>
+                      </a:pPr>
+                      <a:r>
+                        <a:rPr sz="1050">
+                          <a:solidFill>
+                            <a:srgbClr val="25342A"/>
+                          </a:solidFill>
+                          <a:latin typeface="Roboto"/>
+                        </a:rPr>
+                        <a:t>$39,949</a:t>
+                      </a:r>
+                    </a:p>
+                  </a:txBody>
+                  <a:tcPr>
+                    <a:solidFill>
+                      <a:srgbClr val="F7FAF7"/>
+                    </a:solidFill>
+                  </a:tcPr>
+                </a:tc>
+                <a:tc>
+                  <a:txBody>
+                    <a:bodyPr/>
+                    <a:lstStyle/>
+                    <a:p>
+                      <a:pPr algn="r">
+                        <a:defRPr>
+                          <a:latin typeface="Roboto"/>
+                        </a:defRPr>
+                      </a:pPr>
+                      <a:r>
+                        <a:rPr sz="1050">
+                          <a:solidFill>
+                            <a:srgbClr val="25342A"/>
+                          </a:solidFill>
+                          <a:latin typeface="Roboto"/>
+                        </a:rPr>
+                        <a:t>$0</a:t>
+                      </a:r>
+                    </a:p>
+                  </a:txBody>
+                  <a:tcPr>
+                    <a:solidFill>
+                      <a:srgbClr val="F7FAF7"/>
+                    </a:solidFill>
+                  </a:tcPr>
+                </a:tc>
+                <a:tc>
+                  <a:txBody>
+                    <a:bodyPr/>
+                    <a:lstStyle/>
+                    <a:p>
+                      <a:pPr algn="r">
+                        <a:defRPr>
+                          <a:latin typeface="Roboto"/>
+                        </a:defRPr>
+                      </a:pPr>
+                      <a:r>
+                        <a:rPr sz="1050">
+                          <a:solidFill>
+                            <a:srgbClr val="25342A"/>
+                          </a:solidFill>
+                          <a:latin typeface="Roboto"/>
+                        </a:rPr>
+                        <a:t>$0</a:t>
+                      </a:r>
+                    </a:p>
+                  </a:txBody>
+                  <a:tcPr>
+                    <a:solidFill>
+                      <a:srgbClr val="F7FAF7"/>
+                    </a:solidFill>
+                  </a:tcPr>
+                </a:tc>
+                <a:tc>
+                  <a:txBody>
+                    <a:bodyPr/>
+                    <a:lstStyle/>
+                    <a:p>
+                      <a:pPr algn="r">
+                        <a:defRPr>
+                          <a:latin typeface="Roboto"/>
+                        </a:defRPr>
+                      </a:pPr>
+                      <a:r>
+                        <a:rPr sz="1050">
+                          <a:solidFill>
+                            <a:srgbClr val="25342A"/>
+                          </a:solidFill>
+                          <a:latin typeface="Roboto"/>
+                        </a:rPr>
+                        <a:t>$0</a:t>
+                      </a:r>
+                    </a:p>
+                  </a:txBody>
+                  <a:tcPr>
+                    <a:solidFill>
+                      <a:srgbClr val="F7FAF7"/>
+                    </a:solidFill>
+                  </a:tcPr>
+                </a:tc>
+                <a:tc>
+                  <a:txBody>
+                    <a:bodyPr/>
+                    <a:lstStyle/>
+                    <a:p>
+                      <a:pPr algn="r">
+                        <a:defRPr>
+                          <a:latin typeface="Roboto"/>
+                        </a:defRPr>
+                      </a:pPr>
+                      <a:r>
+                        <a:rPr sz="1050">
+                          <a:solidFill>
+                            <a:srgbClr val="25342A"/>
+                          </a:solidFill>
+                          <a:latin typeface="Roboto"/>
+                        </a:rPr>
+                        <a:t>$0</a:t>
+                      </a:r>
+                    </a:p>
+                  </a:txBody>
+                  <a:tcPr>
+                    <a:solidFill>
+                      <a:srgbClr val="F7FAF7"/>
+                    </a:solidFill>
+                  </a:tcPr>
+                </a:tc>
+                <a:tc>
+                  <a:txBody>
+                    <a:bodyPr/>
+                    <a:lstStyle/>
+                    <a:p>
+                      <a:pPr algn="r">
+                        <a:defRPr>
+                          <a:latin typeface="Roboto"/>
+                        </a:defRPr>
+                      </a:pPr>
+                      <a:r>
+                        <a:rPr sz="1050">
+                          <a:solidFill>
+                            <a:srgbClr val="25342A"/>
+                          </a:solidFill>
+                          <a:latin typeface="Roboto"/>
+                        </a:rPr>
+                        <a:t>$112,786</a:t>
+                      </a:r>
+                    </a:p>
+                  </a:txBody>
+                  <a:tcPr>
+                    <a:solidFill>
+                      <a:srgbClr val="F7FAF7"/>
+                    </a:solidFill>
+                  </a:tcPr>
+                </a:tc>
+                <a:tc>
+                  <a:txBody>
+                    <a:bodyPr/>
+                    <a:lstStyle/>
+                    <a:p>
+                      <a:pPr algn="r">
+                        <a:defRPr>
+                          <a:latin typeface="Roboto"/>
+                        </a:defRPr>
+                      </a:pPr>
+                      <a:r>
+                        <a:rPr sz="1050">
+                          <a:solidFill>
+                            <a:srgbClr val="25342A"/>
+                          </a:solidFill>
+                          <a:latin typeface="Roboto"/>
+                        </a:rPr>
+                        <a:t>$72,837</a:t>
+                      </a:r>
+                    </a:p>
+                  </a:txBody>
+                  <a:tcPr>
+                    <a:solidFill>
+                      <a:srgbClr val="F7FAF7"/>
+                    </a:solidFill>
+                  </a:tcPr>
+                </a:tc>
+              </a:tr>
+              <a:tr h="310896">
+                <a:tc>
+                  <a:txBody>
+                    <a:bodyPr/>
+                    <a:lstStyle/>
+                    <a:p>
+                      <a:pPr algn="l">
+                        <a:defRPr>
+                          <a:latin typeface="Roboto"/>
+                        </a:defRPr>
+                      </a:pPr>
+                      <a:r>
+                        <a:rPr sz="1050">
+                          <a:solidFill>
+                            <a:srgbClr val="25342A"/>
+                          </a:solidFill>
+                          <a:latin typeface="Roboto"/>
+                        </a:rPr>
+                        <a:t>30 Nov</a:t>
+                      </a:r>
+                    </a:p>
+                  </a:txBody>
+                  <a:tcPr>
+                    <a:solidFill>
+                      <a:srgbClr val="FFFFFF"/>
+                    </a:solidFill>
+                  </a:tcPr>
+                </a:tc>
+                <a:tc>
+                  <a:txBody>
+                    <a:bodyPr/>
+                    <a:lstStyle/>
+                    <a:p>
+                      <a:pPr algn="r">
+                        <a:defRPr>
+                          <a:latin typeface="Roboto"/>
+                        </a:defRPr>
+                      </a:pPr>
+                      <a:r>
+                        <a:rPr sz="1050">
+                          <a:solidFill>
+                            <a:srgbClr val="25342A"/>
+                          </a:solidFill>
+                          <a:latin typeface="Roboto"/>
+                        </a:rPr>
+                        <a:t>$112,786</a:t>
+                      </a:r>
+                    </a:p>
+                  </a:txBody>
+                  <a:tcPr>
+                    <a:solidFill>
+                      <a:srgbClr val="FFFFFF"/>
+                    </a:solidFill>
+                  </a:tcPr>
+                </a:tc>
+                <a:tc>
+                  <a:txBody>
+                    <a:bodyPr/>
+                    <a:lstStyle/>
+                    <a:p>
+                      <a:pPr algn="r">
+                        <a:defRPr>
+                          <a:latin typeface="Roboto"/>
+                        </a:defRPr>
+                      </a:pPr>
+                      <a:r>
+                        <a:rPr sz="1050">
+                          <a:solidFill>
+                            <a:srgbClr val="25342A"/>
+                          </a:solidFill>
+                          <a:latin typeface="Roboto"/>
+                        </a:rPr>
+                        <a:t>$0</a:t>
+                      </a:r>
+                    </a:p>
+                  </a:txBody>
+                  <a:tcPr>
+                    <a:solidFill>
+                      <a:srgbClr val="FFFFFF"/>
+                    </a:solidFill>
+                  </a:tcPr>
+                </a:tc>
+                <a:tc>
+                  <a:txBody>
+                    <a:bodyPr/>
+                    <a:lstStyle/>
+                    <a:p>
+                      <a:pPr algn="r">
+                        <a:defRPr>
+                          <a:latin typeface="Roboto"/>
+                        </a:defRPr>
+                      </a:pPr>
+                      <a:r>
+                        <a:rPr sz="1050">
+                          <a:solidFill>
+                            <a:srgbClr val="25342A"/>
+                          </a:solidFill>
+                          <a:latin typeface="Roboto"/>
+                        </a:rPr>
+                        <a:t>$39,949</a:t>
+                      </a:r>
+                    </a:p>
+                  </a:txBody>
+                  <a:tcPr>
+                    <a:solidFill>
+                      <a:srgbClr val="FFFFFF"/>
+                    </a:solidFill>
+                  </a:tcPr>
+                </a:tc>
+                <a:tc>
+                  <a:txBody>
+                    <a:bodyPr/>
+                    <a:lstStyle/>
+                    <a:p>
+                      <a:pPr algn="r">
+                        <a:defRPr>
+                          <a:latin typeface="Roboto"/>
+                        </a:defRPr>
+                      </a:pPr>
+                      <a:r>
+                        <a:rPr sz="1050">
+                          <a:solidFill>
+                            <a:srgbClr val="B42318"/>
+                          </a:solidFill>
+                          <a:latin typeface="Roboto"/>
+                        </a:rPr>
+                        <a:t>($36,611)</a:t>
+                      </a:r>
+                    </a:p>
+                  </a:txBody>
+                  <a:tcPr>
+                    <a:solidFill>
+                      <a:srgbClr val="FFFFFF"/>
+                    </a:solidFill>
+                  </a:tcPr>
+                </a:tc>
+                <a:tc>
+                  <a:txBody>
+                    <a:bodyPr/>
+                    <a:lstStyle/>
+                    <a:p>
+                      <a:pPr algn="r">
+                        <a:defRPr>
+                          <a:latin typeface="Roboto"/>
+                        </a:defRPr>
+                      </a:pPr>
+                      <a:r>
+                        <a:rPr sz="1050">
+                          <a:solidFill>
+                            <a:srgbClr val="B42318"/>
+                          </a:solidFill>
+                          <a:latin typeface="Roboto"/>
+                        </a:rPr>
+                        <a:t>($51,167)</a:t>
+                      </a:r>
+                    </a:p>
+                  </a:txBody>
+                  <a:tcPr>
+                    <a:solidFill>
+                      <a:srgbClr val="FFFFFF"/>
+                    </a:solidFill>
+                  </a:tcPr>
+                </a:tc>
+                <a:tc>
+                  <a:txBody>
+                    <a:bodyPr/>
+                    <a:lstStyle/>
+                    <a:p>
+                      <a:pPr algn="r">
+                        <a:defRPr>
+                          <a:latin typeface="Roboto"/>
+                        </a:defRPr>
+                      </a:pPr>
+                      <a:r>
+                        <a:rPr sz="1050">
+                          <a:solidFill>
+                            <a:srgbClr val="25342A"/>
+                          </a:solidFill>
+                          <a:latin typeface="Roboto"/>
+                        </a:rPr>
+                        <a:t>$0</a:t>
+                      </a:r>
+                    </a:p>
+                  </a:txBody>
+                  <a:tcPr>
+                    <a:solidFill>
+                      <a:srgbClr val="FFFFFF"/>
+                    </a:solidFill>
+                  </a:tcPr>
+                </a:tc>
+                <a:tc>
+                  <a:txBody>
+                    <a:bodyPr/>
+                    <a:lstStyle/>
+                    <a:p>
+                      <a:pPr algn="r">
+                        <a:defRPr>
+                          <a:latin typeface="Roboto"/>
+                        </a:defRPr>
+                      </a:pPr>
+                      <a:r>
+                        <a:rPr sz="1050">
+                          <a:solidFill>
+                            <a:srgbClr val="B42318"/>
+                          </a:solidFill>
+                          <a:latin typeface="Roboto"/>
+                        </a:rPr>
+                        <a:t>($6,100)</a:t>
+                      </a:r>
+                    </a:p>
+                  </a:txBody>
+                  <a:tcPr>
+                    <a:solidFill>
+                      <a:srgbClr val="FFFFFF"/>
+                    </a:solidFill>
+                  </a:tcPr>
+                </a:tc>
+                <a:tc>
+                  <a:txBody>
+                    <a:bodyPr/>
+                    <a:lstStyle/>
+                    <a:p>
+                      <a:pPr algn="r">
+                        <a:defRPr>
+                          <a:latin typeface="Roboto"/>
+                        </a:defRPr>
+                      </a:pPr>
+                      <a:r>
+                        <a:rPr sz="1050">
+                          <a:solidFill>
+                            <a:srgbClr val="25342A"/>
+                          </a:solidFill>
+                          <a:latin typeface="Roboto"/>
+                        </a:rPr>
+                        <a:t>$58,857</a:t>
+                      </a:r>
+                    </a:p>
+                  </a:txBody>
+                  <a:tcPr>
+                    <a:solidFill>
+                      <a:srgbClr val="FFFFFF"/>
+                    </a:solidFill>
+                  </a:tcPr>
+                </a:tc>
+                <a:tc>
+                  <a:txBody>
+                    <a:bodyPr/>
+                    <a:lstStyle/>
+                    <a:p>
+                      <a:pPr algn="r">
+                        <a:defRPr>
+                          <a:latin typeface="Roboto"/>
+                        </a:defRPr>
+                      </a:pPr>
+                      <a:r>
+                        <a:rPr sz="1050">
+                          <a:solidFill>
+                            <a:srgbClr val="25342A"/>
+                          </a:solidFill>
+                          <a:latin typeface="Roboto"/>
+                        </a:rPr>
+                        <a:t>$58,857</a:t>
+                      </a:r>
+                    </a:p>
+                  </a:txBody>
+                  <a:tcPr>
+                    <a:solidFill>
+                      <a:srgbClr val="FFFFFF"/>
+                    </a:solidFill>
+                  </a:tcPr>
+                </a:tc>
+              </a:tr>
+            </a:tbl>
           </a:graphicData>
         </a:graphic>
       </p:graphicFrame>
@@ -7610,7 +11160,7 @@
                 </a:solidFill>
                 <a:latin typeface="Roboto"/>
               </a:rPr>
-              <a:t>Data retrieved 2pm, Tue 6 Oct 2026 · Generated 8 Oct 2026, 9:35am · Sample data · Made with Python (python-pptx)</a:t>
+              <a:t>Data retrieved 2pm, Tue 6 Oct 2026 · Generated 9 Oct 2026, 8:41am · Sample data · Made with Python (python-pptx)</a:t>
             </a:r>
           </a:p>
         </p:txBody>
@@ -7685,7 +11235,7 @@
         <p:spPr>
           <a:xfrm>
             <a:off x="457200" y="384048"/>
-            <a:ext cx="11277295" cy="475488"/>
+            <a:ext cx="11277295" cy="719328"/>
           </a:xfrm>
         </p:spPr>
         <p:txBody>
@@ -7698,13 +11248,13 @@
               </a:defRPr>
             </a:pPr>
             <a:r>
-              <a:rPr sz="2400" b="1">
+              <a:rPr sz="2000" b="1">
                 <a:solidFill>
                   <a:srgbClr val="25342A"/>
                 </a:solidFill>
                 <a:latin typeface="Roboto"/>
               </a:rPr>
-              <a:t>13 weeks, week by week</a:t>
+              <a:t>Invoices past the customer's usual payment date ($24,676): the forecast assumes these arrive within a week (1 of 2)</a:t>
             </a:r>
           </a:p>
         </p:txBody>
@@ -7795,56 +11345,17 @@
           </a:p>
         </p:txBody>
       </p:sp>
-      <p:sp>
-        <p:nvSpPr>
-          <p:cNvPr id="5" name="TextBox 4"/>
-          <p:cNvSpPr txBox="1"/>
-          <p:nvPr/>
-        </p:nvSpPr>
-        <p:spPr>
-          <a:xfrm>
-            <a:off x="457200" y="914400"/>
-            <a:ext cx="11277295" cy="263652"/>
-          </a:xfrm>
-          <a:prstGeom prst="rect">
-            <a:avLst/>
-          </a:prstGeom>
-          <a:noFill/>
-        </p:spPr>
-        <p:txBody>
-          <a:bodyPr wrap="square" lIns="45720" rIns="45720">
-            <a:spAutoFit/>
-          </a:bodyPr>
-          <a:lstStyle/>
-          <a:p>
-            <a:pPr>
-              <a:defRPr>
-                <a:latin typeface="Roboto"/>
-              </a:defRPr>
-            </a:pPr>
-            <a:r>
-              <a:rPr sz="1200" b="0">
-                <a:solidFill>
-                  <a:srgbClr val="5F6F63"/>
-                </a:solidFill>
-                <a:latin typeface="Roboto"/>
-              </a:rPr>
-              <a:t>Lowest in the week: amber below one pay run ($37,700), red below zero.</a:t>
-            </a:r>
-          </a:p>
-        </p:txBody>
-      </p:sp>
       <p:graphicFrame>
         <p:nvGraphicFramePr>
-          <p:cNvPr id="6" name="Table 5"/>
+          <p:cNvPr id="5" name="Table 4"/>
           <p:cNvGraphicFramePr>
             <a:graphicFrameLocks noGrp="1"/>
           </p:cNvGraphicFramePr>
           <p:nvPr/>
         </p:nvGraphicFramePr>
         <p:xfrm>
-          <a:off x="457200" y="1278636"/>
-          <a:ext cx="11277295" cy="4352544"/>
+          <a:off x="457200" y="1203960"/>
+          <a:ext cx="11277295" cy="4663440"/>
         </p:xfrm>
         <a:graphic>
           <a:graphicData uri="http://schemas.openxmlformats.org/drawingml/2006/table">
@@ -7853,15 +11364,11 @@
                 <a:tableStyleId>{5C22544A-7EE6-4342-B048-85BDC9FD1C3A}</a:tableStyleId>
               </a:tblPr>
               <a:tblGrid>
-                <a:gridCol w="1253032"/>
-                <a:gridCol w="1253032"/>
-                <a:gridCol w="1253032"/>
-                <a:gridCol w="1253032"/>
-                <a:gridCol w="1253032"/>
-                <a:gridCol w="1253032"/>
-                <a:gridCol w="1253032"/>
-                <a:gridCol w="1253032"/>
-                <a:gridCol w="1253039"/>
+                <a:gridCol w="2255459"/>
+                <a:gridCol w="2255459"/>
+                <a:gridCol w="2255459"/>
+                <a:gridCol w="2255459"/>
+                <a:gridCol w="2255459"/>
               </a:tblGrid>
               <a:tr h="310896">
                 <a:tc>
@@ -7881,7 +11388,7 @@
                           </a:solidFill>
                           <a:latin typeface="Roboto"/>
                         </a:rPr>
-                        <a:t>Week ending</a:t>
+                        <a:t>Customer or job</a:t>
                       </a:r>
                     </a:p>
                   </a:txBody>
@@ -7896,7 +11403,7 @@
                     <a:bodyPr/>
                     <a:lstStyle/>
                     <a:p>
-                      <a:pPr algn="r">
+                      <a:pPr algn="l">
                         <a:defRPr>
                           <a:latin typeface="Roboto"/>
                         </a:defRPr>
@@ -7908,7 +11415,7 @@
                           </a:solidFill>
                           <a:latin typeface="Roboto"/>
                         </a:rPr>
-                        <a:t>Cash at start</a:t>
+                        <a:t>Invoiced</a:t>
                       </a:r>
                     </a:p>
                   </a:txBody>
@@ -7935,7 +11442,7 @@
                           </a:solidFill>
                           <a:latin typeface="Roboto"/>
                         </a:rPr>
-                        <a:t>Unpaid invoices collected</a:t>
+                        <a:t>Amount (incl. GST)</a:t>
                       </a:r>
                     </a:p>
                   </a:txBody>
@@ -7962,7 +11469,7 @@
                           </a:solidFill>
                           <a:latin typeface="Roboto"/>
                         </a:rPr>
-                        <a:t>New work collected</a:t>
+                        <a:t>Usually pays in (days)</a:t>
                       </a:r>
                     </a:p>
                   </a:txBody>
@@ -7989,115 +11496,7 @@
                           </a:solidFill>
                           <a:latin typeface="Roboto"/>
                         </a:rPr>
-                        <a:t>Wages</a:t>
-                      </a:r>
-                    </a:p>
-                  </a:txBody>
-                  <a:tcPr>
-                    <a:solidFill>
-                      <a:srgbClr val="2F7A5D"/>
-                    </a:solidFill>
-                  </a:tcPr>
-                </a:tc>
-                <a:tc>
-                  <a:txBody>
-                    <a:bodyPr/>
-                    <a:lstStyle/>
-                    <a:p>
-                      <a:pPr algn="r">
-                        <a:defRPr>
-                          <a:latin typeface="Roboto"/>
-                        </a:defRPr>
-                      </a:pPr>
-                      <a:r>
-                        <a:rPr sz="1100" b="1">
-                          <a:solidFill>
-                            <a:srgbClr val="FFFFFF"/>
-                          </a:solidFill>
-                          <a:latin typeface="Roboto"/>
-                        </a:rPr>
-                        <a:t>Suppliers and overheads</a:t>
-                      </a:r>
-                    </a:p>
-                  </a:txBody>
-                  <a:tcPr>
-                    <a:solidFill>
-                      <a:srgbClr val="2F7A5D"/>
-                    </a:solidFill>
-                  </a:tcPr>
-                </a:tc>
-                <a:tc>
-                  <a:txBody>
-                    <a:bodyPr/>
-                    <a:lstStyle/>
-                    <a:p>
-                      <a:pPr algn="r">
-                        <a:defRPr>
-                          <a:latin typeface="Roboto"/>
-                        </a:defRPr>
-                      </a:pPr>
-                      <a:r>
-                        <a:rPr sz="1100" b="1">
-                          <a:solidFill>
-                            <a:srgbClr val="FFFFFF"/>
-                          </a:solidFill>
-                          <a:latin typeface="Roboto"/>
-                        </a:rPr>
-                        <a:t>Tax, interest and finance</a:t>
-                      </a:r>
-                    </a:p>
-                  </a:txBody>
-                  <a:tcPr>
-                    <a:solidFill>
-                      <a:srgbClr val="2F7A5D"/>
-                    </a:solidFill>
-                  </a:tcPr>
-                </a:tc>
-                <a:tc>
-                  <a:txBody>
-                    <a:bodyPr/>
-                    <a:lstStyle/>
-                    <a:p>
-                      <a:pPr algn="r">
-                        <a:defRPr>
-                          <a:latin typeface="Roboto"/>
-                        </a:defRPr>
-                      </a:pPr>
-                      <a:r>
-                        <a:rPr sz="1100" b="1">
-                          <a:solidFill>
-                            <a:srgbClr val="FFFFFF"/>
-                          </a:solidFill>
-                          <a:latin typeface="Roboto"/>
-                        </a:rPr>
-                        <a:t>Cash at end</a:t>
-                      </a:r>
-                    </a:p>
-                  </a:txBody>
-                  <a:tcPr>
-                    <a:solidFill>
-                      <a:srgbClr val="2F7A5D"/>
-                    </a:solidFill>
-                  </a:tcPr>
-                </a:tc>
-                <a:tc>
-                  <a:txBody>
-                    <a:bodyPr/>
-                    <a:lstStyle/>
-                    <a:p>
-                      <a:pPr algn="r">
-                        <a:defRPr>
-                          <a:latin typeface="Roboto"/>
-                        </a:defRPr>
-                      </a:pPr>
-                      <a:r>
-                        <a:rPr sz="1100" b="1">
-                          <a:solidFill>
-                            <a:srgbClr val="FFFFFF"/>
-                          </a:solidFill>
-                          <a:latin typeface="Roboto"/>
-                        </a:rPr>
-                        <a:t>Lowest in the week</a:t>
+                        <a:t>Days since invoiced</a:t>
                       </a:r>
                     </a:p>
                   </a:txBody>
@@ -8126,7 +11525,7 @@
                           </a:solidFill>
                           <a:latin typeface="Roboto"/>
                         </a:rPr>
-                        <a:t>7 Sep</a:t>
+                        <a:t>Chermside retail centre</a:t>
                       </a:r>
                     </a:p>
                   </a:txBody>
@@ -8141,19 +11540,19 @@
                     <a:bodyPr/>
                     <a:lstStyle/>
                     <a:p>
-                      <a:pPr algn="r">
-                        <a:defRPr>
-                          <a:latin typeface="Roboto"/>
-                        </a:defRPr>
-                      </a:pPr>
-                      <a:r>
-                        <a:rPr sz="1050">
-                          <a:solidFill>
-                            <a:srgbClr val="25342A"/>
-                          </a:solidFill>
-                          <a:latin typeface="Roboto"/>
-                        </a:rPr>
-                        <a:t>$65,263</a:t>
+                      <a:pPr algn="l">
+                        <a:defRPr>
+                          <a:latin typeface="Roboto"/>
+                        </a:defRPr>
+                      </a:pPr>
+                      <a:r>
+                        <a:rPr sz="1050">
+                          <a:solidFill>
+                            <a:srgbClr val="25342A"/>
+                          </a:solidFill>
+                          <a:latin typeface="Roboto"/>
+                        </a:rPr>
+                        <a:t>1 Aug</a:t>
                       </a:r>
                     </a:p>
                   </a:txBody>
@@ -8180,7 +11579,7 @@
                           </a:solidFill>
                           <a:latin typeface="Roboto"/>
                         </a:rPr>
-                        <a:t>$58,719</a:t>
+                        <a:t>$5,060</a:t>
                       </a:r>
                     </a:p>
                   </a:txBody>
@@ -8207,7 +11606,7 @@
                           </a:solidFill>
                           <a:latin typeface="Roboto"/>
                         </a:rPr>
-                        <a:t>$5,062</a:t>
+                        <a:t>30</a:t>
                       </a:r>
                     </a:p>
                   </a:txBody>
@@ -8230,119 +11629,11 @@
                       <a:r>
                         <a:rPr sz="1050">
                           <a:solidFill>
-                            <a:srgbClr val="B42318"/>
-                          </a:solidFill>
-                          <a:latin typeface="Roboto"/>
-                        </a:rPr>
-                        <a:t>($37,700)</a:t>
-                      </a:r>
-                    </a:p>
-                  </a:txBody>
-                  <a:tcPr>
-                    <a:solidFill>
-                      <a:srgbClr val="FFFFFF"/>
-                    </a:solidFill>
-                  </a:tcPr>
-                </a:tc>
-                <a:tc>
-                  <a:txBody>
-                    <a:bodyPr/>
-                    <a:lstStyle/>
-                    <a:p>
-                      <a:pPr algn="r">
-                        <a:defRPr>
-                          <a:latin typeface="Roboto"/>
-                        </a:defRPr>
-                      </a:pPr>
-                      <a:r>
-                        <a:rPr sz="1050">
-                          <a:solidFill>
-                            <a:srgbClr val="25342A"/>
-                          </a:solidFill>
-                          <a:latin typeface="Roboto"/>
-                        </a:rPr>
-                        <a:t>$0</a:t>
-                      </a:r>
-                    </a:p>
-                  </a:txBody>
-                  <a:tcPr>
-                    <a:solidFill>
-                      <a:srgbClr val="FFFFFF"/>
-                    </a:solidFill>
-                  </a:tcPr>
-                </a:tc>
-                <a:tc>
-                  <a:txBody>
-                    <a:bodyPr/>
-                    <a:lstStyle/>
-                    <a:p>
-                      <a:pPr algn="r">
-                        <a:defRPr>
-                          <a:latin typeface="Roboto"/>
-                        </a:defRPr>
-                      </a:pPr>
-                      <a:r>
-                        <a:rPr sz="1050">
-                          <a:solidFill>
-                            <a:srgbClr val="25342A"/>
-                          </a:solidFill>
-                          <a:latin typeface="Roboto"/>
-                        </a:rPr>
-                        <a:t>$0</a:t>
-                      </a:r>
-                    </a:p>
-                  </a:txBody>
-                  <a:tcPr>
-                    <a:solidFill>
-                      <a:srgbClr val="FFFFFF"/>
-                    </a:solidFill>
-                  </a:tcPr>
-                </a:tc>
-                <a:tc>
-                  <a:txBody>
-                    <a:bodyPr/>
-                    <a:lstStyle/>
-                    <a:p>
-                      <a:pPr algn="r">
-                        <a:defRPr>
-                          <a:latin typeface="Roboto"/>
-                        </a:defRPr>
-                      </a:pPr>
-                      <a:r>
-                        <a:rPr sz="1050">
-                          <a:solidFill>
-                            <a:srgbClr val="25342A"/>
-                          </a:solidFill>
-                          <a:latin typeface="Roboto"/>
-                        </a:rPr>
-                        <a:t>$91,344</a:t>
-                      </a:r>
-                    </a:p>
-                  </a:txBody>
-                  <a:tcPr>
-                    <a:solidFill>
-                      <a:srgbClr val="FFFFFF"/>
-                    </a:solidFill>
-                  </a:tcPr>
-                </a:tc>
-                <a:tc>
-                  <a:txBody>
-                    <a:bodyPr/>
-                    <a:lstStyle/>
-                    <a:p>
-                      <a:pPr algn="r">
-                        <a:defRPr>
-                          <a:latin typeface="Roboto"/>
-                        </a:defRPr>
-                      </a:pPr>
-                      <a:r>
-                        <a:rPr sz="1050">
-                          <a:solidFill>
-                            <a:srgbClr val="25342A"/>
-                          </a:solidFill>
-                          <a:latin typeface="Roboto"/>
-                        </a:rPr>
-                        <a:t>$28,828</a:t>
+                            <a:srgbClr val="25342A"/>
+                          </a:solidFill>
+                          <a:latin typeface="Roboto"/>
+                        </a:rPr>
+                        <a:t>30</a:t>
                       </a:r>
                     </a:p>
                   </a:txBody>
@@ -8371,7 +11662,7 @@
                           </a:solidFill>
                           <a:latin typeface="Roboto"/>
                         </a:rPr>
-                        <a:t>14 Sep</a:t>
+                        <a:t>Rocklea factory</a:t>
                       </a:r>
                     </a:p>
                   </a:txBody>
@@ -8386,19 +11677,19 @@
                     <a:bodyPr/>
                     <a:lstStyle/>
                     <a:p>
-                      <a:pPr algn="r">
-                        <a:defRPr>
-                          <a:latin typeface="Roboto"/>
-                        </a:defRPr>
-                      </a:pPr>
-                      <a:r>
-                        <a:rPr sz="1050">
-                          <a:solidFill>
-                            <a:srgbClr val="25342A"/>
-                          </a:solidFill>
-                          <a:latin typeface="Roboto"/>
-                        </a:rPr>
-                        <a:t>$91,344</a:t>
+                      <a:pPr algn="l">
+                        <a:defRPr>
+                          <a:latin typeface="Roboto"/>
+                        </a:defRPr>
+                      </a:pPr>
+                      <a:r>
+                        <a:rPr sz="1050">
+                          <a:solidFill>
+                            <a:srgbClr val="25342A"/>
+                          </a:solidFill>
+                          <a:latin typeface="Roboto"/>
+                        </a:rPr>
+                        <a:t>1 Aug</a:t>
                       </a:r>
                     </a:p>
                   </a:txBody>
@@ -8425,7 +11716,7 @@
                           </a:solidFill>
                           <a:latin typeface="Roboto"/>
                         </a:rPr>
-                        <a:t>$21,300</a:t>
+                        <a:t>$4,785</a:t>
                       </a:r>
                     </a:p>
                   </a:txBody>
@@ -8452,7 +11743,7 @@
                           </a:solidFill>
                           <a:latin typeface="Roboto"/>
                         </a:rPr>
-                        <a:t>$6,327</a:t>
+                        <a:t>30</a:t>
                       </a:r>
                     </a:p>
                   </a:txBody>
@@ -8479,115 +11770,7 @@
                           </a:solidFill>
                           <a:latin typeface="Roboto"/>
                         </a:rPr>
-                        <a:t>$0</a:t>
-                      </a:r>
-                    </a:p>
-                  </a:txBody>
-                  <a:tcPr>
-                    <a:solidFill>
-                      <a:srgbClr val="F7FAF7"/>
-                    </a:solidFill>
-                  </a:tcPr>
-                </a:tc>
-                <a:tc>
-                  <a:txBody>
-                    <a:bodyPr/>
-                    <a:lstStyle/>
-                    <a:p>
-                      <a:pPr algn="r">
-                        <a:defRPr>
-                          <a:latin typeface="Roboto"/>
-                        </a:defRPr>
-                      </a:pPr>
-                      <a:r>
-                        <a:rPr sz="1050">
-                          <a:solidFill>
-                            <a:srgbClr val="25342A"/>
-                          </a:solidFill>
-                          <a:latin typeface="Roboto"/>
-                        </a:rPr>
-                        <a:t>$0</a:t>
-                      </a:r>
-                    </a:p>
-                  </a:txBody>
-                  <a:tcPr>
-                    <a:solidFill>
-                      <a:srgbClr val="F7FAF7"/>
-                    </a:solidFill>
-                  </a:tcPr>
-                </a:tc>
-                <a:tc>
-                  <a:txBody>
-                    <a:bodyPr/>
-                    <a:lstStyle/>
-                    <a:p>
-                      <a:pPr algn="r">
-                        <a:defRPr>
-                          <a:latin typeface="Roboto"/>
-                        </a:defRPr>
-                      </a:pPr>
-                      <a:r>
-                        <a:rPr sz="1050">
-                          <a:solidFill>
-                            <a:srgbClr val="25342A"/>
-                          </a:solidFill>
-                          <a:latin typeface="Roboto"/>
-                        </a:rPr>
-                        <a:t>$0</a:t>
-                      </a:r>
-                    </a:p>
-                  </a:txBody>
-                  <a:tcPr>
-                    <a:solidFill>
-                      <a:srgbClr val="F7FAF7"/>
-                    </a:solidFill>
-                  </a:tcPr>
-                </a:tc>
-                <a:tc>
-                  <a:txBody>
-                    <a:bodyPr/>
-                    <a:lstStyle/>
-                    <a:p>
-                      <a:pPr algn="r">
-                        <a:defRPr>
-                          <a:latin typeface="Roboto"/>
-                        </a:defRPr>
-                      </a:pPr>
-                      <a:r>
-                        <a:rPr sz="1050">
-                          <a:solidFill>
-                            <a:srgbClr val="25342A"/>
-                          </a:solidFill>
-                          <a:latin typeface="Roboto"/>
-                        </a:rPr>
-                        <a:t>$118,970</a:t>
-                      </a:r>
-                    </a:p>
-                  </a:txBody>
-                  <a:tcPr>
-                    <a:solidFill>
-                      <a:srgbClr val="F7FAF7"/>
-                    </a:solidFill>
-                  </a:tcPr>
-                </a:tc>
-                <a:tc>
-                  <a:txBody>
-                    <a:bodyPr/>
-                    <a:lstStyle/>
-                    <a:p>
-                      <a:pPr algn="r">
-                        <a:defRPr>
-                          <a:latin typeface="Roboto"/>
-                        </a:defRPr>
-                      </a:pPr>
-                      <a:r>
-                        <a:rPr sz="1050">
-                          <a:solidFill>
-                            <a:srgbClr val="25342A"/>
-                          </a:solidFill>
-                          <a:latin typeface="Roboto"/>
-                        </a:rPr>
-                        <a:t>$91,344</a:t>
+                        <a:t>30</a:t>
                       </a:r>
                     </a:p>
                   </a:txBody>
@@ -8616,7 +11799,7 @@
                           </a:solidFill>
                           <a:latin typeface="Roboto"/>
                         </a:rPr>
-                        <a:t>21 Sep</a:t>
+                        <a:t>Riverside Apartments (strata)</a:t>
                       </a:r>
                     </a:p>
                   </a:txBody>
@@ -8631,19 +11814,19 @@
                     <a:bodyPr/>
                     <a:lstStyle/>
                     <a:p>
-                      <a:pPr algn="r">
-                        <a:defRPr>
-                          <a:latin typeface="Roboto"/>
-                        </a:defRPr>
-                      </a:pPr>
-                      <a:r>
-                        <a:rPr sz="1050">
-                          <a:solidFill>
-                            <a:srgbClr val="25342A"/>
-                          </a:solidFill>
-                          <a:latin typeface="Roboto"/>
-                        </a:rPr>
-                        <a:t>$118,970</a:t>
+                      <a:pPr algn="l">
+                        <a:defRPr>
+                          <a:latin typeface="Roboto"/>
+                        </a:defRPr>
+                      </a:pPr>
+                      <a:r>
+                        <a:rPr sz="1050">
+                          <a:solidFill>
+                            <a:srgbClr val="25342A"/>
+                          </a:solidFill>
+                          <a:latin typeface="Roboto"/>
+                        </a:rPr>
+                        <a:t>1 Aug</a:t>
                       </a:r>
                     </a:p>
                   </a:txBody>
@@ -8670,7 +11853,7 @@
                           </a:solidFill>
                           <a:latin typeface="Roboto"/>
                         </a:rPr>
-                        <a:t>$16,800</a:t>
+                        <a:t>$3,960</a:t>
                       </a:r>
                     </a:p>
                   </a:txBody>
@@ -8697,7 +11880,7 @@
                           </a:solidFill>
                           <a:latin typeface="Roboto"/>
                         </a:rPr>
-                        <a:t>$6,327</a:t>
+                        <a:t>30</a:t>
                       </a:r>
                     </a:p>
                   </a:txBody>
@@ -8720,119 +11903,11 @@
                       <a:r>
                         <a:rPr sz="1050">
                           <a:solidFill>
-                            <a:srgbClr val="B42318"/>
-                          </a:solidFill>
-                          <a:latin typeface="Roboto"/>
-                        </a:rPr>
-                        <a:t>($37,700)</a:t>
-                      </a:r>
-                    </a:p>
-                  </a:txBody>
-                  <a:tcPr>
-                    <a:solidFill>
-                      <a:srgbClr val="FFFFFF"/>
-                    </a:solidFill>
-                  </a:tcPr>
-                </a:tc>
-                <a:tc>
-                  <a:txBody>
-                    <a:bodyPr/>
-                    <a:lstStyle/>
-                    <a:p>
-                      <a:pPr algn="r">
-                        <a:defRPr>
-                          <a:latin typeface="Roboto"/>
-                        </a:defRPr>
-                      </a:pPr>
-                      <a:r>
-                        <a:rPr sz="1050">
-                          <a:solidFill>
-                            <a:srgbClr val="B42318"/>
-                          </a:solidFill>
-                          <a:latin typeface="Roboto"/>
-                        </a:rPr>
-                        <a:t>($46,515)</a:t>
-                      </a:r>
-                    </a:p>
-                  </a:txBody>
-                  <a:tcPr>
-                    <a:solidFill>
-                      <a:srgbClr val="FFFFFF"/>
-                    </a:solidFill>
-                  </a:tcPr>
-                </a:tc>
-                <a:tc>
-                  <a:txBody>
-                    <a:bodyPr/>
-                    <a:lstStyle/>
-                    <a:p>
-                      <a:pPr algn="r">
-                        <a:defRPr>
-                          <a:latin typeface="Roboto"/>
-                        </a:defRPr>
-                      </a:pPr>
-                      <a:r>
-                        <a:rPr sz="1050">
-                          <a:solidFill>
-                            <a:srgbClr val="25342A"/>
-                          </a:solidFill>
-                          <a:latin typeface="Roboto"/>
-                        </a:rPr>
-                        <a:t>$0</a:t>
-                      </a:r>
-                    </a:p>
-                  </a:txBody>
-                  <a:tcPr>
-                    <a:solidFill>
-                      <a:srgbClr val="FFFFFF"/>
-                    </a:solidFill>
-                  </a:tcPr>
-                </a:tc>
-                <a:tc>
-                  <a:txBody>
-                    <a:bodyPr/>
-                    <a:lstStyle/>
-                    <a:p>
-                      <a:pPr algn="r">
-                        <a:defRPr>
-                          <a:latin typeface="Roboto"/>
-                        </a:defRPr>
-                      </a:pPr>
-                      <a:r>
-                        <a:rPr sz="1050">
-                          <a:solidFill>
-                            <a:srgbClr val="25342A"/>
-                          </a:solidFill>
-                          <a:latin typeface="Roboto"/>
-                        </a:rPr>
-                        <a:t>$57,882</a:t>
-                      </a:r>
-                    </a:p>
-                  </a:txBody>
-                  <a:tcPr>
-                    <a:solidFill>
-                      <a:srgbClr val="FFFFFF"/>
-                    </a:solidFill>
-                  </a:tcPr>
-                </a:tc>
-                <a:tc>
-                  <a:txBody>
-                    <a:bodyPr/>
-                    <a:lstStyle/>
-                    <a:p>
-                      <a:pPr algn="r">
-                        <a:defRPr>
-                          <a:latin typeface="Roboto"/>
-                        </a:defRPr>
-                      </a:pPr>
-                      <a:r>
-                        <a:rPr sz="1050">
-                          <a:solidFill>
-                            <a:srgbClr val="25342A"/>
-                          </a:solidFill>
-                          <a:latin typeface="Roboto"/>
-                        </a:rPr>
-                        <a:t>$37,286</a:t>
+                            <a:srgbClr val="25342A"/>
+                          </a:solidFill>
+                          <a:latin typeface="Roboto"/>
+                        </a:rPr>
+                        <a:t>30</a:t>
                       </a:r>
                     </a:p>
                   </a:txBody>
@@ -8861,7 +11936,7 @@
                           </a:solidFill>
                           <a:latin typeface="Roboto"/>
                         </a:rPr>
-                        <a:t>28 Sep</a:t>
+                        <a:t>Wacol logistics depot</a:t>
                       </a:r>
                     </a:p>
                   </a:txBody>
@@ -8876,19 +11951,19 @@
                     <a:bodyPr/>
                     <a:lstStyle/>
                     <a:p>
-                      <a:pPr algn="r">
-                        <a:defRPr>
-                          <a:latin typeface="Roboto"/>
-                        </a:defRPr>
-                      </a:pPr>
-                      <a:r>
-                        <a:rPr sz="1050">
-                          <a:solidFill>
-                            <a:srgbClr val="25342A"/>
-                          </a:solidFill>
-                          <a:latin typeface="Roboto"/>
-                        </a:rPr>
-                        <a:t>$57,882</a:t>
+                      <a:pPr algn="l">
+                        <a:defRPr>
+                          <a:latin typeface="Roboto"/>
+                        </a:defRPr>
+                      </a:pPr>
+                      <a:r>
+                        <a:rPr sz="1050">
+                          <a:solidFill>
+                            <a:srgbClr val="25342A"/>
+                          </a:solidFill>
+                          <a:latin typeface="Roboto"/>
+                        </a:rPr>
+                        <a:t>1 Aug</a:t>
                       </a:r>
                     </a:p>
                   </a:txBody>
@@ -8915,7 +11990,7 @@
                           </a:solidFill>
                           <a:latin typeface="Roboto"/>
                         </a:rPr>
-                        <a:t>$33,000</a:t>
+                        <a:t>$3,685</a:t>
                       </a:r>
                     </a:p>
                   </a:txBody>
@@ -8942,7 +12017,7 @@
                           </a:solidFill>
                           <a:latin typeface="Roboto"/>
                         </a:rPr>
-                        <a:t>$6,327</a:t>
+                        <a:t>30</a:t>
                       </a:r>
                     </a:p>
                   </a:txBody>
@@ -8969,115 +12044,7 @@
                           </a:solidFill>
                           <a:latin typeface="Roboto"/>
                         </a:rPr>
-                        <a:t>$0</a:t>
-                      </a:r>
-                    </a:p>
-                  </a:txBody>
-                  <a:tcPr>
-                    <a:solidFill>
-                      <a:srgbClr val="F7FAF7"/>
-                    </a:solidFill>
-                  </a:tcPr>
-                </a:tc>
-                <a:tc>
-                  <a:txBody>
-                    <a:bodyPr/>
-                    <a:lstStyle/>
-                    <a:p>
-                      <a:pPr algn="r">
-                        <a:defRPr>
-                          <a:latin typeface="Roboto"/>
-                        </a:defRPr>
-                      </a:pPr>
-                      <a:r>
-                        <a:rPr sz="1050">
-                          <a:solidFill>
-                            <a:srgbClr val="25342A"/>
-                          </a:solidFill>
-                          <a:latin typeface="Roboto"/>
-                        </a:rPr>
-                        <a:t>$0</a:t>
-                      </a:r>
-                    </a:p>
-                  </a:txBody>
-                  <a:tcPr>
-                    <a:solidFill>
-                      <a:srgbClr val="F7FAF7"/>
-                    </a:solidFill>
-                  </a:tcPr>
-                </a:tc>
-                <a:tc>
-                  <a:txBody>
-                    <a:bodyPr/>
-                    <a:lstStyle/>
-                    <a:p>
-                      <a:pPr algn="r">
-                        <a:defRPr>
-                          <a:latin typeface="Roboto"/>
-                        </a:defRPr>
-                      </a:pPr>
-                      <a:r>
-                        <a:rPr sz="1050">
-                          <a:solidFill>
-                            <a:srgbClr val="B42318"/>
-                          </a:solidFill>
-                          <a:latin typeface="Roboto"/>
-                        </a:rPr>
-                        <a:t>($5,000)</a:t>
-                      </a:r>
-                    </a:p>
-                  </a:txBody>
-                  <a:tcPr>
-                    <a:solidFill>
-                      <a:srgbClr val="F7FAF7"/>
-                    </a:solidFill>
-                  </a:tcPr>
-                </a:tc>
-                <a:tc>
-                  <a:txBody>
-                    <a:bodyPr/>
-                    <a:lstStyle/>
-                    <a:p>
-                      <a:pPr algn="r">
-                        <a:defRPr>
-                          <a:latin typeface="Roboto"/>
-                        </a:defRPr>
-                      </a:pPr>
-                      <a:r>
-                        <a:rPr sz="1050">
-                          <a:solidFill>
-                            <a:srgbClr val="25342A"/>
-                          </a:solidFill>
-                          <a:latin typeface="Roboto"/>
-                        </a:rPr>
-                        <a:t>$92,209</a:t>
-                      </a:r>
-                    </a:p>
-                  </a:txBody>
-                  <a:tcPr>
-                    <a:solidFill>
-                      <a:srgbClr val="F7FAF7"/>
-                    </a:solidFill>
-                  </a:tcPr>
-                </a:tc>
-                <a:tc>
-                  <a:txBody>
-                    <a:bodyPr/>
-                    <a:lstStyle/>
-                    <a:p>
-                      <a:pPr algn="r">
-                        <a:defRPr>
-                          <a:latin typeface="Roboto"/>
-                        </a:defRPr>
-                      </a:pPr>
-                      <a:r>
-                        <a:rPr sz="1050">
-                          <a:solidFill>
-                            <a:srgbClr val="25342A"/>
-                          </a:solidFill>
-                          <a:latin typeface="Roboto"/>
-                        </a:rPr>
-                        <a:t>$57,882</a:t>
+                        <a:t>30</a:t>
                       </a:r>
                     </a:p>
                   </a:txBody>
@@ -9106,7 +12073,7 @@
                           </a:solidFill>
                           <a:latin typeface="Roboto"/>
                         </a:rPr>
-                        <a:t>5 Oct</a:t>
+                        <a:t>Call-out 1, August</a:t>
                       </a:r>
                     </a:p>
                   </a:txBody>
@@ -9121,19 +12088,19 @@
                     <a:bodyPr/>
                     <a:lstStyle/>
                     <a:p>
-                      <a:pPr algn="r">
-                        <a:defRPr>
-                          <a:latin typeface="Roboto"/>
-                        </a:defRPr>
-                      </a:pPr>
-                      <a:r>
-                        <a:rPr sz="1050">
-                          <a:solidFill>
-                            <a:srgbClr val="25342A"/>
-                          </a:solidFill>
-                          <a:latin typeface="Roboto"/>
-                        </a:rPr>
-                        <a:t>$92,209</a:t>
+                      <a:pPr algn="l">
+                        <a:defRPr>
+                          <a:latin typeface="Roboto"/>
+                        </a:defRPr>
+                      </a:pPr>
+                      <a:r>
+                        <a:rPr sz="1050">
+                          <a:solidFill>
+                            <a:srgbClr val="25342A"/>
+                          </a:solidFill>
+                          <a:latin typeface="Roboto"/>
+                        </a:rPr>
+                        <a:t>24 Aug</a:t>
                       </a:r>
                     </a:p>
                   </a:txBody>
@@ -9160,7 +12127,7 @@
                           </a:solidFill>
                           <a:latin typeface="Roboto"/>
                         </a:rPr>
-                        <a:t>$0</a:t>
+                        <a:t>$1,018</a:t>
                       </a:r>
                     </a:p>
                   </a:txBody>
@@ -9187,7 +12154,7 @@
                           </a:solidFill>
                           <a:latin typeface="Roboto"/>
                         </a:rPr>
-                        <a:t>$67,457</a:t>
+                        <a:t>3</a:t>
                       </a:r>
                     </a:p>
                   </a:txBody>
@@ -9210,119 +12177,11 @@
                       <a:r>
                         <a:rPr sz="1050">
                           <a:solidFill>
-                            <a:srgbClr val="B42318"/>
-                          </a:solidFill>
-                          <a:latin typeface="Roboto"/>
-                        </a:rPr>
-                        <a:t>($37,700)</a:t>
-                      </a:r>
-                    </a:p>
-                  </a:txBody>
-                  <a:tcPr>
-                    <a:solidFill>
-                      <a:srgbClr val="FFFFFF"/>
-                    </a:solidFill>
-                  </a:tcPr>
-                </a:tc>
-                <a:tc>
-                  <a:txBody>
-                    <a:bodyPr/>
-                    <a:lstStyle/>
-                    <a:p>
-                      <a:pPr algn="r">
-                        <a:defRPr>
-                          <a:latin typeface="Roboto"/>
-                        </a:defRPr>
-                      </a:pPr>
-                      <a:r>
-                        <a:rPr sz="1050">
-                          <a:solidFill>
-                            <a:srgbClr val="B42318"/>
-                          </a:solidFill>
-                          <a:latin typeface="Roboto"/>
-                        </a:rPr>
-                        <a:t>($46,515)</a:t>
-                      </a:r>
-                    </a:p>
-                  </a:txBody>
-                  <a:tcPr>
-                    <a:solidFill>
-                      <a:srgbClr val="FFFFFF"/>
-                    </a:solidFill>
-                  </a:tcPr>
-                </a:tc>
-                <a:tc>
-                  <a:txBody>
-                    <a:bodyPr/>
-                    <a:lstStyle/>
-                    <a:p>
-                      <a:pPr algn="r">
-                        <a:defRPr>
-                          <a:latin typeface="Roboto"/>
-                        </a:defRPr>
-                      </a:pPr>
-                      <a:r>
-                        <a:rPr sz="1050">
-                          <a:solidFill>
-                            <a:srgbClr val="B42318"/>
-                          </a:solidFill>
-                          <a:latin typeface="Roboto"/>
-                        </a:rPr>
-                        <a:t>($1,100)</a:t>
-                      </a:r>
-                    </a:p>
-                  </a:txBody>
-                  <a:tcPr>
-                    <a:solidFill>
-                      <a:srgbClr val="FFFFFF"/>
-                    </a:solidFill>
-                  </a:tcPr>
-                </a:tc>
-                <a:tc>
-                  <a:txBody>
-                    <a:bodyPr/>
-                    <a:lstStyle/>
-                    <a:p>
-                      <a:pPr algn="r">
-                        <a:defRPr>
-                          <a:latin typeface="Roboto"/>
-                        </a:defRPr>
-                      </a:pPr>
-                      <a:r>
-                        <a:rPr sz="1050">
-                          <a:solidFill>
-                            <a:srgbClr val="25342A"/>
-                          </a:solidFill>
-                          <a:latin typeface="Roboto"/>
-                        </a:rPr>
-                        <a:t>$74,351</a:t>
-                      </a:r>
-                    </a:p>
-                  </a:txBody>
-                  <a:tcPr>
-                    <a:solidFill>
-                      <a:srgbClr val="FFFFFF"/>
-                    </a:solidFill>
-                  </a:tcPr>
-                </a:tc>
-                <a:tc>
-                  <a:txBody>
-                    <a:bodyPr/>
-                    <a:lstStyle/>
-                    <a:p>
-                      <a:pPr algn="r">
-                        <a:defRPr>
-                          <a:latin typeface="Roboto"/>
-                        </a:defRPr>
-                      </a:pPr>
-                      <a:r>
-                        <a:rPr sz="1050">
-                          <a:solidFill>
-                            <a:srgbClr val="25342A"/>
-                          </a:solidFill>
-                          <a:latin typeface="Roboto"/>
-                        </a:rPr>
-                        <a:t>$45,860</a:t>
+                            <a:srgbClr val="25342A"/>
+                          </a:solidFill>
+                          <a:latin typeface="Roboto"/>
+                        </a:rPr>
+                        <a:t>7</a:t>
                       </a:r>
                     </a:p>
                   </a:txBody>
@@ -9351,7 +12210,7 @@
                           </a:solidFill>
                           <a:latin typeface="Roboto"/>
                         </a:rPr>
-                        <a:t>12 Oct</a:t>
+                        <a:t>Call-out 16, August</a:t>
                       </a:r>
                     </a:p>
                   </a:txBody>
@@ -9366,19 +12225,19 @@
                     <a:bodyPr/>
                     <a:lstStyle/>
                     <a:p>
-                      <a:pPr algn="r">
-                        <a:defRPr>
-                          <a:latin typeface="Roboto"/>
-                        </a:defRPr>
-                      </a:pPr>
-                      <a:r>
-                        <a:rPr sz="1050">
-                          <a:solidFill>
-                            <a:srgbClr val="25342A"/>
-                          </a:solidFill>
-                          <a:latin typeface="Roboto"/>
-                        </a:rPr>
-                        <a:t>$74,351</a:t>
+                      <a:pPr algn="l">
+                        <a:defRPr>
+                          <a:latin typeface="Roboto"/>
+                        </a:defRPr>
+                      </a:pPr>
+                      <a:r>
+                        <a:rPr sz="1050">
+                          <a:solidFill>
+                            <a:srgbClr val="25342A"/>
+                          </a:solidFill>
+                          <a:latin typeface="Roboto"/>
+                        </a:rPr>
+                        <a:t>22 Aug</a:t>
                       </a:r>
                     </a:p>
                   </a:txBody>
@@ -9405,7 +12264,7 @@
                           </a:solidFill>
                           <a:latin typeface="Roboto"/>
                         </a:rPr>
-                        <a:t>$0</a:t>
+                        <a:t>$1,003</a:t>
                       </a:r>
                     </a:p>
                   </a:txBody>
@@ -9432,7 +12291,7 @@
                           </a:solidFill>
                           <a:latin typeface="Roboto"/>
                         </a:rPr>
-                        <a:t>$32,115</a:t>
+                        <a:t>3</a:t>
                       </a:r>
                     </a:p>
                   </a:txBody>
@@ -9459,115 +12318,7 @@
                           </a:solidFill>
                           <a:latin typeface="Roboto"/>
                         </a:rPr>
-                        <a:t>$0</a:t>
-                      </a:r>
-                    </a:p>
-                  </a:txBody>
-                  <a:tcPr>
-                    <a:solidFill>
-                      <a:srgbClr val="F7FAF7"/>
-                    </a:solidFill>
-                  </a:tcPr>
-                </a:tc>
-                <a:tc>
-                  <a:txBody>
-                    <a:bodyPr/>
-                    <a:lstStyle/>
-                    <a:p>
-                      <a:pPr algn="r">
-                        <a:defRPr>
-                          <a:latin typeface="Roboto"/>
-                        </a:defRPr>
-                      </a:pPr>
-                      <a:r>
-                        <a:rPr sz="1050">
-                          <a:solidFill>
-                            <a:srgbClr val="25342A"/>
-                          </a:solidFill>
-                          <a:latin typeface="Roboto"/>
-                        </a:rPr>
-                        <a:t>$0</a:t>
-                      </a:r>
-                    </a:p>
-                  </a:txBody>
-                  <a:tcPr>
-                    <a:solidFill>
-                      <a:srgbClr val="F7FAF7"/>
-                    </a:solidFill>
-                  </a:tcPr>
-                </a:tc>
-                <a:tc>
-                  <a:txBody>
-                    <a:bodyPr/>
-                    <a:lstStyle/>
-                    <a:p>
-                      <a:pPr algn="r">
-                        <a:defRPr>
-                          <a:latin typeface="Roboto"/>
-                        </a:defRPr>
-                      </a:pPr>
-                      <a:r>
-                        <a:rPr sz="1050">
-                          <a:solidFill>
-                            <a:srgbClr val="25342A"/>
-                          </a:solidFill>
-                          <a:latin typeface="Roboto"/>
-                        </a:rPr>
-                        <a:t>$0</a:t>
-                      </a:r>
-                    </a:p>
-                  </a:txBody>
-                  <a:tcPr>
-                    <a:solidFill>
-                      <a:srgbClr val="F7FAF7"/>
-                    </a:solidFill>
-                  </a:tcPr>
-                </a:tc>
-                <a:tc>
-                  <a:txBody>
-                    <a:bodyPr/>
-                    <a:lstStyle/>
-                    <a:p>
-                      <a:pPr algn="r">
-                        <a:defRPr>
-                          <a:latin typeface="Roboto"/>
-                        </a:defRPr>
-                      </a:pPr>
-                      <a:r>
-                        <a:rPr sz="1050">
-                          <a:solidFill>
-                            <a:srgbClr val="25342A"/>
-                          </a:solidFill>
-                          <a:latin typeface="Roboto"/>
-                        </a:rPr>
-                        <a:t>$106,466</a:t>
-                      </a:r>
-                    </a:p>
-                  </a:txBody>
-                  <a:tcPr>
-                    <a:solidFill>
-                      <a:srgbClr val="F7FAF7"/>
-                    </a:solidFill>
-                  </a:tcPr>
-                </a:tc>
-                <a:tc>
-                  <a:txBody>
-                    <a:bodyPr/>
-                    <a:lstStyle/>
-                    <a:p>
-                      <a:pPr algn="r">
-                        <a:defRPr>
-                          <a:latin typeface="Roboto"/>
-                        </a:defRPr>
-                      </a:pPr>
-                      <a:r>
-                        <a:rPr sz="1050">
-                          <a:solidFill>
-                            <a:srgbClr val="25342A"/>
-                          </a:solidFill>
-                          <a:latin typeface="Roboto"/>
-                        </a:rPr>
-                        <a:t>$74,351</a:t>
+                        <a:t>9</a:t>
                       </a:r>
                     </a:p>
                   </a:txBody>
@@ -9596,7 +12347,7 @@
                           </a:solidFill>
                           <a:latin typeface="Roboto"/>
                         </a:rPr>
-                        <a:t>19 Oct</a:t>
+                        <a:t>Call-out 14, August</a:t>
                       </a:r>
                     </a:p>
                   </a:txBody>
@@ -9611,19 +12362,19 @@
                     <a:bodyPr/>
                     <a:lstStyle/>
                     <a:p>
-                      <a:pPr algn="r">
-                        <a:defRPr>
-                          <a:latin typeface="Roboto"/>
-                        </a:defRPr>
-                      </a:pPr>
-                      <a:r>
-                        <a:rPr sz="1050">
-                          <a:solidFill>
-                            <a:srgbClr val="25342A"/>
-                          </a:solidFill>
-                          <a:latin typeface="Roboto"/>
-                        </a:rPr>
-                        <a:t>$106,466</a:t>
+                      <a:pPr algn="l">
+                        <a:defRPr>
+                          <a:latin typeface="Roboto"/>
+                        </a:defRPr>
+                      </a:pPr>
+                      <a:r>
+                        <a:rPr sz="1050">
+                          <a:solidFill>
+                            <a:srgbClr val="25342A"/>
+                          </a:solidFill>
+                          <a:latin typeface="Roboto"/>
+                        </a:rPr>
+                        <a:t>5 Aug</a:t>
                       </a:r>
                     </a:p>
                   </a:txBody>
@@ -9650,7 +12401,7 @@
                           </a:solidFill>
                           <a:latin typeface="Roboto"/>
                         </a:rPr>
-                        <a:t>$0</a:t>
+                        <a:t>$824</a:t>
                       </a:r>
                     </a:p>
                   </a:txBody>
@@ -9677,7 +12428,7 @@
                           </a:solidFill>
                           <a:latin typeface="Roboto"/>
                         </a:rPr>
-                        <a:t>$32,115</a:t>
+                        <a:t>3</a:t>
                       </a:r>
                     </a:p>
                   </a:txBody>
@@ -9700,119 +12451,11 @@
                       <a:r>
                         <a:rPr sz="1050">
                           <a:solidFill>
-                            <a:srgbClr val="B42318"/>
-                          </a:solidFill>
-                          <a:latin typeface="Roboto"/>
-                        </a:rPr>
-                        <a:t>($37,700)</a:t>
-                      </a:r>
-                    </a:p>
-                  </a:txBody>
-                  <a:tcPr>
-                    <a:solidFill>
-                      <a:srgbClr val="FFFFFF"/>
-                    </a:solidFill>
-                  </a:tcPr>
-                </a:tc>
-                <a:tc>
-                  <a:txBody>
-                    <a:bodyPr/>
-                    <a:lstStyle/>
-                    <a:p>
-                      <a:pPr algn="r">
-                        <a:defRPr>
-                          <a:latin typeface="Roboto"/>
-                        </a:defRPr>
-                      </a:pPr>
-                      <a:r>
-                        <a:rPr sz="1050">
-                          <a:solidFill>
-                            <a:srgbClr val="B42318"/>
-                          </a:solidFill>
-                          <a:latin typeface="Roboto"/>
-                        </a:rPr>
-                        <a:t>($46,515)</a:t>
-                      </a:r>
-                    </a:p>
-                  </a:txBody>
-                  <a:tcPr>
-                    <a:solidFill>
-                      <a:srgbClr val="FFFFFF"/>
-                    </a:solidFill>
-                  </a:tcPr>
-                </a:tc>
-                <a:tc>
-                  <a:txBody>
-                    <a:bodyPr/>
-                    <a:lstStyle/>
-                    <a:p>
-                      <a:pPr algn="r">
-                        <a:defRPr>
-                          <a:latin typeface="Roboto"/>
-                        </a:defRPr>
-                      </a:pPr>
-                      <a:r>
-                        <a:rPr sz="1050">
-                          <a:solidFill>
-                            <a:srgbClr val="25342A"/>
-                          </a:solidFill>
-                          <a:latin typeface="Roboto"/>
-                        </a:rPr>
-                        <a:t>$0</a:t>
-                      </a:r>
-                    </a:p>
-                  </a:txBody>
-                  <a:tcPr>
-                    <a:solidFill>
-                      <a:srgbClr val="FFFFFF"/>
-                    </a:solidFill>
-                  </a:tcPr>
-                </a:tc>
-                <a:tc>
-                  <a:txBody>
-                    <a:bodyPr/>
-                    <a:lstStyle/>
-                    <a:p>
-                      <a:pPr algn="r">
-                        <a:defRPr>
-                          <a:latin typeface="Roboto"/>
-                        </a:defRPr>
-                      </a:pPr>
-                      <a:r>
-                        <a:rPr sz="1050">
-                          <a:solidFill>
-                            <a:srgbClr val="25342A"/>
-                          </a:solidFill>
-                          <a:latin typeface="Roboto"/>
-                        </a:rPr>
-                        <a:t>$54,366</a:t>
-                      </a:r>
-                    </a:p>
-                  </a:txBody>
-                  <a:tcPr>
-                    <a:solidFill>
-                      <a:srgbClr val="FFFFFF"/>
-                    </a:solidFill>
-                  </a:tcPr>
-                </a:tc>
-                <a:tc>
-                  <a:txBody>
-                    <a:bodyPr/>
-                    <a:lstStyle/>
-                    <a:p>
-                      <a:pPr algn="r">
-                        <a:defRPr>
-                          <a:latin typeface="Roboto"/>
-                        </a:defRPr>
-                      </a:pPr>
-                      <a:r>
-                        <a:rPr sz="1050">
-                          <a:solidFill>
-                            <a:srgbClr val="25342A"/>
-                          </a:solidFill>
-                          <a:latin typeface="Roboto"/>
-                        </a:rPr>
-                        <a:t>$35,097</a:t>
+                            <a:srgbClr val="25342A"/>
+                          </a:solidFill>
+                          <a:latin typeface="Roboto"/>
+                        </a:rPr>
+                        <a:t>26</a:t>
                       </a:r>
                     </a:p>
                   </a:txBody>
@@ -9841,7 +12484,7 @@
                           </a:solidFill>
                           <a:latin typeface="Roboto"/>
                         </a:rPr>
-                        <a:t>26 Oct</a:t>
+                        <a:t>Call-out 38, August</a:t>
                       </a:r>
                     </a:p>
                   </a:txBody>
@@ -9856,19 +12499,19 @@
                     <a:bodyPr/>
                     <a:lstStyle/>
                     <a:p>
-                      <a:pPr algn="r">
-                        <a:defRPr>
-                          <a:latin typeface="Roboto"/>
-                        </a:defRPr>
-                      </a:pPr>
-                      <a:r>
-                        <a:rPr sz="1050">
-                          <a:solidFill>
-                            <a:srgbClr val="25342A"/>
-                          </a:solidFill>
-                          <a:latin typeface="Roboto"/>
-                        </a:rPr>
-                        <a:t>$54,366</a:t>
+                      <a:pPr algn="l">
+                        <a:defRPr>
+                          <a:latin typeface="Roboto"/>
+                        </a:defRPr>
+                      </a:pPr>
+                      <a:r>
+                        <a:rPr sz="1050">
+                          <a:solidFill>
+                            <a:srgbClr val="25342A"/>
+                          </a:solidFill>
+                          <a:latin typeface="Roboto"/>
+                        </a:rPr>
+                        <a:t>25 Aug</a:t>
                       </a:r>
                     </a:p>
                   </a:txBody>
@@ -9895,7 +12538,7 @@
                           </a:solidFill>
                           <a:latin typeface="Roboto"/>
                         </a:rPr>
-                        <a:t>$0</a:t>
+                        <a:t>$781</a:t>
                       </a:r>
                     </a:p>
                   </a:txBody>
@@ -9922,7 +12565,7 @@
                           </a:solidFill>
                           <a:latin typeface="Roboto"/>
                         </a:rPr>
-                        <a:t>$32,115</a:t>
+                        <a:t>3</a:t>
                       </a:r>
                     </a:p>
                   </a:txBody>
@@ -9949,115 +12592,7 @@
                           </a:solidFill>
                           <a:latin typeface="Roboto"/>
                         </a:rPr>
-                        <a:t>$0</a:t>
-                      </a:r>
-                    </a:p>
-                  </a:txBody>
-                  <a:tcPr>
-                    <a:solidFill>
-                      <a:srgbClr val="F7FAF7"/>
-                    </a:solidFill>
-                  </a:tcPr>
-                </a:tc>
-                <a:tc>
-                  <a:txBody>
-                    <a:bodyPr/>
-                    <a:lstStyle/>
-                    <a:p>
-                      <a:pPr algn="r">
-                        <a:defRPr>
-                          <a:latin typeface="Roboto"/>
-                        </a:defRPr>
-                      </a:pPr>
-                      <a:r>
-                        <a:rPr sz="1050">
-                          <a:solidFill>
-                            <a:srgbClr val="25342A"/>
-                          </a:solidFill>
-                          <a:latin typeface="Roboto"/>
-                        </a:rPr>
-                        <a:t>$0</a:t>
-                      </a:r>
-                    </a:p>
-                  </a:txBody>
-                  <a:tcPr>
-                    <a:solidFill>
-                      <a:srgbClr val="F7FAF7"/>
-                    </a:solidFill>
-                  </a:tcPr>
-                </a:tc>
-                <a:tc>
-                  <a:txBody>
-                    <a:bodyPr/>
-                    <a:lstStyle/>
-                    <a:p>
-                      <a:pPr algn="r">
-                        <a:defRPr>
-                          <a:latin typeface="Roboto"/>
-                        </a:defRPr>
-                      </a:pPr>
-                      <a:r>
-                        <a:rPr sz="1050">
-                          <a:solidFill>
-                            <a:srgbClr val="25342A"/>
-                          </a:solidFill>
-                          <a:latin typeface="Roboto"/>
-                        </a:rPr>
-                        <a:t>$0</a:t>
-                      </a:r>
-                    </a:p>
-                  </a:txBody>
-                  <a:tcPr>
-                    <a:solidFill>
-                      <a:srgbClr val="F7FAF7"/>
-                    </a:solidFill>
-                  </a:tcPr>
-                </a:tc>
-                <a:tc>
-                  <a:txBody>
-                    <a:bodyPr/>
-                    <a:lstStyle/>
-                    <a:p>
-                      <a:pPr algn="r">
-                        <a:defRPr>
-                          <a:latin typeface="Roboto"/>
-                        </a:defRPr>
-                      </a:pPr>
-                      <a:r>
-                        <a:rPr sz="1050">
-                          <a:solidFill>
-                            <a:srgbClr val="25342A"/>
-                          </a:solidFill>
-                          <a:latin typeface="Roboto"/>
-                        </a:rPr>
-                        <a:t>$86,481</a:t>
-                      </a:r>
-                    </a:p>
-                  </a:txBody>
-                  <a:tcPr>
-                    <a:solidFill>
-                      <a:srgbClr val="F7FAF7"/>
-                    </a:solidFill>
-                  </a:tcPr>
-                </a:tc>
-                <a:tc>
-                  <a:txBody>
-                    <a:bodyPr/>
-                    <a:lstStyle/>
-                    <a:p>
-                      <a:pPr algn="r">
-                        <a:defRPr>
-                          <a:latin typeface="Roboto"/>
-                        </a:defRPr>
-                      </a:pPr>
-                      <a:r>
-                        <a:rPr sz="1050">
-                          <a:solidFill>
-                            <a:srgbClr val="25342A"/>
-                          </a:solidFill>
-                          <a:latin typeface="Roboto"/>
-                        </a:rPr>
-                        <a:t>$54,366</a:t>
+                        <a:t>6</a:t>
                       </a:r>
                     </a:p>
                   </a:txBody>
@@ -10086,7 +12621,7 @@
                           </a:solidFill>
                           <a:latin typeface="Roboto"/>
                         </a:rPr>
-                        <a:t>2 Nov</a:t>
+                        <a:t>Call-out 27, August</a:t>
                       </a:r>
                     </a:p>
                   </a:txBody>
@@ -10101,19 +12636,19 @@
                     <a:bodyPr/>
                     <a:lstStyle/>
                     <a:p>
-                      <a:pPr algn="r">
-                        <a:defRPr>
-                          <a:latin typeface="Roboto"/>
-                        </a:defRPr>
-                      </a:pPr>
-                      <a:r>
-                        <a:rPr sz="1050">
-                          <a:solidFill>
-                            <a:srgbClr val="25342A"/>
-                          </a:solidFill>
-                          <a:latin typeface="Roboto"/>
-                        </a:rPr>
-                        <a:t>$86,481</a:t>
+                      <a:pPr algn="l">
+                        <a:defRPr>
+                          <a:latin typeface="Roboto"/>
+                        </a:defRPr>
+                      </a:pPr>
+                      <a:r>
+                        <a:rPr sz="1050">
+                          <a:solidFill>
+                            <a:srgbClr val="25342A"/>
+                          </a:solidFill>
+                          <a:latin typeface="Roboto"/>
+                        </a:rPr>
+                        <a:t>3 Aug</a:t>
                       </a:r>
                     </a:p>
                   </a:txBody>
@@ -10140,7 +12675,7 @@
                           </a:solidFill>
                           <a:latin typeface="Roboto"/>
                         </a:rPr>
-                        <a:t>$0</a:t>
+                        <a:t>$678</a:t>
                       </a:r>
                     </a:p>
                   </a:txBody>
@@ -10167,7 +12702,7 @@
                           </a:solidFill>
                           <a:latin typeface="Roboto"/>
                         </a:rPr>
-                        <a:t>$72,615</a:t>
+                        <a:t>3</a:t>
                       </a:r>
                     </a:p>
                   </a:txBody>
@@ -10190,119 +12725,11 @@
                       <a:r>
                         <a:rPr sz="1050">
                           <a:solidFill>
-                            <a:srgbClr val="B42318"/>
-                          </a:solidFill>
-                          <a:latin typeface="Roboto"/>
-                        </a:rPr>
-                        <a:t>($37,700)</a:t>
-                      </a:r>
-                    </a:p>
-                  </a:txBody>
-                  <a:tcPr>
-                    <a:solidFill>
-                      <a:srgbClr val="FFFFFF"/>
-                    </a:solidFill>
-                  </a:tcPr>
-                </a:tc>
-                <a:tc>
-                  <a:txBody>
-                    <a:bodyPr/>
-                    <a:lstStyle/>
-                    <a:p>
-                      <a:pPr algn="r">
-                        <a:defRPr>
-                          <a:latin typeface="Roboto"/>
-                        </a:defRPr>
-                      </a:pPr>
-                      <a:r>
-                        <a:rPr sz="1050">
-                          <a:solidFill>
-                            <a:srgbClr val="B42318"/>
-                          </a:solidFill>
-                          <a:latin typeface="Roboto"/>
-                        </a:rPr>
-                        <a:t>($46,515)</a:t>
-                      </a:r>
-                    </a:p>
-                  </a:txBody>
-                  <a:tcPr>
-                    <a:solidFill>
-                      <a:srgbClr val="FFFFFF"/>
-                    </a:solidFill>
-                  </a:tcPr>
-                </a:tc>
-                <a:tc>
-                  <a:txBody>
-                    <a:bodyPr/>
-                    <a:lstStyle/>
-                    <a:p>
-                      <a:pPr algn="r">
-                        <a:defRPr>
-                          <a:latin typeface="Roboto"/>
-                        </a:defRPr>
-                      </a:pPr>
-                      <a:r>
-                        <a:rPr sz="1050">
-                          <a:solidFill>
-                            <a:srgbClr val="B42318"/>
-                          </a:solidFill>
-                          <a:latin typeface="Roboto"/>
-                        </a:rPr>
-                        <a:t>($11,612)</a:t>
-                      </a:r>
-                    </a:p>
-                  </a:txBody>
-                  <a:tcPr>
-                    <a:solidFill>
-                      <a:srgbClr val="FFFFFF"/>
-                    </a:solidFill>
-                  </a:tcPr>
-                </a:tc>
-                <a:tc>
-                  <a:txBody>
-                    <a:bodyPr/>
-                    <a:lstStyle/>
-                    <a:p>
-                      <a:pPr algn="r">
-                        <a:defRPr>
-                          <a:latin typeface="Roboto"/>
-                        </a:defRPr>
-                      </a:pPr>
-                      <a:r>
-                        <a:rPr sz="1050">
-                          <a:solidFill>
-                            <a:srgbClr val="25342A"/>
-                          </a:solidFill>
-                          <a:latin typeface="Roboto"/>
-                        </a:rPr>
-                        <a:t>$63,268</a:t>
-                      </a:r>
-                    </a:p>
-                  </a:txBody>
-                  <a:tcPr>
-                    <a:solidFill>
-                      <a:srgbClr val="FFFFFF"/>
-                    </a:solidFill>
-                  </a:tcPr>
-                </a:tc>
-                <a:tc>
-                  <a:txBody>
-                    <a:bodyPr/>
-                    <a:lstStyle/>
-                    <a:p>
-                      <a:pPr algn="r">
-                        <a:defRPr>
-                          <a:latin typeface="Roboto"/>
-                        </a:defRPr>
-                      </a:pPr>
-                      <a:r>
-                        <a:rPr sz="1050">
-                          <a:solidFill>
-                            <a:srgbClr val="25342A"/>
-                          </a:solidFill>
-                          <a:latin typeface="Roboto"/>
-                        </a:rPr>
-                        <a:t>$51,115</a:t>
+                            <a:srgbClr val="25342A"/>
+                          </a:solidFill>
+                          <a:latin typeface="Roboto"/>
+                        </a:rPr>
+                        <a:t>28</a:t>
                       </a:r>
                     </a:p>
                   </a:txBody>
@@ -10331,7 +12758,7 @@
                           </a:solidFill>
                           <a:latin typeface="Roboto"/>
                         </a:rPr>
-                        <a:t>9 Nov</a:t>
+                        <a:t>Call-out 5, August</a:t>
                       </a:r>
                     </a:p>
                   </a:txBody>
@@ -10346,19 +12773,19 @@
                     <a:bodyPr/>
                     <a:lstStyle/>
                     <a:p>
-                      <a:pPr algn="r">
-                        <a:defRPr>
-                          <a:latin typeface="Roboto"/>
-                        </a:defRPr>
-                      </a:pPr>
-                      <a:r>
-                        <a:rPr sz="1050">
-                          <a:solidFill>
-                            <a:srgbClr val="25342A"/>
-                          </a:solidFill>
-                          <a:latin typeface="Roboto"/>
-                        </a:rPr>
-                        <a:t>$63,268</a:t>
+                      <a:pPr algn="l">
+                        <a:defRPr>
+                          <a:latin typeface="Roboto"/>
+                        </a:defRPr>
+                      </a:pPr>
+                      <a:r>
+                        <a:rPr sz="1050">
+                          <a:solidFill>
+                            <a:srgbClr val="25342A"/>
+                          </a:solidFill>
+                          <a:latin typeface="Roboto"/>
+                        </a:rPr>
+                        <a:t>26 Aug</a:t>
                       </a:r>
                     </a:p>
                   </a:txBody>
@@ -10385,7 +12812,7 @@
                           </a:solidFill>
                           <a:latin typeface="Roboto"/>
                         </a:rPr>
-                        <a:t>$0</a:t>
+                        <a:t>$592</a:t>
                       </a:r>
                     </a:p>
                   </a:txBody>
@@ -10412,7 +12839,7 @@
                           </a:solidFill>
                           <a:latin typeface="Roboto"/>
                         </a:rPr>
-                        <a:t>$32,115</a:t>
+                        <a:t>3</a:t>
                       </a:r>
                     </a:p>
                   </a:txBody>
@@ -10439,115 +12866,7 @@
                           </a:solidFill>
                           <a:latin typeface="Roboto"/>
                         </a:rPr>
-                        <a:t>$0</a:t>
-                      </a:r>
-                    </a:p>
-                  </a:txBody>
-                  <a:tcPr>
-                    <a:solidFill>
-                      <a:srgbClr val="F7FAF7"/>
-                    </a:solidFill>
-                  </a:tcPr>
-                </a:tc>
-                <a:tc>
-                  <a:txBody>
-                    <a:bodyPr/>
-                    <a:lstStyle/>
-                    <a:p>
-                      <a:pPr algn="r">
-                        <a:defRPr>
-                          <a:latin typeface="Roboto"/>
-                        </a:defRPr>
-                      </a:pPr>
-                      <a:r>
-                        <a:rPr sz="1050">
-                          <a:solidFill>
-                            <a:srgbClr val="25342A"/>
-                          </a:solidFill>
-                          <a:latin typeface="Roboto"/>
-                        </a:rPr>
-                        <a:t>$0</a:t>
-                      </a:r>
-                    </a:p>
-                  </a:txBody>
-                  <a:tcPr>
-                    <a:solidFill>
-                      <a:srgbClr val="F7FAF7"/>
-                    </a:solidFill>
-                  </a:tcPr>
-                </a:tc>
-                <a:tc>
-                  <a:txBody>
-                    <a:bodyPr/>
-                    <a:lstStyle/>
-                    <a:p>
-                      <a:pPr algn="r">
-                        <a:defRPr>
-                          <a:latin typeface="Roboto"/>
-                        </a:defRPr>
-                      </a:pPr>
-                      <a:r>
-                        <a:rPr sz="1050">
-                          <a:solidFill>
-                            <a:srgbClr val="25342A"/>
-                          </a:solidFill>
-                          <a:latin typeface="Roboto"/>
-                        </a:rPr>
-                        <a:t>$0</a:t>
-                      </a:r>
-                    </a:p>
-                  </a:txBody>
-                  <a:tcPr>
-                    <a:solidFill>
-                      <a:srgbClr val="F7FAF7"/>
-                    </a:solidFill>
-                  </a:tcPr>
-                </a:tc>
-                <a:tc>
-                  <a:txBody>
-                    <a:bodyPr/>
-                    <a:lstStyle/>
-                    <a:p>
-                      <a:pPr algn="r">
-                        <a:defRPr>
-                          <a:latin typeface="Roboto"/>
-                        </a:defRPr>
-                      </a:pPr>
-                      <a:r>
-                        <a:rPr sz="1050">
-                          <a:solidFill>
-                            <a:srgbClr val="25342A"/>
-                          </a:solidFill>
-                          <a:latin typeface="Roboto"/>
-                        </a:rPr>
-                        <a:t>$95,383</a:t>
-                      </a:r>
-                    </a:p>
-                  </a:txBody>
-                  <a:tcPr>
-                    <a:solidFill>
-                      <a:srgbClr val="F7FAF7"/>
-                    </a:solidFill>
-                  </a:tcPr>
-                </a:tc>
-                <a:tc>
-                  <a:txBody>
-                    <a:bodyPr/>
-                    <a:lstStyle/>
-                    <a:p>
-                      <a:pPr algn="r">
-                        <a:defRPr>
-                          <a:latin typeface="Roboto"/>
-                        </a:defRPr>
-                      </a:pPr>
-                      <a:r>
-                        <a:rPr sz="1050">
-                          <a:solidFill>
-                            <a:srgbClr val="25342A"/>
-                          </a:solidFill>
-                          <a:latin typeface="Roboto"/>
-                        </a:rPr>
-                        <a:t>$63,268</a:t>
+                        <a:t>5</a:t>
                       </a:r>
                     </a:p>
                   </a:txBody>
@@ -10576,7 +12895,7 @@
                           </a:solidFill>
                           <a:latin typeface="Roboto"/>
                         </a:rPr>
-                        <a:t>16 Nov</a:t>
+                        <a:t>Call-out 39, August</a:t>
                       </a:r>
                     </a:p>
                   </a:txBody>
@@ -10591,19 +12910,19 @@
                     <a:bodyPr/>
                     <a:lstStyle/>
                     <a:p>
-                      <a:pPr algn="r">
-                        <a:defRPr>
-                          <a:latin typeface="Roboto"/>
-                        </a:defRPr>
-                      </a:pPr>
-                      <a:r>
-                        <a:rPr sz="1050">
-                          <a:solidFill>
-                            <a:srgbClr val="25342A"/>
-                          </a:solidFill>
-                          <a:latin typeface="Roboto"/>
-                        </a:rPr>
-                        <a:t>$95,383</a:t>
+                      <a:pPr algn="l">
+                        <a:defRPr>
+                          <a:latin typeface="Roboto"/>
+                        </a:defRPr>
+                      </a:pPr>
+                      <a:r>
+                        <a:rPr sz="1050">
+                          <a:solidFill>
+                            <a:srgbClr val="25342A"/>
+                          </a:solidFill>
+                          <a:latin typeface="Roboto"/>
+                        </a:rPr>
+                        <a:t>25 Aug</a:t>
                       </a:r>
                     </a:p>
                   </a:txBody>
@@ -10630,7 +12949,7 @@
                           </a:solidFill>
                           <a:latin typeface="Roboto"/>
                         </a:rPr>
-                        <a:t>$0</a:t>
+                        <a:t>$530</a:t>
                       </a:r>
                     </a:p>
                   </a:txBody>
@@ -10657,7 +12976,7 @@
                           </a:solidFill>
                           <a:latin typeface="Roboto"/>
                         </a:rPr>
-                        <a:t>$32,115</a:t>
+                        <a:t>3</a:t>
                       </a:r>
                     </a:p>
                   </a:txBody>
@@ -10680,119 +12999,11 @@
                       <a:r>
                         <a:rPr sz="1050">
                           <a:solidFill>
-                            <a:srgbClr val="B42318"/>
-                          </a:solidFill>
-                          <a:latin typeface="Roboto"/>
-                        </a:rPr>
-                        <a:t>($37,700)</a:t>
-                      </a:r>
-                    </a:p>
-                  </a:txBody>
-                  <a:tcPr>
-                    <a:solidFill>
-                      <a:srgbClr val="FFFFFF"/>
-                    </a:solidFill>
-                  </a:tcPr>
-                </a:tc>
-                <a:tc>
-                  <a:txBody>
-                    <a:bodyPr/>
-                    <a:lstStyle/>
-                    <a:p>
-                      <a:pPr algn="r">
-                        <a:defRPr>
-                          <a:latin typeface="Roboto"/>
-                        </a:defRPr>
-                      </a:pPr>
-                      <a:r>
-                        <a:rPr sz="1050">
-                          <a:solidFill>
-                            <a:srgbClr val="B42318"/>
-                          </a:solidFill>
-                          <a:latin typeface="Roboto"/>
-                        </a:rPr>
-                        <a:t>($46,515)</a:t>
-                      </a:r>
-                    </a:p>
-                  </a:txBody>
-                  <a:tcPr>
-                    <a:solidFill>
-                      <a:srgbClr val="FFFFFF"/>
-                    </a:solidFill>
-                  </a:tcPr>
-                </a:tc>
-                <a:tc>
-                  <a:txBody>
-                    <a:bodyPr/>
-                    <a:lstStyle/>
-                    <a:p>
-                      <a:pPr algn="r">
-                        <a:defRPr>
-                          <a:latin typeface="Roboto"/>
-                        </a:defRPr>
-                      </a:pPr>
-                      <a:r>
-                        <a:rPr sz="1050">
-                          <a:solidFill>
-                            <a:srgbClr val="25342A"/>
-                          </a:solidFill>
-                          <a:latin typeface="Roboto"/>
-                        </a:rPr>
-                        <a:t>$0</a:t>
-                      </a:r>
-                    </a:p>
-                  </a:txBody>
-                  <a:tcPr>
-                    <a:solidFill>
-                      <a:srgbClr val="FFFFFF"/>
-                    </a:solidFill>
-                  </a:tcPr>
-                </a:tc>
-                <a:tc>
-                  <a:txBody>
-                    <a:bodyPr/>
-                    <a:lstStyle/>
-                    <a:p>
-                      <a:pPr algn="r">
-                        <a:defRPr>
-                          <a:latin typeface="Roboto"/>
-                        </a:defRPr>
-                      </a:pPr>
-                      <a:r>
-                        <a:rPr sz="1050">
-                          <a:solidFill>
-                            <a:srgbClr val="25342A"/>
-                          </a:solidFill>
-                          <a:latin typeface="Roboto"/>
-                        </a:rPr>
-                        <a:t>$43,283</a:t>
-                      </a:r>
-                    </a:p>
-                  </a:txBody>
-                  <a:tcPr>
-                    <a:solidFill>
-                      <a:srgbClr val="FFFFFF"/>
-                    </a:solidFill>
-                  </a:tcPr>
-                </a:tc>
-                <a:tc>
-                  <a:txBody>
-                    <a:bodyPr/>
-                    <a:lstStyle/>
-                    <a:p>
-                      <a:pPr algn="r">
-                        <a:defRPr>
-                          <a:latin typeface="Roboto"/>
-                        </a:defRPr>
-                      </a:pPr>
-                      <a:r>
-                        <a:rPr sz="1050">
-                          <a:solidFill>
-                            <a:srgbClr val="25342A"/>
-                          </a:solidFill>
-                          <a:latin typeface="Roboto"/>
-                        </a:rPr>
-                        <a:t>$43,283</a:t>
+                            <a:srgbClr val="25342A"/>
+                          </a:solidFill>
+                          <a:latin typeface="Roboto"/>
+                        </a:rPr>
+                        <a:t>6</a:t>
                       </a:r>
                     </a:p>
                   </a:txBody>
@@ -10821,7 +13032,7 @@
                           </a:solidFill>
                           <a:latin typeface="Roboto"/>
                         </a:rPr>
-                        <a:t>23 Nov</a:t>
+                        <a:t>Call-out 22, August</a:t>
                       </a:r>
                     </a:p>
                   </a:txBody>
@@ -10836,19 +13047,19 @@
                     <a:bodyPr/>
                     <a:lstStyle/>
                     <a:p>
-                      <a:pPr algn="r">
-                        <a:defRPr>
-                          <a:latin typeface="Roboto"/>
-                        </a:defRPr>
-                      </a:pPr>
-                      <a:r>
-                        <a:rPr sz="1050">
-                          <a:solidFill>
-                            <a:srgbClr val="25342A"/>
-                          </a:solidFill>
-                          <a:latin typeface="Roboto"/>
-                        </a:rPr>
-                        <a:t>$43,283</a:t>
+                      <a:pPr algn="l">
+                        <a:defRPr>
+                          <a:latin typeface="Roboto"/>
+                        </a:defRPr>
+                      </a:pPr>
+                      <a:r>
+                        <a:rPr sz="1050">
+                          <a:solidFill>
+                            <a:srgbClr val="25342A"/>
+                          </a:solidFill>
+                          <a:latin typeface="Roboto"/>
+                        </a:rPr>
+                        <a:t>25 Aug</a:t>
                       </a:r>
                     </a:p>
                   </a:txBody>
@@ -10875,7 +13086,7 @@
                           </a:solidFill>
                           <a:latin typeface="Roboto"/>
                         </a:rPr>
-                        <a:t>$0</a:t>
+                        <a:t>$516</a:t>
                       </a:r>
                     </a:p>
                   </a:txBody>
@@ -10902,7 +13113,7 @@
                           </a:solidFill>
                           <a:latin typeface="Roboto"/>
                         </a:rPr>
-                        <a:t>$32,115</a:t>
+                        <a:t>3</a:t>
                       </a:r>
                     </a:p>
                   </a:txBody>
@@ -10929,115 +13140,7 @@
                           </a:solidFill>
                           <a:latin typeface="Roboto"/>
                         </a:rPr>
-                        <a:t>$0</a:t>
-                      </a:r>
-                    </a:p>
-                  </a:txBody>
-                  <a:tcPr>
-                    <a:solidFill>
-                      <a:srgbClr val="F7FAF7"/>
-                    </a:solidFill>
-                  </a:tcPr>
-                </a:tc>
-                <a:tc>
-                  <a:txBody>
-                    <a:bodyPr/>
-                    <a:lstStyle/>
-                    <a:p>
-                      <a:pPr algn="r">
-                        <a:defRPr>
-                          <a:latin typeface="Roboto"/>
-                        </a:defRPr>
-                      </a:pPr>
-                      <a:r>
-                        <a:rPr sz="1050">
-                          <a:solidFill>
-                            <a:srgbClr val="25342A"/>
-                          </a:solidFill>
-                          <a:latin typeface="Roboto"/>
-                        </a:rPr>
-                        <a:t>$0</a:t>
-                      </a:r>
-                    </a:p>
-                  </a:txBody>
-                  <a:tcPr>
-                    <a:solidFill>
-                      <a:srgbClr val="F7FAF7"/>
-                    </a:solidFill>
-                  </a:tcPr>
-                </a:tc>
-                <a:tc>
-                  <a:txBody>
-                    <a:bodyPr/>
-                    <a:lstStyle/>
-                    <a:p>
-                      <a:pPr algn="r">
-                        <a:defRPr>
-                          <a:latin typeface="Roboto"/>
-                        </a:defRPr>
-                      </a:pPr>
-                      <a:r>
-                        <a:rPr sz="1050">
-                          <a:solidFill>
-                            <a:srgbClr val="25342A"/>
-                          </a:solidFill>
-                          <a:latin typeface="Roboto"/>
-                        </a:rPr>
-                        <a:t>$0</a:t>
-                      </a:r>
-                    </a:p>
-                  </a:txBody>
-                  <a:tcPr>
-                    <a:solidFill>
-                      <a:srgbClr val="F7FAF7"/>
-                    </a:solidFill>
-                  </a:tcPr>
-                </a:tc>
-                <a:tc>
-                  <a:txBody>
-                    <a:bodyPr/>
-                    <a:lstStyle/>
-                    <a:p>
-                      <a:pPr algn="r">
-                        <a:defRPr>
-                          <a:latin typeface="Roboto"/>
-                        </a:defRPr>
-                      </a:pPr>
-                      <a:r>
-                        <a:rPr sz="1050">
-                          <a:solidFill>
-                            <a:srgbClr val="25342A"/>
-                          </a:solidFill>
-                          <a:latin typeface="Roboto"/>
-                        </a:rPr>
-                        <a:t>$75,398</a:t>
-                      </a:r>
-                    </a:p>
-                  </a:txBody>
-                  <a:tcPr>
-                    <a:solidFill>
-                      <a:srgbClr val="F7FAF7"/>
-                    </a:solidFill>
-                  </a:tcPr>
-                </a:tc>
-                <a:tc>
-                  <a:txBody>
-                    <a:bodyPr/>
-                    <a:lstStyle/>
-                    <a:p>
-                      <a:pPr algn="r">
-                        <a:defRPr>
-                          <a:latin typeface="Roboto"/>
-                        </a:defRPr>
-                      </a:pPr>
-                      <a:r>
-                        <a:rPr sz="1050">
-                          <a:solidFill>
-                            <a:srgbClr val="25342A"/>
-                          </a:solidFill>
-                          <a:latin typeface="Roboto"/>
-                        </a:rPr>
-                        <a:t>$43,283</a:t>
+                        <a:t>6</a:t>
                       </a:r>
                     </a:p>
                   </a:txBody>
@@ -11066,7 +13169,7 @@
                           </a:solidFill>
                           <a:latin typeface="Roboto"/>
                         </a:rPr>
-                        <a:t>30 Nov</a:t>
+                        <a:t>Call-out 43, August</a:t>
                       </a:r>
                     </a:p>
                   </a:txBody>
@@ -11081,19 +13184,19 @@
                     <a:bodyPr/>
                     <a:lstStyle/>
                     <a:p>
-                      <a:pPr algn="r">
-                        <a:defRPr>
-                          <a:latin typeface="Roboto"/>
-                        </a:defRPr>
-                      </a:pPr>
-                      <a:r>
-                        <a:rPr sz="1050">
-                          <a:solidFill>
-                            <a:srgbClr val="25342A"/>
-                          </a:solidFill>
-                          <a:latin typeface="Roboto"/>
-                        </a:rPr>
-                        <a:t>$75,398</a:t>
+                      <a:pPr algn="l">
+                        <a:defRPr>
+                          <a:latin typeface="Roboto"/>
+                        </a:defRPr>
+                      </a:pPr>
+                      <a:r>
+                        <a:rPr sz="1050">
+                          <a:solidFill>
+                            <a:srgbClr val="25342A"/>
+                          </a:solidFill>
+                          <a:latin typeface="Roboto"/>
+                        </a:rPr>
+                        <a:t>8 Aug</a:t>
                       </a:r>
                     </a:p>
                   </a:txBody>
@@ -11120,7 +13223,7 @@
                           </a:solidFill>
                           <a:latin typeface="Roboto"/>
                         </a:rPr>
-                        <a:t>$0</a:t>
+                        <a:t>$430</a:t>
                       </a:r>
                     </a:p>
                   </a:txBody>
@@ -11147,7 +13250,7 @@
                           </a:solidFill>
                           <a:latin typeface="Roboto"/>
                         </a:rPr>
-                        <a:t>$32,115</a:t>
+                        <a:t>3</a:t>
                       </a:r>
                     </a:p>
                   </a:txBody>
@@ -11170,11 +13273,11 @@
                       <a:r>
                         <a:rPr sz="1050">
                           <a:solidFill>
-                            <a:srgbClr val="B42318"/>
-                          </a:solidFill>
-                          <a:latin typeface="Roboto"/>
-                        </a:rPr>
-                        <a:t>($37,700)</a:t>
+                            <a:srgbClr val="25342A"/>
+                          </a:solidFill>
+                          <a:latin typeface="Roboto"/>
+                        </a:rPr>
+                        <a:t>23</a:t>
                       </a:r>
                     </a:p>
                   </a:txBody>
@@ -11184,111 +13287,140 @@
                     </a:solidFill>
                   </a:tcPr>
                 </a:tc>
-                <a:tc>
-                  <a:txBody>
-                    <a:bodyPr/>
-                    <a:lstStyle/>
-                    <a:p>
-                      <a:pPr algn="r">
-                        <a:defRPr>
-                          <a:latin typeface="Roboto"/>
-                        </a:defRPr>
-                      </a:pPr>
-                      <a:r>
-                        <a:rPr sz="1050">
-                          <a:solidFill>
-                            <a:srgbClr val="B42318"/>
-                          </a:solidFill>
-                          <a:latin typeface="Roboto"/>
-                        </a:rPr>
-                        <a:t>($46,515)</a:t>
-                      </a:r>
-                    </a:p>
-                  </a:txBody>
-                  <a:tcPr>
-                    <a:solidFill>
-                      <a:srgbClr val="FFFFFF"/>
-                    </a:solidFill>
-                  </a:tcPr>
-                </a:tc>
-                <a:tc>
-                  <a:txBody>
-                    <a:bodyPr/>
-                    <a:lstStyle/>
-                    <a:p>
-                      <a:pPr algn="r">
-                        <a:defRPr>
-                          <a:latin typeface="Roboto"/>
-                        </a:defRPr>
-                      </a:pPr>
-                      <a:r>
-                        <a:rPr sz="1050">
-                          <a:solidFill>
-                            <a:srgbClr val="B42318"/>
-                          </a:solidFill>
-                          <a:latin typeface="Roboto"/>
-                        </a:rPr>
-                        <a:t>($6,100)</a:t>
-                      </a:r>
-                    </a:p>
-                  </a:txBody>
-                  <a:tcPr>
-                    <a:solidFill>
-                      <a:srgbClr val="FFFFFF"/>
-                    </a:solidFill>
-                  </a:tcPr>
-                </a:tc>
-                <a:tc>
-                  <a:txBody>
-                    <a:bodyPr/>
-                    <a:lstStyle/>
-                    <a:p>
-                      <a:pPr algn="r">
-                        <a:defRPr>
-                          <a:latin typeface="Roboto"/>
-                        </a:defRPr>
-                      </a:pPr>
-                      <a:r>
-                        <a:rPr sz="1050">
-                          <a:solidFill>
-                            <a:srgbClr val="25342A"/>
-                          </a:solidFill>
-                          <a:latin typeface="Roboto"/>
-                        </a:rPr>
-                        <a:t>$17,198</a:t>
-                      </a:r>
-                    </a:p>
-                  </a:txBody>
-                  <a:tcPr>
-                    <a:solidFill>
-                      <a:srgbClr val="FFFFFF"/>
-                    </a:solidFill>
-                  </a:tcPr>
-                </a:tc>
-                <a:tc>
-                  <a:txBody>
-                    <a:bodyPr/>
-                    <a:lstStyle/>
-                    <a:p>
-                      <a:pPr algn="r">
-                        <a:defRPr>
-                          <a:latin typeface="Roboto"/>
-                        </a:defRPr>
-                      </a:pPr>
-                      <a:r>
-                        <a:rPr sz="1050">
-                          <a:solidFill>
-                            <a:srgbClr val="25342A"/>
-                          </a:solidFill>
-                          <a:latin typeface="Roboto"/>
-                        </a:rPr>
-                        <a:t>$17,198</a:t>
-                      </a:r>
-                    </a:p>
-                  </a:txBody>
-                  <a:tcPr>
-                    <a:solidFill>
-                      <a:srgbClr val="FFFFFF"/>
+              </a:tr>
+              <a:tr h="310896">
+                <a:tc>
+                  <a:txBody>
+                    <a:bodyPr/>
+                    <a:lstStyle/>
+                    <a:p>
+                      <a:pPr algn="l">
+                        <a:defRPr>
+                          <a:latin typeface="Roboto"/>
+                        </a:defRPr>
+                      </a:pPr>
+                      <a:r>
+                        <a:rPr sz="1050">
+                          <a:solidFill>
+                            <a:srgbClr val="25342A"/>
+                          </a:solidFill>
+                          <a:latin typeface="Roboto"/>
+                        </a:rPr>
+                        <a:t>Call-out 10, August</a:t>
+                      </a:r>
+                    </a:p>
+                  </a:txBody>
+                  <a:tcPr>
+                    <a:solidFill>
+                      <a:srgbClr val="F7FAF7"/>
+                    </a:solidFill>
+                  </a:tcPr>
+                </a:tc>
+                <a:tc>
+                  <a:txBody>
+                    <a:bodyPr/>
+                    <a:lstStyle/>
+                    <a:p>
+                      <a:pPr algn="l">
+                        <a:defRPr>
+                          <a:latin typeface="Roboto"/>
+                        </a:defRPr>
+                      </a:pPr>
+                      <a:r>
+                        <a:rPr sz="1050">
+                          <a:solidFill>
+                            <a:srgbClr val="25342A"/>
+                          </a:solidFill>
+                          <a:latin typeface="Roboto"/>
+                        </a:rPr>
+                        <a:t>8 Aug</a:t>
+                      </a:r>
+                    </a:p>
+                  </a:txBody>
+                  <a:tcPr>
+                    <a:solidFill>
+                      <a:srgbClr val="F7FAF7"/>
+                    </a:solidFill>
+                  </a:tcPr>
+                </a:tc>
+                <a:tc>
+                  <a:txBody>
+                    <a:bodyPr/>
+                    <a:lstStyle/>
+                    <a:p>
+                      <a:pPr algn="r">
+                        <a:defRPr>
+                          <a:latin typeface="Roboto"/>
+                        </a:defRPr>
+                      </a:pPr>
+                      <a:r>
+                        <a:rPr sz="1050">
+                          <a:solidFill>
+                            <a:srgbClr val="25342A"/>
+                          </a:solidFill>
+                          <a:latin typeface="Roboto"/>
+                        </a:rPr>
+                        <a:t>$416</a:t>
+                      </a:r>
+                    </a:p>
+                  </a:txBody>
+                  <a:tcPr>
+                    <a:solidFill>
+                      <a:srgbClr val="F7FAF7"/>
+                    </a:solidFill>
+                  </a:tcPr>
+                </a:tc>
+                <a:tc>
+                  <a:txBody>
+                    <a:bodyPr/>
+                    <a:lstStyle/>
+                    <a:p>
+                      <a:pPr algn="r">
+                        <a:defRPr>
+                          <a:latin typeface="Roboto"/>
+                        </a:defRPr>
+                      </a:pPr>
+                      <a:r>
+                        <a:rPr sz="1050">
+                          <a:solidFill>
+                            <a:srgbClr val="25342A"/>
+                          </a:solidFill>
+                          <a:latin typeface="Roboto"/>
+                        </a:rPr>
+                        <a:t>3</a:t>
+                      </a:r>
+                    </a:p>
+                  </a:txBody>
+                  <a:tcPr>
+                    <a:solidFill>
+                      <a:srgbClr val="F7FAF7"/>
+                    </a:solidFill>
+                  </a:tcPr>
+                </a:tc>
+                <a:tc>
+                  <a:txBody>
+                    <a:bodyPr/>
+                    <a:lstStyle/>
+                    <a:p>
+                      <a:pPr algn="r">
+                        <a:defRPr>
+                          <a:latin typeface="Roboto"/>
+                        </a:defRPr>
+                      </a:pPr>
+                      <a:r>
+                        <a:rPr sz="1050">
+                          <a:solidFill>
+                            <a:srgbClr val="25342A"/>
+                          </a:solidFill>
+                          <a:latin typeface="Roboto"/>
+                        </a:rPr>
+                        <a:t>23</a:t>
+                      </a:r>
+                    </a:p>
+                  </a:txBody>
+                  <a:tcPr>
+                    <a:solidFill>
+                      <a:srgbClr val="F7FAF7"/>
                     </a:solidFill>
                   </a:tcPr>
                 </a:tc>
@@ -11299,7 +13431,7 @@
       </p:graphicFrame>
       <p:sp>
         <p:nvSpPr>
-          <p:cNvPr id="7" name="TextBox 6"/>
+          <p:cNvPr id="6" name="TextBox 5"/>
           <p:cNvSpPr txBox="1"/>
           <p:nvPr/>
         </p:nvSpPr>
@@ -11338,7 +13470,7 @@
       </p:sp>
       <p:sp>
         <p:nvSpPr>
-          <p:cNvPr id="8" name="TextBox 7"/>
+          <p:cNvPr id="7" name="TextBox 6"/>
           <p:cNvSpPr txBox="1"/>
           <p:nvPr/>
         </p:nvSpPr>
@@ -11370,14 +13502,14 @@
                 </a:solidFill>
                 <a:latin typeface="Roboto"/>
               </a:rPr>
-              <a:t>Data retrieved 2pm, Tue 6 Oct 2026 · Generated 8 Oct 2026, 9:35am · Sample data · Made with Python (python-pptx)</a:t>
+              <a:t>Data retrieved 2pm, Tue 6 Oct 2026 · Generated 9 Oct 2026, 8:41am · Sample data · Made with Python (python-pptx)</a:t>
             </a:r>
           </a:p>
         </p:txBody>
       </p:sp>
       <p:sp>
         <p:nvSpPr>
-          <p:cNvPr id="9" name="TextBox 8"/>
+          <p:cNvPr id="8" name="TextBox 7"/>
           <p:cNvSpPr txBox="1"/>
           <p:nvPr/>
         </p:nvSpPr>
@@ -11445,7 +13577,7 @@
         <p:spPr>
           <a:xfrm>
             <a:off x="457200" y="384048"/>
-            <a:ext cx="11277295" cy="475488"/>
+            <a:ext cx="11277295" cy="719328"/>
           </a:xfrm>
         </p:spPr>
         <p:txBody>
@@ -11458,13 +13590,13 @@
               </a:defRPr>
             </a:pPr>
             <a:r>
-              <a:rPr sz="2400" b="1">
+              <a:rPr sz="2000" b="1">
                 <a:solidFill>
                   <a:srgbClr val="25342A"/>
                 </a:solidFill>
                 <a:latin typeface="Roboto"/>
               </a:rPr>
-              <a:t>Invoices past the customer's usual payment date ($20,219)</a:t>
+              <a:t>Invoices past the customer's usual payment date ($24,676): the forecast assumes these arrive within a week (2 of 2)</a:t>
             </a:r>
           </a:p>
         </p:txBody>
@@ -11564,8 +13696,8 @@
           <p:nvPr/>
         </p:nvGraphicFramePr>
         <p:xfrm>
-          <a:off x="457200" y="960120"/>
-          <a:ext cx="11277295" cy="3419856"/>
+          <a:off x="457200" y="1203960"/>
+          <a:ext cx="11277295" cy="621792"/>
         </p:xfrm>
         <a:graphic>
           <a:graphicData uri="http://schemas.openxmlformats.org/drawingml/2006/table">
@@ -11652,7 +13784,7 @@
                           </a:solidFill>
                           <a:latin typeface="Roboto"/>
                         </a:rPr>
-                        <a:t>Amount</a:t>
+                        <a:t>Amount (incl. GST)</a:t>
                       </a:r>
                     </a:p>
                   </a:txBody>
@@ -11735,7 +13867,7 @@
                           </a:solidFill>
                           <a:latin typeface="Roboto"/>
                         </a:rPr>
-                        <a:t>Chermside retail centre</a:t>
+                        <a:t>Call-out 44, August</a:t>
                       </a:r>
                     </a:p>
                   </a:txBody>
@@ -11762,7 +13894,7 @@
                           </a:solidFill>
                           <a:latin typeface="Roboto"/>
                         </a:rPr>
-                        <a:t>1 Aug</a:t>
+                        <a:t>4 Aug</a:t>
                       </a:r>
                     </a:p>
                   </a:txBody>
@@ -11789,7 +13921,7 @@
                           </a:solidFill>
                           <a:latin typeface="Roboto"/>
                         </a:rPr>
-                        <a:t>$4,100</a:t>
+                        <a:t>$398</a:t>
                       </a:r>
                     </a:p>
                   </a:txBody>
@@ -11816,7 +13948,7 @@
                           </a:solidFill>
                           <a:latin typeface="Roboto"/>
                         </a:rPr>
-                        <a:t>30</a:t>
+                        <a:t>3</a:t>
                       </a:r>
                     </a:p>
                   </a:txBody>
@@ -11843,1246 +13975,13 @@
                           </a:solidFill>
                           <a:latin typeface="Roboto"/>
                         </a:rPr>
-                        <a:t>30</a:t>
+                        <a:t>27</a:t>
                       </a:r>
                     </a:p>
                   </a:txBody>
                   <a:tcPr>
                     <a:solidFill>
                       <a:srgbClr val="FFFFFF"/>
-                    </a:solidFill>
-                  </a:tcPr>
-                </a:tc>
-              </a:tr>
-              <a:tr h="310896">
-                <a:tc>
-                  <a:txBody>
-                    <a:bodyPr/>
-                    <a:lstStyle/>
-                    <a:p>
-                      <a:pPr algn="l">
-                        <a:defRPr>
-                          <a:latin typeface="Roboto"/>
-                        </a:defRPr>
-                      </a:pPr>
-                      <a:r>
-                        <a:rPr sz="1050">
-                          <a:solidFill>
-                            <a:srgbClr val="25342A"/>
-                          </a:solidFill>
-                          <a:latin typeface="Roboto"/>
-                        </a:rPr>
-                        <a:t>Rocklea factory</a:t>
-                      </a:r>
-                    </a:p>
-                  </a:txBody>
-                  <a:tcPr>
-                    <a:solidFill>
-                      <a:srgbClr val="F7FAF7"/>
-                    </a:solidFill>
-                  </a:tcPr>
-                </a:tc>
-                <a:tc>
-                  <a:txBody>
-                    <a:bodyPr/>
-                    <a:lstStyle/>
-                    <a:p>
-                      <a:pPr algn="l">
-                        <a:defRPr>
-                          <a:latin typeface="Roboto"/>
-                        </a:defRPr>
-                      </a:pPr>
-                      <a:r>
-                        <a:rPr sz="1050">
-                          <a:solidFill>
-                            <a:srgbClr val="25342A"/>
-                          </a:solidFill>
-                          <a:latin typeface="Roboto"/>
-                        </a:rPr>
-                        <a:t>1 Aug</a:t>
-                      </a:r>
-                    </a:p>
-                  </a:txBody>
-                  <a:tcPr>
-                    <a:solidFill>
-                      <a:srgbClr val="F7FAF7"/>
-                    </a:solidFill>
-                  </a:tcPr>
-                </a:tc>
-                <a:tc>
-                  <a:txBody>
-                    <a:bodyPr/>
-                    <a:lstStyle/>
-                    <a:p>
-                      <a:pPr algn="r">
-                        <a:defRPr>
-                          <a:latin typeface="Roboto"/>
-                        </a:defRPr>
-                      </a:pPr>
-                      <a:r>
-                        <a:rPr sz="1050">
-                          <a:solidFill>
-                            <a:srgbClr val="25342A"/>
-                          </a:solidFill>
-                          <a:latin typeface="Roboto"/>
-                        </a:rPr>
-                        <a:t>$3,900</a:t>
-                      </a:r>
-                    </a:p>
-                  </a:txBody>
-                  <a:tcPr>
-                    <a:solidFill>
-                      <a:srgbClr val="F7FAF7"/>
-                    </a:solidFill>
-                  </a:tcPr>
-                </a:tc>
-                <a:tc>
-                  <a:txBody>
-                    <a:bodyPr/>
-                    <a:lstStyle/>
-                    <a:p>
-                      <a:pPr algn="r">
-                        <a:defRPr>
-                          <a:latin typeface="Roboto"/>
-                        </a:defRPr>
-                      </a:pPr>
-                      <a:r>
-                        <a:rPr sz="1050">
-                          <a:solidFill>
-                            <a:srgbClr val="25342A"/>
-                          </a:solidFill>
-                          <a:latin typeface="Roboto"/>
-                        </a:rPr>
-                        <a:t>30</a:t>
-                      </a:r>
-                    </a:p>
-                  </a:txBody>
-                  <a:tcPr>
-                    <a:solidFill>
-                      <a:srgbClr val="F7FAF7"/>
-                    </a:solidFill>
-                  </a:tcPr>
-                </a:tc>
-                <a:tc>
-                  <a:txBody>
-                    <a:bodyPr/>
-                    <a:lstStyle/>
-                    <a:p>
-                      <a:pPr algn="r">
-                        <a:defRPr>
-                          <a:latin typeface="Roboto"/>
-                        </a:defRPr>
-                      </a:pPr>
-                      <a:r>
-                        <a:rPr sz="1050">
-                          <a:solidFill>
-                            <a:srgbClr val="25342A"/>
-                          </a:solidFill>
-                          <a:latin typeface="Roboto"/>
-                        </a:rPr>
-                        <a:t>30</a:t>
-                      </a:r>
-                    </a:p>
-                  </a:txBody>
-                  <a:tcPr>
-                    <a:solidFill>
-                      <a:srgbClr val="F7FAF7"/>
-                    </a:solidFill>
-                  </a:tcPr>
-                </a:tc>
-              </a:tr>
-              <a:tr h="310896">
-                <a:tc>
-                  <a:txBody>
-                    <a:bodyPr/>
-                    <a:lstStyle/>
-                    <a:p>
-                      <a:pPr algn="l">
-                        <a:defRPr>
-                          <a:latin typeface="Roboto"/>
-                        </a:defRPr>
-                      </a:pPr>
-                      <a:r>
-                        <a:rPr sz="1050">
-                          <a:solidFill>
-                            <a:srgbClr val="25342A"/>
-                          </a:solidFill>
-                          <a:latin typeface="Roboto"/>
-                        </a:rPr>
-                        <a:t>Riverside Apartments (strata)</a:t>
-                      </a:r>
-                    </a:p>
-                  </a:txBody>
-                  <a:tcPr>
-                    <a:solidFill>
-                      <a:srgbClr val="FFFFFF"/>
-                    </a:solidFill>
-                  </a:tcPr>
-                </a:tc>
-                <a:tc>
-                  <a:txBody>
-                    <a:bodyPr/>
-                    <a:lstStyle/>
-                    <a:p>
-                      <a:pPr algn="l">
-                        <a:defRPr>
-                          <a:latin typeface="Roboto"/>
-                        </a:defRPr>
-                      </a:pPr>
-                      <a:r>
-                        <a:rPr sz="1050">
-                          <a:solidFill>
-                            <a:srgbClr val="25342A"/>
-                          </a:solidFill>
-                          <a:latin typeface="Roboto"/>
-                        </a:rPr>
-                        <a:t>1 Aug</a:t>
-                      </a:r>
-                    </a:p>
-                  </a:txBody>
-                  <a:tcPr>
-                    <a:solidFill>
-                      <a:srgbClr val="FFFFFF"/>
-                    </a:solidFill>
-                  </a:tcPr>
-                </a:tc>
-                <a:tc>
-                  <a:txBody>
-                    <a:bodyPr/>
-                    <a:lstStyle/>
-                    <a:p>
-                      <a:pPr algn="r">
-                        <a:defRPr>
-                          <a:latin typeface="Roboto"/>
-                        </a:defRPr>
-                      </a:pPr>
-                      <a:r>
-                        <a:rPr sz="1050">
-                          <a:solidFill>
-                            <a:srgbClr val="25342A"/>
-                          </a:solidFill>
-                          <a:latin typeface="Roboto"/>
-                        </a:rPr>
-                        <a:t>$3,200</a:t>
-                      </a:r>
-                    </a:p>
-                  </a:txBody>
-                  <a:tcPr>
-                    <a:solidFill>
-                      <a:srgbClr val="FFFFFF"/>
-                    </a:solidFill>
-                  </a:tcPr>
-                </a:tc>
-                <a:tc>
-                  <a:txBody>
-                    <a:bodyPr/>
-                    <a:lstStyle/>
-                    <a:p>
-                      <a:pPr algn="r">
-                        <a:defRPr>
-                          <a:latin typeface="Roboto"/>
-                        </a:defRPr>
-                      </a:pPr>
-                      <a:r>
-                        <a:rPr sz="1050">
-                          <a:solidFill>
-                            <a:srgbClr val="25342A"/>
-                          </a:solidFill>
-                          <a:latin typeface="Roboto"/>
-                        </a:rPr>
-                        <a:t>30</a:t>
-                      </a:r>
-                    </a:p>
-                  </a:txBody>
-                  <a:tcPr>
-                    <a:solidFill>
-                      <a:srgbClr val="FFFFFF"/>
-                    </a:solidFill>
-                  </a:tcPr>
-                </a:tc>
-                <a:tc>
-                  <a:txBody>
-                    <a:bodyPr/>
-                    <a:lstStyle/>
-                    <a:p>
-                      <a:pPr algn="r">
-                        <a:defRPr>
-                          <a:latin typeface="Roboto"/>
-                        </a:defRPr>
-                      </a:pPr>
-                      <a:r>
-                        <a:rPr sz="1050">
-                          <a:solidFill>
-                            <a:srgbClr val="25342A"/>
-                          </a:solidFill>
-                          <a:latin typeface="Roboto"/>
-                        </a:rPr>
-                        <a:t>30</a:t>
-                      </a:r>
-                    </a:p>
-                  </a:txBody>
-                  <a:tcPr>
-                    <a:solidFill>
-                      <a:srgbClr val="FFFFFF"/>
-                    </a:solidFill>
-                  </a:tcPr>
-                </a:tc>
-              </a:tr>
-              <a:tr h="310896">
-                <a:tc>
-                  <a:txBody>
-                    <a:bodyPr/>
-                    <a:lstStyle/>
-                    <a:p>
-                      <a:pPr algn="l">
-                        <a:defRPr>
-                          <a:latin typeface="Roboto"/>
-                        </a:defRPr>
-                      </a:pPr>
-                      <a:r>
-                        <a:rPr sz="1050">
-                          <a:solidFill>
-                            <a:srgbClr val="25342A"/>
-                          </a:solidFill>
-                          <a:latin typeface="Roboto"/>
-                        </a:rPr>
-                        <a:t>Wacol logistics depot</a:t>
-                      </a:r>
-                    </a:p>
-                  </a:txBody>
-                  <a:tcPr>
-                    <a:solidFill>
-                      <a:srgbClr val="F7FAF7"/>
-                    </a:solidFill>
-                  </a:tcPr>
-                </a:tc>
-                <a:tc>
-                  <a:txBody>
-                    <a:bodyPr/>
-                    <a:lstStyle/>
-                    <a:p>
-                      <a:pPr algn="l">
-                        <a:defRPr>
-                          <a:latin typeface="Roboto"/>
-                        </a:defRPr>
-                      </a:pPr>
-                      <a:r>
-                        <a:rPr sz="1050">
-                          <a:solidFill>
-                            <a:srgbClr val="25342A"/>
-                          </a:solidFill>
-                          <a:latin typeface="Roboto"/>
-                        </a:rPr>
-                        <a:t>1 Aug</a:t>
-                      </a:r>
-                    </a:p>
-                  </a:txBody>
-                  <a:tcPr>
-                    <a:solidFill>
-                      <a:srgbClr val="F7FAF7"/>
-                    </a:solidFill>
-                  </a:tcPr>
-                </a:tc>
-                <a:tc>
-                  <a:txBody>
-                    <a:bodyPr/>
-                    <a:lstStyle/>
-                    <a:p>
-                      <a:pPr algn="r">
-                        <a:defRPr>
-                          <a:latin typeface="Roboto"/>
-                        </a:defRPr>
-                      </a:pPr>
-                      <a:r>
-                        <a:rPr sz="1050">
-                          <a:solidFill>
-                            <a:srgbClr val="25342A"/>
-                          </a:solidFill>
-                          <a:latin typeface="Roboto"/>
-                        </a:rPr>
-                        <a:t>$3,000</a:t>
-                      </a:r>
-                    </a:p>
-                  </a:txBody>
-                  <a:tcPr>
-                    <a:solidFill>
-                      <a:srgbClr val="F7FAF7"/>
-                    </a:solidFill>
-                  </a:tcPr>
-                </a:tc>
-                <a:tc>
-                  <a:txBody>
-                    <a:bodyPr/>
-                    <a:lstStyle/>
-                    <a:p>
-                      <a:pPr algn="r">
-                        <a:defRPr>
-                          <a:latin typeface="Roboto"/>
-                        </a:defRPr>
-                      </a:pPr>
-                      <a:r>
-                        <a:rPr sz="1050">
-                          <a:solidFill>
-                            <a:srgbClr val="25342A"/>
-                          </a:solidFill>
-                          <a:latin typeface="Roboto"/>
-                        </a:rPr>
-                        <a:t>30</a:t>
-                      </a:r>
-                    </a:p>
-                  </a:txBody>
-                  <a:tcPr>
-                    <a:solidFill>
-                      <a:srgbClr val="F7FAF7"/>
-                    </a:solidFill>
-                  </a:tcPr>
-                </a:tc>
-                <a:tc>
-                  <a:txBody>
-                    <a:bodyPr/>
-                    <a:lstStyle/>
-                    <a:p>
-                      <a:pPr algn="r">
-                        <a:defRPr>
-                          <a:latin typeface="Roboto"/>
-                        </a:defRPr>
-                      </a:pPr>
-                      <a:r>
-                        <a:rPr sz="1050">
-                          <a:solidFill>
-                            <a:srgbClr val="25342A"/>
-                          </a:solidFill>
-                          <a:latin typeface="Roboto"/>
-                        </a:rPr>
-                        <a:t>30</a:t>
-                      </a:r>
-                    </a:p>
-                  </a:txBody>
-                  <a:tcPr>
-                    <a:solidFill>
-                      <a:srgbClr val="F7FAF7"/>
-                    </a:solidFill>
-                  </a:tcPr>
-                </a:tc>
-              </a:tr>
-              <a:tr h="310896">
-                <a:tc>
-                  <a:txBody>
-                    <a:bodyPr/>
-                    <a:lstStyle/>
-                    <a:p>
-                      <a:pPr algn="l">
-                        <a:defRPr>
-                          <a:latin typeface="Roboto"/>
-                        </a:defRPr>
-                      </a:pPr>
-                      <a:r>
-                        <a:rPr sz="1050">
-                          <a:solidFill>
-                            <a:srgbClr val="25342A"/>
-                          </a:solidFill>
-                          <a:latin typeface="Roboto"/>
-                        </a:rPr>
-                        <a:t>Call-out 1, August</a:t>
-                      </a:r>
-                    </a:p>
-                  </a:txBody>
-                  <a:tcPr>
-                    <a:solidFill>
-                      <a:srgbClr val="FFFFFF"/>
-                    </a:solidFill>
-                  </a:tcPr>
-                </a:tc>
-                <a:tc>
-                  <a:txBody>
-                    <a:bodyPr/>
-                    <a:lstStyle/>
-                    <a:p>
-                      <a:pPr algn="l">
-                        <a:defRPr>
-                          <a:latin typeface="Roboto"/>
-                        </a:defRPr>
-                      </a:pPr>
-                      <a:r>
-                        <a:rPr sz="1050">
-                          <a:solidFill>
-                            <a:srgbClr val="25342A"/>
-                          </a:solidFill>
-                          <a:latin typeface="Roboto"/>
-                        </a:rPr>
-                        <a:t>24 Aug</a:t>
-                      </a:r>
-                    </a:p>
-                  </a:txBody>
-                  <a:tcPr>
-                    <a:solidFill>
-                      <a:srgbClr val="FFFFFF"/>
-                    </a:solidFill>
-                  </a:tcPr>
-                </a:tc>
-                <a:tc>
-                  <a:txBody>
-                    <a:bodyPr/>
-                    <a:lstStyle/>
-                    <a:p>
-                      <a:pPr algn="r">
-                        <a:defRPr>
-                          <a:latin typeface="Roboto"/>
-                        </a:defRPr>
-                      </a:pPr>
-                      <a:r>
-                        <a:rPr sz="1050">
-                          <a:solidFill>
-                            <a:srgbClr val="25342A"/>
-                          </a:solidFill>
-                          <a:latin typeface="Roboto"/>
-                        </a:rPr>
-                        <a:t>$853</a:t>
-                      </a:r>
-                    </a:p>
-                  </a:txBody>
-                  <a:tcPr>
-                    <a:solidFill>
-                      <a:srgbClr val="FFFFFF"/>
-                    </a:solidFill>
-                  </a:tcPr>
-                </a:tc>
-                <a:tc>
-                  <a:txBody>
-                    <a:bodyPr/>
-                    <a:lstStyle/>
-                    <a:p>
-                      <a:pPr algn="r">
-                        <a:defRPr>
-                          <a:latin typeface="Roboto"/>
-                        </a:defRPr>
-                      </a:pPr>
-                      <a:r>
-                        <a:rPr sz="1050">
-                          <a:solidFill>
-                            <a:srgbClr val="25342A"/>
-                          </a:solidFill>
-                          <a:latin typeface="Roboto"/>
-                        </a:rPr>
-                        <a:t>2</a:t>
-                      </a:r>
-                    </a:p>
-                  </a:txBody>
-                  <a:tcPr>
-                    <a:solidFill>
-                      <a:srgbClr val="FFFFFF"/>
-                    </a:solidFill>
-                  </a:tcPr>
-                </a:tc>
-                <a:tc>
-                  <a:txBody>
-                    <a:bodyPr/>
-                    <a:lstStyle/>
-                    <a:p>
-                      <a:pPr algn="r">
-                        <a:defRPr>
-                          <a:latin typeface="Roboto"/>
-                        </a:defRPr>
-                      </a:pPr>
-                      <a:r>
-                        <a:rPr sz="1050">
-                          <a:solidFill>
-                            <a:srgbClr val="25342A"/>
-                          </a:solidFill>
-                          <a:latin typeface="Roboto"/>
-                        </a:rPr>
-                        <a:t>7</a:t>
-                      </a:r>
-                    </a:p>
-                  </a:txBody>
-                  <a:tcPr>
-                    <a:solidFill>
-                      <a:srgbClr val="FFFFFF"/>
-                    </a:solidFill>
-                  </a:tcPr>
-                </a:tc>
-              </a:tr>
-              <a:tr h="310896">
-                <a:tc>
-                  <a:txBody>
-                    <a:bodyPr/>
-                    <a:lstStyle/>
-                    <a:p>
-                      <a:pPr algn="l">
-                        <a:defRPr>
-                          <a:latin typeface="Roboto"/>
-                        </a:defRPr>
-                      </a:pPr>
-                      <a:r>
-                        <a:rPr sz="1050">
-                          <a:solidFill>
-                            <a:srgbClr val="25342A"/>
-                          </a:solidFill>
-                          <a:latin typeface="Roboto"/>
-                        </a:rPr>
-                        <a:t>Call-out 16, August</a:t>
-                      </a:r>
-                    </a:p>
-                  </a:txBody>
-                  <a:tcPr>
-                    <a:solidFill>
-                      <a:srgbClr val="F7FAF7"/>
-                    </a:solidFill>
-                  </a:tcPr>
-                </a:tc>
-                <a:tc>
-                  <a:txBody>
-                    <a:bodyPr/>
-                    <a:lstStyle/>
-                    <a:p>
-                      <a:pPr algn="l">
-                        <a:defRPr>
-                          <a:latin typeface="Roboto"/>
-                        </a:defRPr>
-                      </a:pPr>
-                      <a:r>
-                        <a:rPr sz="1050">
-                          <a:solidFill>
-                            <a:srgbClr val="25342A"/>
-                          </a:solidFill>
-                          <a:latin typeface="Roboto"/>
-                        </a:rPr>
-                        <a:t>22 Aug</a:t>
-                      </a:r>
-                    </a:p>
-                  </a:txBody>
-                  <a:tcPr>
-                    <a:solidFill>
-                      <a:srgbClr val="F7FAF7"/>
-                    </a:solidFill>
-                  </a:tcPr>
-                </a:tc>
-                <a:tc>
-                  <a:txBody>
-                    <a:bodyPr/>
-                    <a:lstStyle/>
-                    <a:p>
-                      <a:pPr algn="r">
-                        <a:defRPr>
-                          <a:latin typeface="Roboto"/>
-                        </a:defRPr>
-                      </a:pPr>
-                      <a:r>
-                        <a:rPr sz="1050">
-                          <a:solidFill>
-                            <a:srgbClr val="25342A"/>
-                          </a:solidFill>
-                          <a:latin typeface="Roboto"/>
-                        </a:rPr>
-                        <a:t>$840</a:t>
-                      </a:r>
-                    </a:p>
-                  </a:txBody>
-                  <a:tcPr>
-                    <a:solidFill>
-                      <a:srgbClr val="F7FAF7"/>
-                    </a:solidFill>
-                  </a:tcPr>
-                </a:tc>
-                <a:tc>
-                  <a:txBody>
-                    <a:bodyPr/>
-                    <a:lstStyle/>
-                    <a:p>
-                      <a:pPr algn="r">
-                        <a:defRPr>
-                          <a:latin typeface="Roboto"/>
-                        </a:defRPr>
-                      </a:pPr>
-                      <a:r>
-                        <a:rPr sz="1050">
-                          <a:solidFill>
-                            <a:srgbClr val="25342A"/>
-                          </a:solidFill>
-                          <a:latin typeface="Roboto"/>
-                        </a:rPr>
-                        <a:t>2</a:t>
-                      </a:r>
-                    </a:p>
-                  </a:txBody>
-                  <a:tcPr>
-                    <a:solidFill>
-                      <a:srgbClr val="F7FAF7"/>
-                    </a:solidFill>
-                  </a:tcPr>
-                </a:tc>
-                <a:tc>
-                  <a:txBody>
-                    <a:bodyPr/>
-                    <a:lstStyle/>
-                    <a:p>
-                      <a:pPr algn="r">
-                        <a:defRPr>
-                          <a:latin typeface="Roboto"/>
-                        </a:defRPr>
-                      </a:pPr>
-                      <a:r>
-                        <a:rPr sz="1050">
-                          <a:solidFill>
-                            <a:srgbClr val="25342A"/>
-                          </a:solidFill>
-                          <a:latin typeface="Roboto"/>
-                        </a:rPr>
-                        <a:t>9</a:t>
-                      </a:r>
-                    </a:p>
-                  </a:txBody>
-                  <a:tcPr>
-                    <a:solidFill>
-                      <a:srgbClr val="F7FAF7"/>
-                    </a:solidFill>
-                  </a:tcPr>
-                </a:tc>
-              </a:tr>
-              <a:tr h="310896">
-                <a:tc>
-                  <a:txBody>
-                    <a:bodyPr/>
-                    <a:lstStyle/>
-                    <a:p>
-                      <a:pPr algn="l">
-                        <a:defRPr>
-                          <a:latin typeface="Roboto"/>
-                        </a:defRPr>
-                      </a:pPr>
-                      <a:r>
-                        <a:rPr sz="1050">
-                          <a:solidFill>
-                            <a:srgbClr val="25342A"/>
-                          </a:solidFill>
-                          <a:latin typeface="Roboto"/>
-                        </a:rPr>
-                        <a:t>Call-out 14, August</a:t>
-                      </a:r>
-                    </a:p>
-                  </a:txBody>
-                  <a:tcPr>
-                    <a:solidFill>
-                      <a:srgbClr val="FFFFFF"/>
-                    </a:solidFill>
-                  </a:tcPr>
-                </a:tc>
-                <a:tc>
-                  <a:txBody>
-                    <a:bodyPr/>
-                    <a:lstStyle/>
-                    <a:p>
-                      <a:pPr algn="l">
-                        <a:defRPr>
-                          <a:latin typeface="Roboto"/>
-                        </a:defRPr>
-                      </a:pPr>
-                      <a:r>
-                        <a:rPr sz="1050">
-                          <a:solidFill>
-                            <a:srgbClr val="25342A"/>
-                          </a:solidFill>
-                          <a:latin typeface="Roboto"/>
-                        </a:rPr>
-                        <a:t>5 Aug</a:t>
-                      </a:r>
-                    </a:p>
-                  </a:txBody>
-                  <a:tcPr>
-                    <a:solidFill>
-                      <a:srgbClr val="FFFFFF"/>
-                    </a:solidFill>
-                  </a:tcPr>
-                </a:tc>
-                <a:tc>
-                  <a:txBody>
-                    <a:bodyPr/>
-                    <a:lstStyle/>
-                    <a:p>
-                      <a:pPr algn="r">
-                        <a:defRPr>
-                          <a:latin typeface="Roboto"/>
-                        </a:defRPr>
-                      </a:pPr>
-                      <a:r>
-                        <a:rPr sz="1050">
-                          <a:solidFill>
-                            <a:srgbClr val="25342A"/>
-                          </a:solidFill>
-                          <a:latin typeface="Roboto"/>
-                        </a:rPr>
-                        <a:t>$695</a:t>
-                      </a:r>
-                    </a:p>
-                  </a:txBody>
-                  <a:tcPr>
-                    <a:solidFill>
-                      <a:srgbClr val="FFFFFF"/>
-                    </a:solidFill>
-                  </a:tcPr>
-                </a:tc>
-                <a:tc>
-                  <a:txBody>
-                    <a:bodyPr/>
-                    <a:lstStyle/>
-                    <a:p>
-                      <a:pPr algn="r">
-                        <a:defRPr>
-                          <a:latin typeface="Roboto"/>
-                        </a:defRPr>
-                      </a:pPr>
-                      <a:r>
-                        <a:rPr sz="1050">
-                          <a:solidFill>
-                            <a:srgbClr val="25342A"/>
-                          </a:solidFill>
-                          <a:latin typeface="Roboto"/>
-                        </a:rPr>
-                        <a:t>2</a:t>
-                      </a:r>
-                    </a:p>
-                  </a:txBody>
-                  <a:tcPr>
-                    <a:solidFill>
-                      <a:srgbClr val="FFFFFF"/>
-                    </a:solidFill>
-                  </a:tcPr>
-                </a:tc>
-                <a:tc>
-                  <a:txBody>
-                    <a:bodyPr/>
-                    <a:lstStyle/>
-                    <a:p>
-                      <a:pPr algn="r">
-                        <a:defRPr>
-                          <a:latin typeface="Roboto"/>
-                        </a:defRPr>
-                      </a:pPr>
-                      <a:r>
-                        <a:rPr sz="1050">
-                          <a:solidFill>
-                            <a:srgbClr val="25342A"/>
-                          </a:solidFill>
-                          <a:latin typeface="Roboto"/>
-                        </a:rPr>
-                        <a:t>26</a:t>
-                      </a:r>
-                    </a:p>
-                  </a:txBody>
-                  <a:tcPr>
-                    <a:solidFill>
-                      <a:srgbClr val="FFFFFF"/>
-                    </a:solidFill>
-                  </a:tcPr>
-                </a:tc>
-              </a:tr>
-              <a:tr h="310896">
-                <a:tc>
-                  <a:txBody>
-                    <a:bodyPr/>
-                    <a:lstStyle/>
-                    <a:p>
-                      <a:pPr algn="l">
-                        <a:defRPr>
-                          <a:latin typeface="Roboto"/>
-                        </a:defRPr>
-                      </a:pPr>
-                      <a:r>
-                        <a:rPr sz="1050">
-                          <a:solidFill>
-                            <a:srgbClr val="25342A"/>
-                          </a:solidFill>
-                          <a:latin typeface="Roboto"/>
-                        </a:rPr>
-                        <a:t>Call-out 38, August</a:t>
-                      </a:r>
-                    </a:p>
-                  </a:txBody>
-                  <a:tcPr>
-                    <a:solidFill>
-                      <a:srgbClr val="F7FAF7"/>
-                    </a:solidFill>
-                  </a:tcPr>
-                </a:tc>
-                <a:tc>
-                  <a:txBody>
-                    <a:bodyPr/>
-                    <a:lstStyle/>
-                    <a:p>
-                      <a:pPr algn="l">
-                        <a:defRPr>
-                          <a:latin typeface="Roboto"/>
-                        </a:defRPr>
-                      </a:pPr>
-                      <a:r>
-                        <a:rPr sz="1050">
-                          <a:solidFill>
-                            <a:srgbClr val="25342A"/>
-                          </a:solidFill>
-                          <a:latin typeface="Roboto"/>
-                        </a:rPr>
-                        <a:t>25 Aug</a:t>
-                      </a:r>
-                    </a:p>
-                  </a:txBody>
-                  <a:tcPr>
-                    <a:solidFill>
-                      <a:srgbClr val="F7FAF7"/>
-                    </a:solidFill>
-                  </a:tcPr>
-                </a:tc>
-                <a:tc>
-                  <a:txBody>
-                    <a:bodyPr/>
-                    <a:lstStyle/>
-                    <a:p>
-                      <a:pPr algn="r">
-                        <a:defRPr>
-                          <a:latin typeface="Roboto"/>
-                        </a:defRPr>
-                      </a:pPr>
-                      <a:r>
-                        <a:rPr sz="1050">
-                          <a:solidFill>
-                            <a:srgbClr val="25342A"/>
-                          </a:solidFill>
-                          <a:latin typeface="Roboto"/>
-                        </a:rPr>
-                        <a:t>$656</a:t>
-                      </a:r>
-                    </a:p>
-                  </a:txBody>
-                  <a:tcPr>
-                    <a:solidFill>
-                      <a:srgbClr val="F7FAF7"/>
-                    </a:solidFill>
-                  </a:tcPr>
-                </a:tc>
-                <a:tc>
-                  <a:txBody>
-                    <a:bodyPr/>
-                    <a:lstStyle/>
-                    <a:p>
-                      <a:pPr algn="r">
-                        <a:defRPr>
-                          <a:latin typeface="Roboto"/>
-                        </a:defRPr>
-                      </a:pPr>
-                      <a:r>
-                        <a:rPr sz="1050">
-                          <a:solidFill>
-                            <a:srgbClr val="25342A"/>
-                          </a:solidFill>
-                          <a:latin typeface="Roboto"/>
-                        </a:rPr>
-                        <a:t>2</a:t>
-                      </a:r>
-                    </a:p>
-                  </a:txBody>
-                  <a:tcPr>
-                    <a:solidFill>
-                      <a:srgbClr val="F7FAF7"/>
-                    </a:solidFill>
-                  </a:tcPr>
-                </a:tc>
-                <a:tc>
-                  <a:txBody>
-                    <a:bodyPr/>
-                    <a:lstStyle/>
-                    <a:p>
-                      <a:pPr algn="r">
-                        <a:defRPr>
-                          <a:latin typeface="Roboto"/>
-                        </a:defRPr>
-                      </a:pPr>
-                      <a:r>
-                        <a:rPr sz="1050">
-                          <a:solidFill>
-                            <a:srgbClr val="25342A"/>
-                          </a:solidFill>
-                          <a:latin typeface="Roboto"/>
-                        </a:rPr>
-                        <a:t>6</a:t>
-                      </a:r>
-                    </a:p>
-                  </a:txBody>
-                  <a:tcPr>
-                    <a:solidFill>
-                      <a:srgbClr val="F7FAF7"/>
-                    </a:solidFill>
-                  </a:tcPr>
-                </a:tc>
-              </a:tr>
-              <a:tr h="310896">
-                <a:tc>
-                  <a:txBody>
-                    <a:bodyPr/>
-                    <a:lstStyle/>
-                    <a:p>
-                      <a:pPr algn="l">
-                        <a:defRPr>
-                          <a:latin typeface="Roboto"/>
-                        </a:defRPr>
-                      </a:pPr>
-                      <a:r>
-                        <a:rPr sz="1050">
-                          <a:solidFill>
-                            <a:srgbClr val="25342A"/>
-                          </a:solidFill>
-                          <a:latin typeface="Roboto"/>
-                        </a:rPr>
-                        <a:t>Call-out 27, August</a:t>
-                      </a:r>
-                    </a:p>
-                  </a:txBody>
-                  <a:tcPr>
-                    <a:solidFill>
-                      <a:srgbClr val="FFFFFF"/>
-                    </a:solidFill>
-                  </a:tcPr>
-                </a:tc>
-                <a:tc>
-                  <a:txBody>
-                    <a:bodyPr/>
-                    <a:lstStyle/>
-                    <a:p>
-                      <a:pPr algn="l">
-                        <a:defRPr>
-                          <a:latin typeface="Roboto"/>
-                        </a:defRPr>
-                      </a:pPr>
-                      <a:r>
-                        <a:rPr sz="1050">
-                          <a:solidFill>
-                            <a:srgbClr val="25342A"/>
-                          </a:solidFill>
-                          <a:latin typeface="Roboto"/>
-                        </a:rPr>
-                        <a:t>3 Aug</a:t>
-                      </a:r>
-                    </a:p>
-                  </a:txBody>
-                  <a:tcPr>
-                    <a:solidFill>
-                      <a:srgbClr val="FFFFFF"/>
-                    </a:solidFill>
-                  </a:tcPr>
-                </a:tc>
-                <a:tc>
-                  <a:txBody>
-                    <a:bodyPr/>
-                    <a:lstStyle/>
-                    <a:p>
-                      <a:pPr algn="r">
-                        <a:defRPr>
-                          <a:latin typeface="Roboto"/>
-                        </a:defRPr>
-                      </a:pPr>
-                      <a:r>
-                        <a:rPr sz="1050">
-                          <a:solidFill>
-                            <a:srgbClr val="25342A"/>
-                          </a:solidFill>
-                          <a:latin typeface="Roboto"/>
-                        </a:rPr>
-                        <a:t>$571</a:t>
-                      </a:r>
-                    </a:p>
-                  </a:txBody>
-                  <a:tcPr>
-                    <a:solidFill>
-                      <a:srgbClr val="FFFFFF"/>
-                    </a:solidFill>
-                  </a:tcPr>
-                </a:tc>
-                <a:tc>
-                  <a:txBody>
-                    <a:bodyPr/>
-                    <a:lstStyle/>
-                    <a:p>
-                      <a:pPr algn="r">
-                        <a:defRPr>
-                          <a:latin typeface="Roboto"/>
-                        </a:defRPr>
-                      </a:pPr>
-                      <a:r>
-                        <a:rPr sz="1050">
-                          <a:solidFill>
-                            <a:srgbClr val="25342A"/>
-                          </a:solidFill>
-                          <a:latin typeface="Roboto"/>
-                        </a:rPr>
-                        <a:t>2</a:t>
-                      </a:r>
-                    </a:p>
-                  </a:txBody>
-                  <a:tcPr>
-                    <a:solidFill>
-                      <a:srgbClr val="FFFFFF"/>
-                    </a:solidFill>
-                  </a:tcPr>
-                </a:tc>
-                <a:tc>
-                  <a:txBody>
-                    <a:bodyPr/>
-                    <a:lstStyle/>
-                    <a:p>
-                      <a:pPr algn="r">
-                        <a:defRPr>
-                          <a:latin typeface="Roboto"/>
-                        </a:defRPr>
-                      </a:pPr>
-                      <a:r>
-                        <a:rPr sz="1050">
-                          <a:solidFill>
-                            <a:srgbClr val="25342A"/>
-                          </a:solidFill>
-                          <a:latin typeface="Roboto"/>
-                        </a:rPr>
-                        <a:t>28</a:t>
-                      </a:r>
-                    </a:p>
-                  </a:txBody>
-                  <a:tcPr>
-                    <a:solidFill>
-                      <a:srgbClr val="FFFFFF"/>
-                    </a:solidFill>
-                  </a:tcPr>
-                </a:tc>
-              </a:tr>
-              <a:tr h="310896">
-                <a:tc>
-                  <a:txBody>
-                    <a:bodyPr/>
-                    <a:lstStyle/>
-                    <a:p>
-                      <a:pPr algn="l">
-                        <a:defRPr>
-                          <a:latin typeface="Roboto"/>
-                        </a:defRPr>
-                      </a:pPr>
-                      <a:r>
-                        <a:rPr sz="1050">
-                          <a:solidFill>
-                            <a:srgbClr val="25342A"/>
-                          </a:solidFill>
-                          <a:latin typeface="Roboto"/>
-                        </a:rPr>
-                        <a:t>Call-out 5, August</a:t>
-                      </a:r>
-                    </a:p>
-                  </a:txBody>
-                  <a:tcPr>
-                    <a:solidFill>
-                      <a:srgbClr val="F7FAF7"/>
-                    </a:solidFill>
-                  </a:tcPr>
-                </a:tc>
-                <a:tc>
-                  <a:txBody>
-                    <a:bodyPr/>
-                    <a:lstStyle/>
-                    <a:p>
-                      <a:pPr algn="l">
-                        <a:defRPr>
-                          <a:latin typeface="Roboto"/>
-                        </a:defRPr>
-                      </a:pPr>
-                      <a:r>
-                        <a:rPr sz="1050">
-                          <a:solidFill>
-                            <a:srgbClr val="25342A"/>
-                          </a:solidFill>
-                          <a:latin typeface="Roboto"/>
-                        </a:rPr>
-                        <a:t>26 Aug</a:t>
-                      </a:r>
-                    </a:p>
-                  </a:txBody>
-                  <a:tcPr>
-                    <a:solidFill>
-                      <a:srgbClr val="F7FAF7"/>
-                    </a:solidFill>
-                  </a:tcPr>
-                </a:tc>
-                <a:tc>
-                  <a:txBody>
-                    <a:bodyPr/>
-                    <a:lstStyle/>
-                    <a:p>
-                      <a:pPr algn="r">
-                        <a:defRPr>
-                          <a:latin typeface="Roboto"/>
-                        </a:defRPr>
-                      </a:pPr>
-                      <a:r>
-                        <a:rPr sz="1050">
-                          <a:solidFill>
-                            <a:srgbClr val="25342A"/>
-                          </a:solidFill>
-                          <a:latin typeface="Roboto"/>
-                        </a:rPr>
-                        <a:t>$493</a:t>
-                      </a:r>
-                    </a:p>
-                  </a:txBody>
-                  <a:tcPr>
-                    <a:solidFill>
-                      <a:srgbClr val="F7FAF7"/>
-                    </a:solidFill>
-                  </a:tcPr>
-                </a:tc>
-                <a:tc>
-                  <a:txBody>
-                    <a:bodyPr/>
-                    <a:lstStyle/>
-                    <a:p>
-                      <a:pPr algn="r">
-                        <a:defRPr>
-                          <a:latin typeface="Roboto"/>
-                        </a:defRPr>
-                      </a:pPr>
-                      <a:r>
-                        <a:rPr sz="1050">
-                          <a:solidFill>
-                            <a:srgbClr val="25342A"/>
-                          </a:solidFill>
-                          <a:latin typeface="Roboto"/>
-                        </a:rPr>
-                        <a:t>2</a:t>
-                      </a:r>
-                    </a:p>
-                  </a:txBody>
-                  <a:tcPr>
-                    <a:solidFill>
-                      <a:srgbClr val="F7FAF7"/>
-                    </a:solidFill>
-                  </a:tcPr>
-                </a:tc>
-                <a:tc>
-                  <a:txBody>
-                    <a:bodyPr/>
-                    <a:lstStyle/>
-                    <a:p>
-                      <a:pPr algn="r">
-                        <a:defRPr>
-                          <a:latin typeface="Roboto"/>
-                        </a:defRPr>
-                      </a:pPr>
-                      <a:r>
-                        <a:rPr sz="1050">
-                          <a:solidFill>
-                            <a:srgbClr val="25342A"/>
-                          </a:solidFill>
-                          <a:latin typeface="Roboto"/>
-                        </a:rPr>
-                        <a:t>5</a:t>
-                      </a:r>
-                    </a:p>
-                  </a:txBody>
-                  <a:tcPr>
-                    <a:solidFill>
-                      <a:srgbClr val="F7FAF7"/>
                     </a:solidFill>
                   </a:tcPr>
                 </a:tc>
@@ -13164,7 +14063,7 @@
                 </a:solidFill>
                 <a:latin typeface="Roboto"/>
               </a:rPr>
-              <a:t>Data retrieved 2pm, Tue 6 Oct 2026 · Generated 8 Oct 2026, 9:35am · Sample data · Made with Python (python-pptx)</a:t>
+              <a:t>Data retrieved 2pm, Tue 6 Oct 2026 · Generated 9 Oct 2026, 8:41am · Sample data · Made with Python (python-pptx)</a:t>
             </a:r>
           </a:p>
         </p:txBody>

--- a/media/exports/reports/2026-08/cash-payroll.pptx
+++ b/media/exports/reports/2026-08/cash-payroll.pptx
@@ -5398,7 +5398,7 @@
                 </a:solidFill>
                 <a:latin typeface="Roboto"/>
               </a:rPr>
-              <a:t>Data retrieved 2pm, Tue 6 Oct 2026 · Generated 9 Oct 2026, 8:41am · Sample data · Made with Python (python-pptx)</a:t>
+              <a:t>Data retrieved 2pm, Tue 6 Oct 2026 · Generated 9 Oct 2026, 1:20pm · Sample data · Made with Python (python-pptx)</a:t>
             </a:r>
           </a:p>
         </p:txBody>
@@ -6706,7 +6706,7 @@
                 </a:solidFill>
                 <a:latin typeface="Roboto"/>
               </a:rPr>
-              <a:t>Data retrieved 2pm, Tue 6 Oct 2026 · Generated 9 Oct 2026, 8:41am · Sample data · Made with Python (python-pptx)</a:t>
+              <a:t>Data retrieved 2pm, Tue 6 Oct 2026 · Generated 9 Oct 2026, 1:20pm · Sample data · Made with Python (python-pptx)</a:t>
             </a:r>
           </a:p>
         </p:txBody>
@@ -7021,7 +7021,7 @@
                 </a:solidFill>
                 <a:latin typeface="Roboto"/>
               </a:rPr>
-              <a:t>Data retrieved 2pm, Tue 6 Oct 2026 · Generated 9 Oct 2026, 8:41am · Sample data · Made with Python (python-pptx)</a:t>
+              <a:t>Data retrieved 2pm, Tue 6 Oct 2026 · Generated 9 Oct 2026, 1:20pm · Sample data · Made with Python (python-pptx)</a:t>
             </a:r>
           </a:p>
         </p:txBody>
@@ -11160,7 +11160,7 @@
                 </a:solidFill>
                 <a:latin typeface="Roboto"/>
               </a:rPr>
-              <a:t>Data retrieved 2pm, Tue 6 Oct 2026 · Generated 9 Oct 2026, 8:41am · Sample data · Made with Python (python-pptx)</a:t>
+              <a:t>Data retrieved 2pm, Tue 6 Oct 2026 · Generated 9 Oct 2026, 1:20pm · Sample data · Made with Python (python-pptx)</a:t>
             </a:r>
           </a:p>
         </p:txBody>
@@ -12073,7 +12073,7 @@
                           </a:solidFill>
                           <a:latin typeface="Roboto"/>
                         </a:rPr>
-                        <a:t>Call-out 1, August</a:t>
+                        <a:t>Call-out CO-49132</a:t>
                       </a:r>
                     </a:p>
                   </a:txBody>
@@ -12210,7 +12210,7 @@
                           </a:solidFill>
                           <a:latin typeface="Roboto"/>
                         </a:rPr>
-                        <a:t>Call-out 16, August</a:t>
+                        <a:t>Call-out CO-49149</a:t>
                       </a:r>
                     </a:p>
                   </a:txBody>
@@ -12347,7 +12347,7 @@
                           </a:solidFill>
                           <a:latin typeface="Roboto"/>
                         </a:rPr>
-                        <a:t>Call-out 14, August</a:t>
+                        <a:t>Call-out CO-49147</a:t>
                       </a:r>
                     </a:p>
                   </a:txBody>
@@ -12484,7 +12484,7 @@
                           </a:solidFill>
                           <a:latin typeface="Roboto"/>
                         </a:rPr>
-                        <a:t>Call-out 38, August</a:t>
+                        <a:t>Call-out CO-49175</a:t>
                       </a:r>
                     </a:p>
                   </a:txBody>
@@ -12621,7 +12621,7 @@
                           </a:solidFill>
                           <a:latin typeface="Roboto"/>
                         </a:rPr>
-                        <a:t>Call-out 27, August</a:t>
+                        <a:t>Call-out CO-49162</a:t>
                       </a:r>
                     </a:p>
                   </a:txBody>
@@ -12758,7 +12758,7 @@
                           </a:solidFill>
                           <a:latin typeface="Roboto"/>
                         </a:rPr>
-                        <a:t>Call-out 5, August</a:t>
+                        <a:t>Call-out CO-49136</a:t>
                       </a:r>
                     </a:p>
                   </a:txBody>
@@ -12895,7 +12895,7 @@
                           </a:solidFill>
                           <a:latin typeface="Roboto"/>
                         </a:rPr>
-                        <a:t>Call-out 39, August</a:t>
+                        <a:t>Call-out CO-49176</a:t>
                       </a:r>
                     </a:p>
                   </a:txBody>
@@ -13032,7 +13032,7 @@
                           </a:solidFill>
                           <a:latin typeface="Roboto"/>
                         </a:rPr>
-                        <a:t>Call-out 22, August</a:t>
+                        <a:t>Call-out CO-49156</a:t>
                       </a:r>
                     </a:p>
                   </a:txBody>
@@ -13169,7 +13169,7 @@
                           </a:solidFill>
                           <a:latin typeface="Roboto"/>
                         </a:rPr>
-                        <a:t>Call-out 43, August</a:t>
+                        <a:t>Call-out CO-49181</a:t>
                       </a:r>
                     </a:p>
                   </a:txBody>
@@ -13306,7 +13306,7 @@
                           </a:solidFill>
                           <a:latin typeface="Roboto"/>
                         </a:rPr>
-                        <a:t>Call-out 10, August</a:t>
+                        <a:t>Call-out CO-49142</a:t>
                       </a:r>
                     </a:p>
                   </a:txBody>
@@ -13502,7 +13502,7 @@
                 </a:solidFill>
                 <a:latin typeface="Roboto"/>
               </a:rPr>
-              <a:t>Data retrieved 2pm, Tue 6 Oct 2026 · Generated 9 Oct 2026, 8:41am · Sample data · Made with Python (python-pptx)</a:t>
+              <a:t>Data retrieved 2pm, Tue 6 Oct 2026 · Generated 9 Oct 2026, 1:20pm · Sample data · Made with Python (python-pptx)</a:t>
             </a:r>
           </a:p>
         </p:txBody>
@@ -13867,7 +13867,7 @@
                           </a:solidFill>
                           <a:latin typeface="Roboto"/>
                         </a:rPr>
-                        <a:t>Call-out 44, August</a:t>
+                        <a:t>Call-out CO-49182</a:t>
                       </a:r>
                     </a:p>
                   </a:txBody>
@@ -14063,7 +14063,7 @@
                 </a:solidFill>
                 <a:latin typeface="Roboto"/>
               </a:rPr>
-              <a:t>Data retrieved 2pm, Tue 6 Oct 2026 · Generated 9 Oct 2026, 8:41am · Sample data · Made with Python (python-pptx)</a:t>
+              <a:t>Data retrieved 2pm, Tue 6 Oct 2026 · Generated 9 Oct 2026, 1:20pm · Sample data · Made with Python (python-pptx)</a:t>
             </a:r>
           </a:p>
         </p:txBody>

--- a/media/exports/reports/2026-08/cash-payroll.pptx
+++ b/media/exports/reports/2026-08/cash-payroll.pptx
@@ -1633,7 +1633,7 @@
           <a:lstStyle/>
           <a:p>
             <a:r>
-              <a:t>Will cash cover payroll next month?. Sample Electrical &amp; Air Pty Ltd. Period: August 2026. A 13-week cash forecast from 31 August: cash at bank, plus what customers owe on their usual payment dates and new work at its recent rate, less pay runs, supplier bills, the BAS and finance on their due dates. Every day opens its workings.</a:t>
+              <a:t>Will cash cover payroll next month?. Sample Electrical &amp; Air Pty Ltd. Period: August 2026. In short: Yes: $56,248 forecast in the bank after the 3 September pay run, the tightest in September, and at least one pay run in reserve for all 13 weeks. A 13-week cash forecast from 31 August: cash at bank, plus what customers owe on their usual payment dates and new work at its recent rate, less pay runs, supplier bills, the BAS and finance on their due dates. Every day opens its workings.</a:t>
             </a:r>
           </a:p>
         </p:txBody>
@@ -5208,7 +5208,7 @@
         <p:spPr>
           <a:xfrm>
             <a:off x="457200" y="3703320"/>
-            <a:ext cx="11277295" cy="758190"/>
+            <a:ext cx="11277295" cy="980440"/>
           </a:xfrm>
           <a:prstGeom prst="rect">
             <a:avLst/>
@@ -5233,7 +5233,7 @@
                 </a:solidFill>
                 <a:latin typeface="Roboto"/>
               </a:rPr>
-              <a:t>Period: August 2026. A 13-week cash forecast from 31 August: cash at bank, plus what customers owe on their usual payment dates and new work at its recent rate, less pay runs, supplier bills, the BAS and finance on their due dates. Every day opens its workings.</a:t>
+              <a:t>Period: August 2026. In short: Yes: $56,248 forecast in the bank after the 3 September pay run, the tightest in September, and at least one pay run in reserve for all 13 weeks. A 13-week cash forecast from 31 August: cash at bank, plus what customers owe on their usual payment dates and new work at its recent rate, less pay runs, supplier bills, the BAS and finance on their due dates. Every day opens its workings.</a:t>
             </a:r>
           </a:p>
         </p:txBody>
@@ -5246,7 +5246,7 @@
         </p:nvSpPr>
         <p:spPr>
           <a:xfrm>
-            <a:off x="457200" y="4552950"/>
+            <a:off x="457200" y="4775200"/>
             <a:ext cx="11277295" cy="1097280"/>
           </a:xfrm>
           <a:prstGeom prst="rect">
@@ -5398,7 +5398,7 @@
                 </a:solidFill>
                 <a:latin typeface="Roboto"/>
               </a:rPr>
-              <a:t>Data retrieved 2pm, Tue 6 Oct 2026 · Generated 9 Oct 2026, 1:20pm · Sample data · Made with Python (python-pptx)</a:t>
+              <a:t>Data retrieved 2pm, Tue 6 Oct 2026 · Generated 10 Oct 2026, 9:55pm · Sample data · Made with Python (python-pptx)</a:t>
             </a:r>
           </a:p>
         </p:txBody>
@@ -6706,7 +6706,7 @@
                 </a:solidFill>
                 <a:latin typeface="Roboto"/>
               </a:rPr>
-              <a:t>Data retrieved 2pm, Tue 6 Oct 2026 · Generated 9 Oct 2026, 1:20pm · Sample data · Made with Python (python-pptx)</a:t>
+              <a:t>Data retrieved 2pm, Tue 6 Oct 2026 · Generated 10 Oct 2026, 9:55pm · Sample data · Made with Python (python-pptx)</a:t>
             </a:r>
           </a:p>
         </p:txBody>
@@ -7021,7 +7021,7 @@
                 </a:solidFill>
                 <a:latin typeface="Roboto"/>
               </a:rPr>
-              <a:t>Data retrieved 2pm, Tue 6 Oct 2026 · Generated 9 Oct 2026, 1:20pm · Sample data · Made with Python (python-pptx)</a:t>
+              <a:t>Data retrieved 2pm, Tue 6 Oct 2026 · Generated 10 Oct 2026, 9:55pm · Sample data · Made with Python (python-pptx)</a:t>
             </a:r>
           </a:p>
         </p:txBody>
@@ -11160,7 +11160,7 @@
                 </a:solidFill>
                 <a:latin typeface="Roboto"/>
               </a:rPr>
-              <a:t>Data retrieved 2pm, Tue 6 Oct 2026 · Generated 9 Oct 2026, 1:20pm · Sample data · Made with Python (python-pptx)</a:t>
+              <a:t>Data retrieved 2pm, Tue 6 Oct 2026 · Generated 10 Oct 2026, 9:55pm · Sample data · Made with Python (python-pptx)</a:t>
             </a:r>
           </a:p>
         </p:txBody>
@@ -13502,7 +13502,7 @@
                 </a:solidFill>
                 <a:latin typeface="Roboto"/>
               </a:rPr>
-              <a:t>Data retrieved 2pm, Tue 6 Oct 2026 · Generated 9 Oct 2026, 1:20pm · Sample data · Made with Python (python-pptx)</a:t>
+              <a:t>Data retrieved 2pm, Tue 6 Oct 2026 · Generated 10 Oct 2026, 9:55pm · Sample data · Made with Python (python-pptx)</a:t>
             </a:r>
           </a:p>
         </p:txBody>
@@ -14063,7 +14063,7 @@
                 </a:solidFill>
                 <a:latin typeface="Roboto"/>
               </a:rPr>
-              <a:t>Data retrieved 2pm, Tue 6 Oct 2026 · Generated 9 Oct 2026, 1:20pm · Sample data · Made with Python (python-pptx)</a:t>
+              <a:t>Data retrieved 2pm, Tue 6 Oct 2026 · Generated 10 Oct 2026, 9:55pm · Sample data · Made with Python (python-pptx)</a:t>
             </a:r>
           </a:p>
         </p:txBody>
